--- a/output/wordlabs-direct-3day.pptx
+++ b/output/wordlabs-direct-3day.pptx
@@ -4240,7 +4240,7 @@
                 <a:ea typeface="Calibri" pitchFamily="34" charset="-122"/>
                 <a:cs typeface="Calibri" pitchFamily="34" charset="-120"/>
               </a:rPr>
-              <a:t>"straight, guide, manage"</a:t>
+              <a:t>"straight, guide, lead"</a:t>
             </a:r>
             <a:endParaRPr lang="en-US" sz="2200" dirty="0"/>
           </a:p>
@@ -5288,7 +5288,7 @@
                 <a:ea typeface="Calibri" pitchFamily="34" charset="-122"/>
                 <a:cs typeface="Calibri" pitchFamily="34" charset="-120"/>
               </a:rPr>
-              <a:t>Word Labs  •  wordlabs.app  •  Root: 'direct' = straight, guide, manage</a:t>
+              <a:t>Word Labs  •  wordlabs.app  •  Root: 'direct' = straight, guide, lead</a:t>
             </a:r>
             <a:endParaRPr lang="en-US" sz="800" dirty="0"/>
           </a:p>
@@ -5928,7 +5928,7 @@
                 <a:ea typeface="Calibri" pitchFamily="34" charset="-122"/>
                 <a:cs typeface="Calibri" pitchFamily="34" charset="-120"/>
               </a:rPr>
-              <a:t>Word Labs  •  wordlabs.app  •  Root: 'direct' = straight, guide, manage</a:t>
+              <a:t>Word Labs  •  wordlabs.app  •  Root: 'direct' = straight, guide, lead</a:t>
             </a:r>
             <a:endParaRPr lang="en-US" sz="800" dirty="0"/>
           </a:p>
@@ -6071,7 +6071,7 @@
                 <a:ea typeface="Calibri" pitchFamily="34" charset="-122"/>
                 <a:cs typeface="Calibri" pitchFamily="34" charset="-120"/>
               </a:rPr>
-              <a:t> spoke </a:t>
+              <a:t> gave clear </a:t>
             </a:r>
             <a:pPr algn="l" indent="0" marL="0">
               <a:buNone/>
@@ -6088,7 +6088,7 @@
                 <a:ea typeface="Calibri" pitchFamily="34" charset="-122"/>
                 <a:cs typeface="Calibri" pitchFamily="34" charset="-120"/>
               </a:rPr>
-              <a:t>directly</a:t>
+              <a:t>directions</a:t>
             </a:r>
             <a:pPr algn="l" indent="0" marL="0">
               <a:buNone/>
@@ -6102,7 +6102,7 @@
                 <a:ea typeface="Calibri" pitchFamily="34" charset="-122"/>
                 <a:cs typeface="Calibri" pitchFamily="34" charset="-120"/>
               </a:rPr>
-              <a:t> to the audience at the end of the show.</a:t>
+              <a:t> so that everyone knew exactly where to go.</a:t>
             </a:r>
             <a:endParaRPr lang="en-US" sz="1800" dirty="0"/>
           </a:p>
@@ -6385,7 +6385,7 @@
                 <a:ea typeface="Trebuchet MS" pitchFamily="34" charset="-122"/>
                 <a:cs typeface="Trebuchet MS" pitchFamily="34" charset="-120"/>
               </a:rPr>
-              <a:t>directly</a:t>
+              <a:t>directions</a:t>
             </a:r>
             <a:endParaRPr lang="en-US" sz="1400" dirty="0"/>
           </a:p>
@@ -6716,7 +6716,7 @@
                 <a:ea typeface="Calibri" pitchFamily="34" charset="-122"/>
                 <a:cs typeface="Calibri" pitchFamily="34" charset="-120"/>
               </a:rPr>
-              <a:t>Word Labs  •  wordlabs.app  •  Root: 'direct' = straight, guide, manage</a:t>
+              <a:t>Word Labs  •  wordlabs.app  •  Root: 'direct' = straight, guide, lead</a:t>
             </a:r>
             <a:endParaRPr lang="en-US" sz="800" dirty="0"/>
           </a:p>
@@ -7543,7 +7543,7 @@
                 <a:ea typeface="Calibri" pitchFamily="34" charset="-122"/>
                 <a:cs typeface="Calibri" pitchFamily="34" charset="-120"/>
               </a:rPr>
-              <a:t>Word Labs  •  wordlabs.app  •  Root: 'direct' = straight, guide, manage</a:t>
+              <a:t>Word Labs  •  wordlabs.app  •  Root: 'direct' = straight, guide, lead</a:t>
             </a:r>
             <a:endParaRPr lang="en-US" sz="800" dirty="0"/>
           </a:p>
@@ -7860,7 +7860,7 @@
                 <a:ea typeface="Calibri" pitchFamily="34" charset="-122"/>
                 <a:cs typeface="Calibri" pitchFamily="34" charset="-120"/>
               </a:rPr>
-              <a:t>to guide or go straight</a:t>
+              <a:t>to guide or lead straight</a:t>
             </a:r>
             <a:endParaRPr lang="en-US" sz="850" dirty="0"/>
           </a:p>
@@ -7972,7 +7972,7 @@
                 <a:ea typeface="Calibri" pitchFamily="34" charset="-122"/>
                 <a:cs typeface="Calibri" pitchFamily="34" charset="-120"/>
               </a:rPr>
-              <a:t>person who does something</a:t>
+              <a:t>a person who does something</a:t>
             </a:r>
             <a:endParaRPr lang="en-US" sz="850" dirty="0"/>
           </a:p>
@@ -8528,7 +8528,7 @@
                 <a:ea typeface="Calibri" pitchFamily="34" charset="-122"/>
                 <a:cs typeface="Calibri" pitchFamily="34" charset="-120"/>
               </a:rPr>
-              <a:t>Word Labs  •  wordlabs.app  •  Root: 'direct' = straight, guide, manage</a:t>
+              <a:t>Word Labs  •  wordlabs.app  •  Root: 'direct' = straight, guide, lead</a:t>
             </a:r>
             <a:endParaRPr lang="en-US" sz="800" dirty="0"/>
           </a:p>
@@ -8845,7 +8845,7 @@
                 <a:ea typeface="Calibri" pitchFamily="34" charset="-122"/>
                 <a:cs typeface="Calibri" pitchFamily="34" charset="-120"/>
               </a:rPr>
-              <a:t>to guide or go straight</a:t>
+              <a:t>to guide or lead straight</a:t>
             </a:r>
             <a:endParaRPr lang="en-US" sz="850" dirty="0"/>
           </a:p>
@@ -8957,7 +8957,7 @@
                 <a:ea typeface="Calibri" pitchFamily="34" charset="-122"/>
                 <a:cs typeface="Calibri" pitchFamily="34" charset="-120"/>
               </a:rPr>
-              <a:t>person who does something</a:t>
+              <a:t>a person who does something</a:t>
             </a:r>
             <a:endParaRPr lang="en-US" sz="850" dirty="0"/>
           </a:p>
@@ -9750,7 +9750,7 @@
                 <a:ea typeface="Calibri" pitchFamily="34" charset="-122"/>
                 <a:cs typeface="Calibri" pitchFamily="34" charset="-120"/>
               </a:rPr>
-              <a:t>Word Labs  •  wordlabs.app  •  Root: 'direct' = straight, guide, manage</a:t>
+              <a:t>Word Labs  •  wordlabs.app  •  Root: 'direct' = straight, guide, lead</a:t>
             </a:r>
             <a:endParaRPr lang="en-US" sz="800" dirty="0"/>
           </a:p>
@@ -10067,7 +10067,7 @@
                 <a:ea typeface="Calibri" pitchFamily="34" charset="-122"/>
                 <a:cs typeface="Calibri" pitchFamily="34" charset="-120"/>
               </a:rPr>
-              <a:t>to guide or go straight</a:t>
+              <a:t>to guide or lead straight</a:t>
             </a:r>
             <a:endParaRPr lang="en-US" sz="850" dirty="0"/>
           </a:p>
@@ -10179,7 +10179,7 @@
                 <a:ea typeface="Calibri" pitchFamily="34" charset="-122"/>
                 <a:cs typeface="Calibri" pitchFamily="34" charset="-120"/>
               </a:rPr>
-              <a:t>person who does something</a:t>
+              <a:t>a person who does something</a:t>
             </a:r>
             <a:endParaRPr lang="en-US" sz="850" dirty="0"/>
           </a:p>
@@ -11434,7 +11434,7 @@
                 <a:ea typeface="Calibri" pitchFamily="34" charset="-122"/>
                 <a:cs typeface="Calibri" pitchFamily="34" charset="-120"/>
               </a:rPr>
-              <a:t>Word Labs  •  wordlabs.app  •  Root: 'direct' = straight, guide, manage</a:t>
+              <a:t>Word Labs  •  wordlabs.app  •  Root: 'direct' = straight, guide, lead</a:t>
             </a:r>
             <a:endParaRPr lang="en-US" sz="800" dirty="0"/>
           </a:p>
@@ -11573,7 +11573,7 @@
                 <a:ea typeface="Trebuchet MS" pitchFamily="34" charset="-122"/>
                 <a:cs typeface="Trebuchet MS" pitchFamily="34" charset="-120"/>
               </a:rPr>
-              <a:t>directly</a:t>
+              <a:t>directions</a:t>
             </a:r>
             <a:endParaRPr lang="en-US" sz="2800" dirty="0"/>
           </a:p>
@@ -12261,7 +12261,7 @@
                 <a:ea typeface="Calibri" pitchFamily="34" charset="-122"/>
                 <a:cs typeface="Calibri" pitchFamily="34" charset="-120"/>
               </a:rPr>
-              <a:t>Word Labs  •  wordlabs.app  •  Root: 'direct' = straight, guide, manage</a:t>
+              <a:t>Word Labs  •  wordlabs.app  •  Root: 'direct' = straight, guide, lead</a:t>
             </a:r>
             <a:endParaRPr lang="en-US" sz="800" dirty="0"/>
           </a:p>
@@ -12400,7 +12400,7 @@
                 <a:ea typeface="Trebuchet MS" pitchFamily="34" charset="-122"/>
                 <a:cs typeface="Trebuchet MS" pitchFamily="34" charset="-120"/>
               </a:rPr>
-              <a:t>directly</a:t>
+              <a:t>directions</a:t>
             </a:r>
             <a:endParaRPr lang="en-US" sz="2800" dirty="0"/>
           </a:p>
@@ -12480,7 +12480,7 @@
         </p:nvSpPr>
         <p:spPr>
           <a:xfrm>
-            <a:off x="2938272" y="2258568"/>
+            <a:off x="2221992" y="2258568"/>
             <a:ext cx="1828800" cy="292608"/>
           </a:xfrm>
           <a:prstGeom prst="rect">
@@ -12514,7 +12514,7 @@
         </p:nvSpPr>
         <p:spPr>
           <a:xfrm>
-            <a:off x="2938272" y="2258568"/>
+            <a:off x="2221992" y="2258568"/>
             <a:ext cx="1828800" cy="292608"/>
           </a:xfrm>
           <a:prstGeom prst="rect">
@@ -12553,7 +12553,7 @@
         </p:nvSpPr>
         <p:spPr>
           <a:xfrm>
-            <a:off x="2938272" y="2569464"/>
+            <a:off x="2221992" y="2569464"/>
             <a:ext cx="1828800" cy="201168"/>
           </a:xfrm>
           <a:prstGeom prst="rect">
@@ -12578,7 +12578,7 @@
                 <a:ea typeface="Calibri" pitchFamily="34" charset="-122"/>
                 <a:cs typeface="Calibri" pitchFamily="34" charset="-120"/>
               </a:rPr>
-              <a:t>to guide or go straight</a:t>
+              <a:t>to guide or lead straight</a:t>
             </a:r>
             <a:endParaRPr lang="en-US" sz="850" dirty="0"/>
           </a:p>
@@ -12592,7 +12592,7 @@
         </p:nvSpPr>
         <p:spPr>
           <a:xfrm>
-            <a:off x="5803392" y="2258568"/>
+            <a:off x="4370832" y="2258568"/>
             <a:ext cx="1828800" cy="292608"/>
           </a:xfrm>
           <a:prstGeom prst="rect">
@@ -12626,7 +12626,7 @@
         </p:nvSpPr>
         <p:spPr>
           <a:xfrm>
-            <a:off x="5803392" y="2258568"/>
+            <a:off x="4370832" y="2258568"/>
             <a:ext cx="1828800" cy="292608"/>
           </a:xfrm>
           <a:prstGeom prst="rect">
@@ -12651,7 +12651,7 @@
                 <a:ea typeface="Trebuchet MS" pitchFamily="34" charset="-122"/>
                 <a:cs typeface="Trebuchet MS" pitchFamily="34" charset="-120"/>
               </a:rPr>
-              <a:t>ly</a:t>
+              <a:t>ion</a:t>
             </a:r>
             <a:endParaRPr lang="en-US" sz="1300" dirty="0"/>
           </a:p>
@@ -12665,7 +12665,7 @@
         </p:nvSpPr>
         <p:spPr>
           <a:xfrm>
-            <a:off x="5803392" y="2569464"/>
+            <a:off x="4370832" y="2569464"/>
             <a:ext cx="1828800" cy="201168"/>
           </a:xfrm>
           <a:prstGeom prst="rect">
@@ -12690,7 +12690,7 @@
                 <a:ea typeface="Calibri" pitchFamily="34" charset="-122"/>
                 <a:cs typeface="Calibri" pitchFamily="34" charset="-120"/>
               </a:rPr>
-              <a:t>in a certain way</a:t>
+              <a:t>the act or result of</a:t>
             </a:r>
             <a:endParaRPr lang="en-US" sz="850" dirty="0"/>
           </a:p>
@@ -12699,6 +12699,118 @@
       <p:sp>
         <p:nvSpPr>
           <p:cNvPr id="22" name="Shape 20"/>
+          <p:cNvSpPr/>
+          <p:nvPr/>
+        </p:nvSpPr>
+        <p:spPr>
+          <a:xfrm>
+            <a:off x="6519672" y="2258568"/>
+            <a:ext cx="1828800" cy="292608"/>
+          </a:xfrm>
+          <a:prstGeom prst="rect">
+            <a:avLst>
+              <a:gd name="adj" fmla="val 25000"/>
+            </a:avLst>
+          </a:prstGeom>
+          <a:solidFill>
+            <a:srgbClr val="FCE7F3"/>
+          </a:solidFill>
+          <a:ln w="19050">
+            <a:solidFill>
+              <a:srgbClr val="DB2777"/>
+            </a:solidFill>
+            <a:prstDash val="solid"/>
+          </a:ln>
+          <a:effectLst>
+            <a:outerShdw sx="100000" sy="100000" kx="0" ky="0" algn="bl" rotWithShape="0" blurRad="101600" dist="38100" dir="8100000">
+              <a:srgbClr val="000000">
+                <a:alpha val="12000"/>
+              </a:srgbClr>
+            </a:outerShdw>
+          </a:effectLst>
+        </p:spPr>
+      </p:sp>
+      <p:sp>
+        <p:nvSpPr>
+          <p:cNvPr id="23" name="Text 21"/>
+          <p:cNvSpPr/>
+          <p:nvPr/>
+        </p:nvSpPr>
+        <p:spPr>
+          <a:xfrm>
+            <a:off x="6519672" y="2258568"/>
+            <a:ext cx="1828800" cy="292608"/>
+          </a:xfrm>
+          <a:prstGeom prst="rect">
+            <a:avLst/>
+          </a:prstGeom>
+          <a:noFill/>
+          <a:ln/>
+        </p:spPr>
+        <p:txBody>
+          <a:bodyPr wrap="square" lIns="0" tIns="0" rIns="0" bIns="0" rtlCol="0" anchor="ctr"/>
+          <a:lstStyle/>
+          <a:p>
+            <a:pPr algn="ctr" indent="0" marL="0">
+              <a:buNone/>
+            </a:pPr>
+            <a:r>
+              <a:rPr lang="en-US" sz="1300" b="1" dirty="0">
+                <a:solidFill>
+                  <a:srgbClr val="9D174D"/>
+                </a:solidFill>
+                <a:latin typeface="Trebuchet MS" pitchFamily="34" charset="0"/>
+                <a:ea typeface="Trebuchet MS" pitchFamily="34" charset="-122"/>
+                <a:cs typeface="Trebuchet MS" pitchFamily="34" charset="-120"/>
+              </a:rPr>
+              <a:t>s</a:t>
+            </a:r>
+            <a:endParaRPr lang="en-US" sz="1300" dirty="0"/>
+          </a:p>
+        </p:txBody>
+      </p:sp>
+      <p:sp>
+        <p:nvSpPr>
+          <p:cNvPr id="24" name="Text 22"/>
+          <p:cNvSpPr/>
+          <p:nvPr/>
+        </p:nvSpPr>
+        <p:spPr>
+          <a:xfrm>
+            <a:off x="6519672" y="2569464"/>
+            <a:ext cx="1828800" cy="201168"/>
+          </a:xfrm>
+          <a:prstGeom prst="rect">
+            <a:avLst/>
+          </a:prstGeom>
+          <a:noFill/>
+          <a:ln/>
+        </p:spPr>
+        <p:txBody>
+          <a:bodyPr wrap="square" lIns="0" tIns="0" rIns="0" bIns="0" rtlCol="0" anchor="t"/>
+          <a:lstStyle/>
+          <a:p>
+            <a:pPr algn="ctr" indent="0" marL="0">
+              <a:buNone/>
+            </a:pPr>
+            <a:r>
+              <a:rPr lang="en-US" sz="850" dirty="0">
+                <a:solidFill>
+                  <a:srgbClr val="475569"/>
+                </a:solidFill>
+                <a:latin typeface="Calibri" pitchFamily="34" charset="0"/>
+                <a:ea typeface="Calibri" pitchFamily="34" charset="-122"/>
+                <a:cs typeface="Calibri" pitchFamily="34" charset="-120"/>
+              </a:rPr>
+              <a:t>more than one</a:t>
+            </a:r>
+            <a:endParaRPr lang="en-US" sz="850" dirty="0"/>
+          </a:p>
+        </p:txBody>
+      </p:sp>
+      <p:sp>
+        <p:nvSpPr>
+          <p:cNvPr id="25" name="Shape 23"/>
           <p:cNvSpPr/>
           <p:nvPr/>
         </p:nvSpPr>
@@ -12725,7 +12837,7 @@
       </p:sp>
       <p:sp>
         <p:nvSpPr>
-          <p:cNvPr id="23" name="Text 21"/>
+          <p:cNvPr id="26" name="Text 24"/>
           <p:cNvSpPr/>
           <p:nvPr/>
         </p:nvSpPr>
@@ -12764,7 +12876,7 @@
       </p:sp>
       <p:sp>
         <p:nvSpPr>
-          <p:cNvPr id="24" name="Shape 22"/>
+          <p:cNvPr id="27" name="Shape 25"/>
           <p:cNvSpPr/>
           <p:nvPr/>
         </p:nvSpPr>
@@ -12791,7 +12903,7 @@
       </p:sp>
       <p:sp>
         <p:nvSpPr>
-          <p:cNvPr id="25" name="Text 23"/>
+          <p:cNvPr id="28" name="Text 26"/>
           <p:cNvSpPr/>
           <p:nvPr/>
         </p:nvSpPr>
@@ -12830,7 +12942,7 @@
       </p:sp>
       <p:sp>
         <p:nvSpPr>
-          <p:cNvPr id="26" name="Shape 24"/>
+          <p:cNvPr id="29" name="Shape 27"/>
           <p:cNvSpPr/>
           <p:nvPr/>
         </p:nvSpPr>
@@ -12857,7 +12969,7 @@
       </p:sp>
       <p:sp>
         <p:nvSpPr>
-          <p:cNvPr id="27" name="Text 25"/>
+          <p:cNvPr id="30" name="Text 28"/>
           <p:cNvSpPr/>
           <p:nvPr/>
         </p:nvSpPr>
@@ -12896,7 +13008,7 @@
       </p:sp>
       <p:sp>
         <p:nvSpPr>
-          <p:cNvPr id="28" name="Shape 26"/>
+          <p:cNvPr id="31" name="Shape 29"/>
           <p:cNvSpPr/>
           <p:nvPr/>
         </p:nvSpPr>
@@ -12923,7 +13035,7 @@
       </p:sp>
       <p:sp>
         <p:nvSpPr>
-          <p:cNvPr id="29" name="Text 27"/>
+          <p:cNvPr id="32" name="Text 30"/>
           <p:cNvSpPr/>
           <p:nvPr/>
         </p:nvSpPr>
@@ -13246,7 +13358,7 @@
                 <a:ea typeface="Calibri" pitchFamily="34" charset="-122"/>
                 <a:cs typeface="Calibri" pitchFamily="34" charset="-120"/>
               </a:rPr>
-              <a:t>Word Labs  •  wordlabs.app  •  Root: 'direct' = straight, guide, manage</a:t>
+              <a:t>Word Labs  •  wordlabs.app  •  Root: 'direct' = straight, guide, lead</a:t>
             </a:r>
             <a:endParaRPr lang="en-US" sz="800" dirty="0"/>
           </a:p>
@@ -13385,7 +13497,7 @@
                 <a:ea typeface="Trebuchet MS" pitchFamily="34" charset="-122"/>
                 <a:cs typeface="Trebuchet MS" pitchFamily="34" charset="-120"/>
               </a:rPr>
-              <a:t>directly</a:t>
+              <a:t>directions</a:t>
             </a:r>
             <a:endParaRPr lang="en-US" sz="2800" dirty="0"/>
           </a:p>
@@ -13465,7 +13577,7 @@
         </p:nvSpPr>
         <p:spPr>
           <a:xfrm>
-            <a:off x="2938272" y="2258568"/>
+            <a:off x="2221992" y="2258568"/>
             <a:ext cx="1828800" cy="292608"/>
           </a:xfrm>
           <a:prstGeom prst="rect">
@@ -13499,7 +13611,7 @@
         </p:nvSpPr>
         <p:spPr>
           <a:xfrm>
-            <a:off x="2938272" y="2258568"/>
+            <a:off x="2221992" y="2258568"/>
             <a:ext cx="1828800" cy="292608"/>
           </a:xfrm>
           <a:prstGeom prst="rect">
@@ -13538,7 +13650,7 @@
         </p:nvSpPr>
         <p:spPr>
           <a:xfrm>
-            <a:off x="2938272" y="2569464"/>
+            <a:off x="2221992" y="2569464"/>
             <a:ext cx="1828800" cy="201168"/>
           </a:xfrm>
           <a:prstGeom prst="rect">
@@ -13563,7 +13675,7 @@
                 <a:ea typeface="Calibri" pitchFamily="34" charset="-122"/>
                 <a:cs typeface="Calibri" pitchFamily="34" charset="-120"/>
               </a:rPr>
-              <a:t>to guide or go straight</a:t>
+              <a:t>to guide or lead straight</a:t>
             </a:r>
             <a:endParaRPr lang="en-US" sz="850" dirty="0"/>
           </a:p>
@@ -13577,7 +13689,7 @@
         </p:nvSpPr>
         <p:spPr>
           <a:xfrm>
-            <a:off x="5803392" y="2258568"/>
+            <a:off x="4370832" y="2258568"/>
             <a:ext cx="1828800" cy="292608"/>
           </a:xfrm>
           <a:prstGeom prst="rect">
@@ -13611,7 +13723,7 @@
         </p:nvSpPr>
         <p:spPr>
           <a:xfrm>
-            <a:off x="5803392" y="2258568"/>
+            <a:off x="4370832" y="2258568"/>
             <a:ext cx="1828800" cy="292608"/>
           </a:xfrm>
           <a:prstGeom prst="rect">
@@ -13636,7 +13748,7 @@
                 <a:ea typeface="Trebuchet MS" pitchFamily="34" charset="-122"/>
                 <a:cs typeface="Trebuchet MS" pitchFamily="34" charset="-120"/>
               </a:rPr>
-              <a:t>ly</a:t>
+              <a:t>ion</a:t>
             </a:r>
             <a:endParaRPr lang="en-US" sz="1300" dirty="0"/>
           </a:p>
@@ -13650,7 +13762,7 @@
         </p:nvSpPr>
         <p:spPr>
           <a:xfrm>
-            <a:off x="5803392" y="2569464"/>
+            <a:off x="4370832" y="2569464"/>
             <a:ext cx="1828800" cy="201168"/>
           </a:xfrm>
           <a:prstGeom prst="rect">
@@ -13675,7 +13787,7 @@
                 <a:ea typeface="Calibri" pitchFamily="34" charset="-122"/>
                 <a:cs typeface="Calibri" pitchFamily="34" charset="-120"/>
               </a:rPr>
-              <a:t>in a certain way</a:t>
+              <a:t>the act or result of</a:t>
             </a:r>
             <a:endParaRPr lang="en-US" sz="850" dirty="0"/>
           </a:p>
@@ -13684,6 +13796,118 @@
       <p:sp>
         <p:nvSpPr>
           <p:cNvPr id="22" name="Shape 20"/>
+          <p:cNvSpPr/>
+          <p:nvPr/>
+        </p:nvSpPr>
+        <p:spPr>
+          <a:xfrm>
+            <a:off x="6519672" y="2258568"/>
+            <a:ext cx="1828800" cy="292608"/>
+          </a:xfrm>
+          <a:prstGeom prst="rect">
+            <a:avLst>
+              <a:gd name="adj" fmla="val 25000"/>
+            </a:avLst>
+          </a:prstGeom>
+          <a:solidFill>
+            <a:srgbClr val="FCE7F3"/>
+          </a:solidFill>
+          <a:ln w="19050">
+            <a:solidFill>
+              <a:srgbClr val="DB2777"/>
+            </a:solidFill>
+            <a:prstDash val="solid"/>
+          </a:ln>
+          <a:effectLst>
+            <a:outerShdw sx="100000" sy="100000" kx="0" ky="0" algn="bl" rotWithShape="0" blurRad="101600" dist="38100" dir="8100000">
+              <a:srgbClr val="000000">
+                <a:alpha val="12000"/>
+              </a:srgbClr>
+            </a:outerShdw>
+          </a:effectLst>
+        </p:spPr>
+      </p:sp>
+      <p:sp>
+        <p:nvSpPr>
+          <p:cNvPr id="23" name="Text 21"/>
+          <p:cNvSpPr/>
+          <p:nvPr/>
+        </p:nvSpPr>
+        <p:spPr>
+          <a:xfrm>
+            <a:off x="6519672" y="2258568"/>
+            <a:ext cx="1828800" cy="292608"/>
+          </a:xfrm>
+          <a:prstGeom prst="rect">
+            <a:avLst/>
+          </a:prstGeom>
+          <a:noFill/>
+          <a:ln/>
+        </p:spPr>
+        <p:txBody>
+          <a:bodyPr wrap="square" lIns="0" tIns="0" rIns="0" bIns="0" rtlCol="0" anchor="ctr"/>
+          <a:lstStyle/>
+          <a:p>
+            <a:pPr algn="ctr" indent="0" marL="0">
+              <a:buNone/>
+            </a:pPr>
+            <a:r>
+              <a:rPr lang="en-US" sz="1300" b="1" dirty="0">
+                <a:solidFill>
+                  <a:srgbClr val="9D174D"/>
+                </a:solidFill>
+                <a:latin typeface="Trebuchet MS" pitchFamily="34" charset="0"/>
+                <a:ea typeface="Trebuchet MS" pitchFamily="34" charset="-122"/>
+                <a:cs typeface="Trebuchet MS" pitchFamily="34" charset="-120"/>
+              </a:rPr>
+              <a:t>s</a:t>
+            </a:r>
+            <a:endParaRPr lang="en-US" sz="1300" dirty="0"/>
+          </a:p>
+        </p:txBody>
+      </p:sp>
+      <p:sp>
+        <p:nvSpPr>
+          <p:cNvPr id="24" name="Text 22"/>
+          <p:cNvSpPr/>
+          <p:nvPr/>
+        </p:nvSpPr>
+        <p:spPr>
+          <a:xfrm>
+            <a:off x="6519672" y="2569464"/>
+            <a:ext cx="1828800" cy="201168"/>
+          </a:xfrm>
+          <a:prstGeom prst="rect">
+            <a:avLst/>
+          </a:prstGeom>
+          <a:noFill/>
+          <a:ln/>
+        </p:spPr>
+        <p:txBody>
+          <a:bodyPr wrap="square" lIns="0" tIns="0" rIns="0" bIns="0" rtlCol="0" anchor="t"/>
+          <a:lstStyle/>
+          <a:p>
+            <a:pPr algn="ctr" indent="0" marL="0">
+              <a:buNone/>
+            </a:pPr>
+            <a:r>
+              <a:rPr lang="en-US" sz="850" dirty="0">
+                <a:solidFill>
+                  <a:srgbClr val="475569"/>
+                </a:solidFill>
+                <a:latin typeface="Calibri" pitchFamily="34" charset="0"/>
+                <a:ea typeface="Calibri" pitchFamily="34" charset="-122"/>
+                <a:cs typeface="Calibri" pitchFamily="34" charset="-120"/>
+              </a:rPr>
+              <a:t>more than one</a:t>
+            </a:r>
+            <a:endParaRPr lang="en-US" sz="850" dirty="0"/>
+          </a:p>
+        </p:txBody>
+      </p:sp>
+      <p:sp>
+        <p:nvSpPr>
+          <p:cNvPr id="25" name="Shape 23"/>
           <p:cNvSpPr/>
           <p:nvPr/>
         </p:nvSpPr>
@@ -13710,7 +13934,7 @@
       </p:sp>
       <p:sp>
         <p:nvSpPr>
-          <p:cNvPr id="23" name="Text 21"/>
+          <p:cNvPr id="26" name="Text 24"/>
           <p:cNvSpPr/>
           <p:nvPr/>
         </p:nvSpPr>
@@ -13749,7 +13973,7 @@
       </p:sp>
       <p:sp>
         <p:nvSpPr>
-          <p:cNvPr id="24" name="Shape 22"/>
+          <p:cNvPr id="27" name="Shape 25"/>
           <p:cNvSpPr/>
           <p:nvPr/>
         </p:nvSpPr>
@@ -13776,7 +14000,7 @@
       </p:sp>
       <p:sp>
         <p:nvSpPr>
-          <p:cNvPr id="25" name="Shape 23"/>
+          <p:cNvPr id="28" name="Shape 26"/>
           <p:cNvSpPr/>
           <p:nvPr/>
         </p:nvSpPr>
@@ -13803,7 +14027,7 @@
       </p:sp>
       <p:sp>
         <p:nvSpPr>
-          <p:cNvPr id="26" name="Text 24"/>
+          <p:cNvPr id="29" name="Text 27"/>
           <p:cNvSpPr/>
           <p:nvPr/>
         </p:nvSpPr>
@@ -13842,7 +14066,7 @@
       </p:sp>
       <p:sp>
         <p:nvSpPr>
-          <p:cNvPr id="27" name="Text 25"/>
+          <p:cNvPr id="30" name="Text 28"/>
           <p:cNvSpPr/>
           <p:nvPr/>
         </p:nvSpPr>
@@ -13881,7 +14105,7 @@
       </p:sp>
       <p:sp>
         <p:nvSpPr>
-          <p:cNvPr id="28" name="Shape 26"/>
+          <p:cNvPr id="31" name="Shape 29"/>
           <p:cNvSpPr/>
           <p:nvPr/>
         </p:nvSpPr>
@@ -13908,7 +14132,7 @@
       </p:sp>
       <p:sp>
         <p:nvSpPr>
-          <p:cNvPr id="29" name="Text 27"/>
+          <p:cNvPr id="32" name="Text 30"/>
           <p:cNvSpPr/>
           <p:nvPr/>
         </p:nvSpPr>
@@ -13939,7 +14163,7 @@
                 <a:ea typeface="Trebuchet MS" pitchFamily="34" charset="-122"/>
                 <a:cs typeface="Trebuchet MS" pitchFamily="34" charset="-120"/>
               </a:rPr>
-              <a:t>rect</a:t>
+              <a:t>rec</a:t>
             </a:r>
             <a:endParaRPr lang="en-US" sz="1400" dirty="0"/>
           </a:p>
@@ -13947,7 +14171,7 @@
       </p:sp>
       <p:sp>
         <p:nvSpPr>
-          <p:cNvPr id="30" name="Text 28"/>
+          <p:cNvPr id="33" name="Text 31"/>
           <p:cNvSpPr/>
           <p:nvPr/>
         </p:nvSpPr>
@@ -13986,7 +14210,7 @@
       </p:sp>
       <p:sp>
         <p:nvSpPr>
-          <p:cNvPr id="31" name="Shape 29"/>
+          <p:cNvPr id="34" name="Shape 32"/>
           <p:cNvSpPr/>
           <p:nvPr/>
         </p:nvSpPr>
@@ -14013,7 +14237,7 @@
       </p:sp>
       <p:sp>
         <p:nvSpPr>
-          <p:cNvPr id="32" name="Text 30"/>
+          <p:cNvPr id="35" name="Text 33"/>
           <p:cNvSpPr/>
           <p:nvPr/>
         </p:nvSpPr>
@@ -14044,7 +14268,7 @@
                 <a:ea typeface="Trebuchet MS" pitchFamily="34" charset="-122"/>
                 <a:cs typeface="Trebuchet MS" pitchFamily="34" charset="-120"/>
               </a:rPr>
-              <a:t>ly</a:t>
+              <a:t>tions</a:t>
             </a:r>
             <a:endParaRPr lang="en-US" sz="1400" dirty="0"/>
           </a:p>
@@ -14052,7 +14276,7 @@
       </p:sp>
       <p:sp>
         <p:nvSpPr>
-          <p:cNvPr id="33" name="Shape 31"/>
+          <p:cNvPr id="36" name="Shape 34"/>
           <p:cNvSpPr/>
           <p:nvPr/>
         </p:nvSpPr>
@@ -14079,7 +14303,7 @@
       </p:sp>
       <p:sp>
         <p:nvSpPr>
-          <p:cNvPr id="34" name="Text 32"/>
+          <p:cNvPr id="37" name="Text 35"/>
           <p:cNvSpPr/>
           <p:nvPr/>
         </p:nvSpPr>
@@ -14118,7 +14342,7 @@
       </p:sp>
       <p:sp>
         <p:nvSpPr>
-          <p:cNvPr id="35" name="Shape 33"/>
+          <p:cNvPr id="38" name="Shape 36"/>
           <p:cNvSpPr/>
           <p:nvPr/>
         </p:nvSpPr>
@@ -14145,7 +14369,7 @@
       </p:sp>
       <p:sp>
         <p:nvSpPr>
-          <p:cNvPr id="36" name="Text 34"/>
+          <p:cNvPr id="39" name="Text 37"/>
           <p:cNvSpPr/>
           <p:nvPr/>
         </p:nvSpPr>
@@ -14377,7 +14601,7 @@
                 <a:ea typeface="Calibri" pitchFamily="34" charset="-122"/>
                 <a:cs typeface="Calibri" pitchFamily="34" charset="-120"/>
               </a:rPr>
-              <a:t>Root 'direct' — straight, guide, manage</a:t>
+              <a:t>Root 'direct' — straight, guide, lead</a:t>
             </a:r>
             <a:endParaRPr lang="en-US" sz="1600" dirty="0"/>
           </a:p>
@@ -14733,7 +14957,7 @@
                 <a:ea typeface="Calibri" pitchFamily="34" charset="-122"/>
                 <a:cs typeface="Calibri" pitchFamily="34" charset="-120"/>
               </a:rPr>
-              <a:t>Word Labs  •  wordlabs.app  •  Root: 'direct' = straight, guide, manage</a:t>
+              <a:t>Word Labs  •  wordlabs.app  •  Root: 'direct' = straight, guide, lead</a:t>
             </a:r>
             <a:endParaRPr lang="en-US" sz="800" dirty="0"/>
           </a:p>
@@ -14872,7 +15096,7 @@
                 <a:ea typeface="Trebuchet MS" pitchFamily="34" charset="-122"/>
                 <a:cs typeface="Trebuchet MS" pitchFamily="34" charset="-120"/>
               </a:rPr>
-              <a:t>directly</a:t>
+              <a:t>directions</a:t>
             </a:r>
             <a:endParaRPr lang="en-US" sz="2800" dirty="0"/>
           </a:p>
@@ -14952,7 +15176,7 @@
         </p:nvSpPr>
         <p:spPr>
           <a:xfrm>
-            <a:off x="2938272" y="2258568"/>
+            <a:off x="2221992" y="2258568"/>
             <a:ext cx="1828800" cy="292608"/>
           </a:xfrm>
           <a:prstGeom prst="rect">
@@ -14986,7 +15210,7 @@
         </p:nvSpPr>
         <p:spPr>
           <a:xfrm>
-            <a:off x="2938272" y="2258568"/>
+            <a:off x="2221992" y="2258568"/>
             <a:ext cx="1828800" cy="292608"/>
           </a:xfrm>
           <a:prstGeom prst="rect">
@@ -15025,7 +15249,7 @@
         </p:nvSpPr>
         <p:spPr>
           <a:xfrm>
-            <a:off x="2938272" y="2569464"/>
+            <a:off x="2221992" y="2569464"/>
             <a:ext cx="1828800" cy="201168"/>
           </a:xfrm>
           <a:prstGeom prst="rect">
@@ -15050,7 +15274,7 @@
                 <a:ea typeface="Calibri" pitchFamily="34" charset="-122"/>
                 <a:cs typeface="Calibri" pitchFamily="34" charset="-120"/>
               </a:rPr>
-              <a:t>to guide or go straight</a:t>
+              <a:t>to guide or lead straight</a:t>
             </a:r>
             <a:endParaRPr lang="en-US" sz="850" dirty="0"/>
           </a:p>
@@ -15064,7 +15288,7 @@
         </p:nvSpPr>
         <p:spPr>
           <a:xfrm>
-            <a:off x="5803392" y="2258568"/>
+            <a:off x="4370832" y="2258568"/>
             <a:ext cx="1828800" cy="292608"/>
           </a:xfrm>
           <a:prstGeom prst="rect">
@@ -15098,7 +15322,7 @@
         </p:nvSpPr>
         <p:spPr>
           <a:xfrm>
-            <a:off x="5803392" y="2258568"/>
+            <a:off x="4370832" y="2258568"/>
             <a:ext cx="1828800" cy="292608"/>
           </a:xfrm>
           <a:prstGeom prst="rect">
@@ -15123,7 +15347,7 @@
                 <a:ea typeface="Trebuchet MS" pitchFamily="34" charset="-122"/>
                 <a:cs typeface="Trebuchet MS" pitchFamily="34" charset="-120"/>
               </a:rPr>
-              <a:t>ly</a:t>
+              <a:t>ion</a:t>
             </a:r>
             <a:endParaRPr lang="en-US" sz="1300" dirty="0"/>
           </a:p>
@@ -15137,7 +15361,7 @@
         </p:nvSpPr>
         <p:spPr>
           <a:xfrm>
-            <a:off x="5803392" y="2569464"/>
+            <a:off x="4370832" y="2569464"/>
             <a:ext cx="1828800" cy="201168"/>
           </a:xfrm>
           <a:prstGeom prst="rect">
@@ -15162,7 +15386,7 @@
                 <a:ea typeface="Calibri" pitchFamily="34" charset="-122"/>
                 <a:cs typeface="Calibri" pitchFamily="34" charset="-120"/>
               </a:rPr>
-              <a:t>in a certain way</a:t>
+              <a:t>the act or result of</a:t>
             </a:r>
             <a:endParaRPr lang="en-US" sz="850" dirty="0"/>
           </a:p>
@@ -15171,6 +15395,118 @@
       <p:sp>
         <p:nvSpPr>
           <p:cNvPr id="22" name="Shape 20"/>
+          <p:cNvSpPr/>
+          <p:nvPr/>
+        </p:nvSpPr>
+        <p:spPr>
+          <a:xfrm>
+            <a:off x="6519672" y="2258568"/>
+            <a:ext cx="1828800" cy="292608"/>
+          </a:xfrm>
+          <a:prstGeom prst="rect">
+            <a:avLst>
+              <a:gd name="adj" fmla="val 25000"/>
+            </a:avLst>
+          </a:prstGeom>
+          <a:solidFill>
+            <a:srgbClr val="FCE7F3"/>
+          </a:solidFill>
+          <a:ln w="19050">
+            <a:solidFill>
+              <a:srgbClr val="DB2777"/>
+            </a:solidFill>
+            <a:prstDash val="solid"/>
+          </a:ln>
+          <a:effectLst>
+            <a:outerShdw sx="100000" sy="100000" kx="0" ky="0" algn="bl" rotWithShape="0" blurRad="101600" dist="38100" dir="8100000">
+              <a:srgbClr val="000000">
+                <a:alpha val="12000"/>
+              </a:srgbClr>
+            </a:outerShdw>
+          </a:effectLst>
+        </p:spPr>
+      </p:sp>
+      <p:sp>
+        <p:nvSpPr>
+          <p:cNvPr id="23" name="Text 21"/>
+          <p:cNvSpPr/>
+          <p:nvPr/>
+        </p:nvSpPr>
+        <p:spPr>
+          <a:xfrm>
+            <a:off x="6519672" y="2258568"/>
+            <a:ext cx="1828800" cy="292608"/>
+          </a:xfrm>
+          <a:prstGeom prst="rect">
+            <a:avLst/>
+          </a:prstGeom>
+          <a:noFill/>
+          <a:ln/>
+        </p:spPr>
+        <p:txBody>
+          <a:bodyPr wrap="square" lIns="0" tIns="0" rIns="0" bIns="0" rtlCol="0" anchor="ctr"/>
+          <a:lstStyle/>
+          <a:p>
+            <a:pPr algn="ctr" indent="0" marL="0">
+              <a:buNone/>
+            </a:pPr>
+            <a:r>
+              <a:rPr lang="en-US" sz="1300" b="1" dirty="0">
+                <a:solidFill>
+                  <a:srgbClr val="9D174D"/>
+                </a:solidFill>
+                <a:latin typeface="Trebuchet MS" pitchFamily="34" charset="0"/>
+                <a:ea typeface="Trebuchet MS" pitchFamily="34" charset="-122"/>
+                <a:cs typeface="Trebuchet MS" pitchFamily="34" charset="-120"/>
+              </a:rPr>
+              <a:t>s</a:t>
+            </a:r>
+            <a:endParaRPr lang="en-US" sz="1300" dirty="0"/>
+          </a:p>
+        </p:txBody>
+      </p:sp>
+      <p:sp>
+        <p:nvSpPr>
+          <p:cNvPr id="24" name="Text 22"/>
+          <p:cNvSpPr/>
+          <p:nvPr/>
+        </p:nvSpPr>
+        <p:spPr>
+          <a:xfrm>
+            <a:off x="6519672" y="2569464"/>
+            <a:ext cx="1828800" cy="201168"/>
+          </a:xfrm>
+          <a:prstGeom prst="rect">
+            <a:avLst/>
+          </a:prstGeom>
+          <a:noFill/>
+          <a:ln/>
+        </p:spPr>
+        <p:txBody>
+          <a:bodyPr wrap="square" lIns="0" tIns="0" rIns="0" bIns="0" rtlCol="0" anchor="t"/>
+          <a:lstStyle/>
+          <a:p>
+            <a:pPr algn="ctr" indent="0" marL="0">
+              <a:buNone/>
+            </a:pPr>
+            <a:r>
+              <a:rPr lang="en-US" sz="850" dirty="0">
+                <a:solidFill>
+                  <a:srgbClr val="475569"/>
+                </a:solidFill>
+                <a:latin typeface="Calibri" pitchFamily="34" charset="0"/>
+                <a:ea typeface="Calibri" pitchFamily="34" charset="-122"/>
+                <a:cs typeface="Calibri" pitchFamily="34" charset="-120"/>
+              </a:rPr>
+              <a:t>more than one</a:t>
+            </a:r>
+            <a:endParaRPr lang="en-US" sz="850" dirty="0"/>
+          </a:p>
+        </p:txBody>
+      </p:sp>
+      <p:sp>
+        <p:nvSpPr>
+          <p:cNvPr id="25" name="Shape 23"/>
           <p:cNvSpPr/>
           <p:nvPr/>
         </p:nvSpPr>
@@ -15197,7 +15533,7 @@
       </p:sp>
       <p:sp>
         <p:nvSpPr>
-          <p:cNvPr id="23" name="Text 21"/>
+          <p:cNvPr id="26" name="Text 24"/>
           <p:cNvSpPr/>
           <p:nvPr/>
         </p:nvSpPr>
@@ -15236,7 +15572,7 @@
       </p:sp>
       <p:sp>
         <p:nvSpPr>
-          <p:cNvPr id="24" name="Shape 22"/>
+          <p:cNvPr id="27" name="Shape 25"/>
           <p:cNvSpPr/>
           <p:nvPr/>
         </p:nvSpPr>
@@ -15263,7 +15599,7 @@
       </p:sp>
       <p:sp>
         <p:nvSpPr>
-          <p:cNvPr id="25" name="Shape 23"/>
+          <p:cNvPr id="28" name="Shape 26"/>
           <p:cNvSpPr/>
           <p:nvPr/>
         </p:nvSpPr>
@@ -15290,7 +15626,7 @@
       </p:sp>
       <p:sp>
         <p:nvSpPr>
-          <p:cNvPr id="26" name="Text 24"/>
+          <p:cNvPr id="29" name="Text 27"/>
           <p:cNvSpPr/>
           <p:nvPr/>
         </p:nvSpPr>
@@ -15329,7 +15665,7 @@
       </p:sp>
       <p:sp>
         <p:nvSpPr>
-          <p:cNvPr id="27" name="Text 25"/>
+          <p:cNvPr id="30" name="Text 28"/>
           <p:cNvSpPr/>
           <p:nvPr/>
         </p:nvSpPr>
@@ -15368,7 +15704,7 @@
       </p:sp>
       <p:sp>
         <p:nvSpPr>
-          <p:cNvPr id="28" name="Shape 26"/>
+          <p:cNvPr id="31" name="Shape 29"/>
           <p:cNvSpPr/>
           <p:nvPr/>
         </p:nvSpPr>
@@ -15395,7 +15731,7 @@
       </p:sp>
       <p:sp>
         <p:nvSpPr>
-          <p:cNvPr id="29" name="Text 27"/>
+          <p:cNvPr id="32" name="Text 30"/>
           <p:cNvSpPr/>
           <p:nvPr/>
         </p:nvSpPr>
@@ -15426,7 +15762,7 @@
                 <a:ea typeface="Trebuchet MS" pitchFamily="34" charset="-122"/>
                 <a:cs typeface="Trebuchet MS" pitchFamily="34" charset="-120"/>
               </a:rPr>
-              <a:t>rect</a:t>
+              <a:t>rec</a:t>
             </a:r>
             <a:endParaRPr lang="en-US" sz="1400" dirty="0"/>
           </a:p>
@@ -15434,7 +15770,7 @@
       </p:sp>
       <p:sp>
         <p:nvSpPr>
-          <p:cNvPr id="30" name="Text 28"/>
+          <p:cNvPr id="33" name="Text 31"/>
           <p:cNvSpPr/>
           <p:nvPr/>
         </p:nvSpPr>
@@ -15473,7 +15809,7 @@
       </p:sp>
       <p:sp>
         <p:nvSpPr>
-          <p:cNvPr id="31" name="Shape 29"/>
+          <p:cNvPr id="34" name="Shape 32"/>
           <p:cNvSpPr/>
           <p:nvPr/>
         </p:nvSpPr>
@@ -15500,7 +15836,7 @@
       </p:sp>
       <p:sp>
         <p:nvSpPr>
-          <p:cNvPr id="32" name="Text 30"/>
+          <p:cNvPr id="35" name="Text 33"/>
           <p:cNvSpPr/>
           <p:nvPr/>
         </p:nvSpPr>
@@ -15531,7 +15867,7 @@
                 <a:ea typeface="Trebuchet MS" pitchFamily="34" charset="-122"/>
                 <a:cs typeface="Trebuchet MS" pitchFamily="34" charset="-120"/>
               </a:rPr>
-              <a:t>ly</a:t>
+              <a:t>tions</a:t>
             </a:r>
             <a:endParaRPr lang="en-US" sz="1400" dirty="0"/>
           </a:p>
@@ -15539,7 +15875,7 @@
       </p:sp>
       <p:sp>
         <p:nvSpPr>
-          <p:cNvPr id="33" name="Shape 31"/>
+          <p:cNvPr id="36" name="Shape 34"/>
           <p:cNvSpPr/>
           <p:nvPr/>
         </p:nvSpPr>
@@ -15566,7 +15902,7 @@
       </p:sp>
       <p:sp>
         <p:nvSpPr>
-          <p:cNvPr id="34" name="Text 32"/>
+          <p:cNvPr id="37" name="Text 35"/>
           <p:cNvSpPr/>
           <p:nvPr/>
         </p:nvSpPr>
@@ -15605,7 +15941,7 @@
       </p:sp>
       <p:sp>
         <p:nvSpPr>
-          <p:cNvPr id="35" name="Shape 33"/>
+          <p:cNvPr id="38" name="Shape 36"/>
           <p:cNvSpPr/>
           <p:nvPr/>
         </p:nvSpPr>
@@ -15632,7 +15968,7 @@
       </p:sp>
       <p:sp>
         <p:nvSpPr>
-          <p:cNvPr id="36" name="Shape 34"/>
+          <p:cNvPr id="39" name="Shape 37"/>
           <p:cNvSpPr/>
           <p:nvPr/>
         </p:nvSpPr>
@@ -15659,7 +15995,7 @@
       </p:sp>
       <p:sp>
         <p:nvSpPr>
-          <p:cNvPr id="37" name="Text 35"/>
+          <p:cNvPr id="40" name="Text 38"/>
           <p:cNvSpPr/>
           <p:nvPr/>
         </p:nvSpPr>
@@ -15698,7 +16034,7 @@
       </p:sp>
       <p:sp>
         <p:nvSpPr>
-          <p:cNvPr id="38" name="Shape 36"/>
+          <p:cNvPr id="41" name="Shape 39"/>
           <p:cNvSpPr/>
           <p:nvPr/>
         </p:nvSpPr>
@@ -15725,7 +16061,7 @@
       </p:sp>
       <p:sp>
         <p:nvSpPr>
-          <p:cNvPr id="39" name="Text 37"/>
+          <p:cNvPr id="42" name="Text 40"/>
           <p:cNvSpPr/>
           <p:nvPr/>
         </p:nvSpPr>
@@ -15764,7 +16100,7 @@
       </p:sp>
       <p:sp>
         <p:nvSpPr>
-          <p:cNvPr id="40" name="Shape 38"/>
+          <p:cNvPr id="43" name="Shape 41"/>
           <p:cNvSpPr/>
           <p:nvPr/>
         </p:nvSpPr>
@@ -15791,7 +16127,7 @@
       </p:sp>
       <p:sp>
         <p:nvSpPr>
-          <p:cNvPr id="41" name="Text 39"/>
+          <p:cNvPr id="44" name="Text 42"/>
           <p:cNvSpPr/>
           <p:nvPr/>
         </p:nvSpPr>
@@ -15830,7 +16166,7 @@
       </p:sp>
       <p:sp>
         <p:nvSpPr>
-          <p:cNvPr id="42" name="Shape 40"/>
+          <p:cNvPr id="45" name="Shape 43"/>
           <p:cNvSpPr/>
           <p:nvPr/>
         </p:nvSpPr>
@@ -15857,7 +16193,7 @@
       </p:sp>
       <p:sp>
         <p:nvSpPr>
-          <p:cNvPr id="43" name="Text 41"/>
+          <p:cNvPr id="46" name="Text 44"/>
           <p:cNvSpPr/>
           <p:nvPr/>
         </p:nvSpPr>
@@ -15896,7 +16232,7 @@
       </p:sp>
       <p:sp>
         <p:nvSpPr>
-          <p:cNvPr id="44" name="Shape 42"/>
+          <p:cNvPr id="47" name="Shape 45"/>
           <p:cNvSpPr/>
           <p:nvPr/>
         </p:nvSpPr>
@@ -15923,7 +16259,7 @@
       </p:sp>
       <p:sp>
         <p:nvSpPr>
-          <p:cNvPr id="45" name="Text 43"/>
+          <p:cNvPr id="48" name="Text 46"/>
           <p:cNvSpPr/>
           <p:nvPr/>
         </p:nvSpPr>
@@ -15962,7 +16298,7 @@
       </p:sp>
       <p:sp>
         <p:nvSpPr>
-          <p:cNvPr id="46" name="Text 44"/>
+          <p:cNvPr id="49" name="Text 47"/>
           <p:cNvSpPr/>
           <p:nvPr/>
         </p:nvSpPr>
@@ -16001,7 +16337,7 @@
       </p:sp>
       <p:sp>
         <p:nvSpPr>
-          <p:cNvPr id="47" name="Shape 45"/>
+          <p:cNvPr id="50" name="Shape 48"/>
           <p:cNvSpPr/>
           <p:nvPr/>
         </p:nvSpPr>
@@ -16028,7 +16364,7 @@
       </p:sp>
       <p:sp>
         <p:nvSpPr>
-          <p:cNvPr id="48" name="Text 46"/>
+          <p:cNvPr id="51" name="Text 49"/>
           <p:cNvSpPr/>
           <p:nvPr/>
         </p:nvSpPr>
@@ -16067,7 +16403,7 @@
       </p:sp>
       <p:sp>
         <p:nvSpPr>
-          <p:cNvPr id="49" name="Shape 47"/>
+          <p:cNvPr id="52" name="Shape 50"/>
           <p:cNvSpPr/>
           <p:nvPr/>
         </p:nvSpPr>
@@ -16094,7 +16430,7 @@
       </p:sp>
       <p:sp>
         <p:nvSpPr>
-          <p:cNvPr id="50" name="Text 48"/>
+          <p:cNvPr id="53" name="Text 51"/>
           <p:cNvSpPr/>
           <p:nvPr/>
         </p:nvSpPr>
@@ -16125,7 +16461,7 @@
                 <a:ea typeface="Trebuchet MS" pitchFamily="34" charset="-122"/>
                 <a:cs typeface="Trebuchet MS" pitchFamily="34" charset="-120"/>
               </a:rPr>
-              <a:t>l</a:t>
+              <a:t>ion</a:t>
             </a:r>
             <a:endParaRPr lang="en-US" sz="900" dirty="0"/>
           </a:p>
@@ -16133,7 +16469,46 @@
       </p:sp>
       <p:sp>
         <p:nvSpPr>
-          <p:cNvPr id="51" name="Shape 49"/>
+          <p:cNvPr id="54" name="Text 52"/>
+          <p:cNvSpPr/>
+          <p:nvPr/>
+        </p:nvSpPr>
+        <p:spPr>
+          <a:xfrm>
+            <a:off x="6870192" y="4572000"/>
+            <a:ext cx="685800" cy="219456"/>
+          </a:xfrm>
+          <a:prstGeom prst="rect">
+            <a:avLst/>
+          </a:prstGeom>
+          <a:noFill/>
+          <a:ln/>
+        </p:spPr>
+        <p:txBody>
+          <a:bodyPr wrap="square" lIns="0" tIns="0" rIns="0" bIns="0" rtlCol="0" anchor="t"/>
+          <a:lstStyle/>
+          <a:p>
+            <a:pPr algn="ctr" indent="0" marL="0">
+              <a:buNone/>
+            </a:pPr>
+            <a:r>
+              <a:rPr lang="en-US" sz="750" i="1" dirty="0">
+                <a:solidFill>
+                  <a:srgbClr val="94A3B8"/>
+                </a:solidFill>
+                <a:latin typeface="Calibri" pitchFamily="34" charset="0"/>
+                <a:ea typeface="Calibri" pitchFamily="34" charset="-122"/>
+                <a:cs typeface="Calibri" pitchFamily="34" charset="-120"/>
+              </a:rPr>
+              <a:t>/shun/</a:t>
+            </a:r>
+            <a:endParaRPr lang="en-US" sz="750" dirty="0"/>
+          </a:p>
+        </p:txBody>
+      </p:sp>
+      <p:sp>
+        <p:nvSpPr>
+          <p:cNvPr id="55" name="Shape 53"/>
           <p:cNvSpPr/>
           <p:nvPr/>
         </p:nvSpPr>
@@ -16160,7 +16535,7 @@
       </p:sp>
       <p:sp>
         <p:nvSpPr>
-          <p:cNvPr id="52" name="Text 50"/>
+          <p:cNvPr id="56" name="Text 54"/>
           <p:cNvSpPr/>
           <p:nvPr/>
         </p:nvSpPr>
@@ -16191,7 +16566,7 @@
                 <a:ea typeface="Trebuchet MS" pitchFamily="34" charset="-122"/>
                 <a:cs typeface="Trebuchet MS" pitchFamily="34" charset="-120"/>
               </a:rPr>
-              <a:t>y</a:t>
+              <a:t>s</a:t>
             </a:r>
             <a:endParaRPr lang="en-US" sz="900" dirty="0"/>
           </a:p>
@@ -16765,7 +17140,7 @@
                 <a:ea typeface="Calibri" pitchFamily="34" charset="-122"/>
                 <a:cs typeface="Calibri" pitchFamily="34" charset="-120"/>
               </a:rPr>
-              <a:t>Word Labs  •  wordlabs.app  •  Root: 'direct' = straight, guide, manage</a:t>
+              <a:t>Word Labs  •  wordlabs.app  •  Root: 'direct' = straight, guide, lead</a:t>
             </a:r>
             <a:endParaRPr lang="en-US" sz="800" dirty="0"/>
           </a:p>
@@ -17405,7 +17780,7 @@
                 <a:ea typeface="Calibri" pitchFamily="34" charset="-122"/>
                 <a:cs typeface="Calibri" pitchFamily="34" charset="-120"/>
               </a:rPr>
-              <a:t>Word Labs  •  wordlabs.app  •  Root: 'direct' = straight, guide, manage</a:t>
+              <a:t>Word Labs  •  wordlabs.app  •  Root: 'direct' = straight, guide, lead</a:t>
             </a:r>
             <a:endParaRPr lang="en-US" sz="800" dirty="0"/>
           </a:p>
@@ -17517,7 +17892,7 @@
                 <a:ea typeface="Calibri" pitchFamily="34" charset="-122"/>
                 <a:cs typeface="Calibri" pitchFamily="34" charset="-120"/>
               </a:rPr>
-              <a:t>The new </a:t>
+              <a:t>She had to </a:t>
             </a:r>
             <a:pPr algn="l" indent="0" marL="0">
               <a:buNone/>
@@ -17534,7 +17909,7 @@
                 <a:ea typeface="Calibri" pitchFamily="34" charset="-122"/>
                 <a:cs typeface="Calibri" pitchFamily="34" charset="-120"/>
               </a:rPr>
-              <a:t>director</a:t>
+              <a:t>redirect</a:t>
             </a:r>
             <a:pPr algn="l" indent="0" marL="0">
               <a:buNone/>
@@ -17548,7 +17923,7 @@
                 <a:ea typeface="Calibri" pitchFamily="34" charset="-122"/>
                 <a:cs typeface="Calibri" pitchFamily="34" charset="-120"/>
               </a:rPr>
-              <a:t> will </a:t>
+              <a:t> the lost traveller, because the </a:t>
             </a:r>
             <a:pPr algn="l" indent="0" marL="0">
               <a:buNone/>
@@ -17565,7 +17940,7 @@
                 <a:ea typeface="Calibri" pitchFamily="34" charset="-122"/>
                 <a:cs typeface="Calibri" pitchFamily="34" charset="-120"/>
               </a:rPr>
-              <a:t>redirect</a:t>
+              <a:t>misdirected</a:t>
             </a:r>
             <a:pPr algn="l" indent="0" marL="0">
               <a:buNone/>
@@ -17579,7 +17954,7 @@
                 <a:ea typeface="Calibri" pitchFamily="34" charset="-122"/>
                 <a:cs typeface="Calibri" pitchFamily="34" charset="-120"/>
               </a:rPr>
-              <a:t> the team's efforts, but the </a:t>
+              <a:t> map had sent him completely the wrong way, and he ended up going </a:t>
             </a:r>
             <a:pPr algn="l" indent="0" marL="0">
               <a:buNone/>
@@ -17596,7 +17971,7 @@
                 <a:ea typeface="Calibri" pitchFamily="34" charset="-122"/>
                 <a:cs typeface="Calibri" pitchFamily="34" charset="-120"/>
               </a:rPr>
-              <a:t>indirect</a:t>
+              <a:t>indirectly</a:t>
             </a:r>
             <a:pPr algn="l" indent="0" marL="0">
               <a:buNone/>
@@ -17610,7 +17985,7 @@
                 <a:ea typeface="Calibri" pitchFamily="34" charset="-122"/>
                 <a:cs typeface="Calibri" pitchFamily="34" charset="-120"/>
               </a:rPr>
-              <a:t> route is causing delays.</a:t>
+              <a:t> around the whole town.</a:t>
             </a:r>
             <a:endParaRPr lang="en-US" sz="1800" dirty="0"/>
           </a:p>
@@ -17765,7 +18140,7 @@
                 <a:ea typeface="Trebuchet MS" pitchFamily="34" charset="-122"/>
                 <a:cs typeface="Trebuchet MS" pitchFamily="34" charset="-120"/>
               </a:rPr>
-              <a:t>director</a:t>
+              <a:t>redirect</a:t>
             </a:r>
             <a:endParaRPr lang="en-US" sz="1400" dirty="0"/>
           </a:p>
@@ -17893,7 +18268,7 @@
                 <a:ea typeface="Trebuchet MS" pitchFamily="34" charset="-122"/>
                 <a:cs typeface="Trebuchet MS" pitchFamily="34" charset="-120"/>
               </a:rPr>
-              <a:t>redirect</a:t>
+              <a:t>misdirected</a:t>
             </a:r>
             <a:endParaRPr lang="en-US" sz="1400" dirty="0"/>
           </a:p>
@@ -18021,7 +18396,7 @@
                 <a:ea typeface="Trebuchet MS" pitchFamily="34" charset="-122"/>
                 <a:cs typeface="Trebuchet MS" pitchFamily="34" charset="-120"/>
               </a:rPr>
-              <a:t>indirect</a:t>
+              <a:t>indirectly</a:t>
             </a:r>
             <a:endParaRPr lang="en-US" sz="1400" dirty="0"/>
           </a:p>
@@ -18352,7 +18727,7 @@
                 <a:ea typeface="Calibri" pitchFamily="34" charset="-122"/>
                 <a:cs typeface="Calibri" pitchFamily="34" charset="-120"/>
               </a:rPr>
-              <a:t>Word Labs  •  wordlabs.app  •  Root: 'direct' = straight, guide, manage</a:t>
+              <a:t>Word Labs  •  wordlabs.app  •  Root: 'direct' = straight, guide, lead</a:t>
             </a:r>
             <a:endParaRPr lang="en-US" sz="800" dirty="0"/>
           </a:p>
@@ -18491,7 +18866,7 @@
                 <a:ea typeface="Trebuchet MS" pitchFamily="34" charset="-122"/>
                 <a:cs typeface="Trebuchet MS" pitchFamily="34" charset="-120"/>
               </a:rPr>
-              <a:t>director</a:t>
+              <a:t>redirect</a:t>
             </a:r>
             <a:endParaRPr lang="en-US" sz="2800" dirty="0"/>
           </a:p>
@@ -19179,7 +19554,7 @@
                 <a:ea typeface="Calibri" pitchFamily="34" charset="-122"/>
                 <a:cs typeface="Calibri" pitchFamily="34" charset="-120"/>
               </a:rPr>
-              <a:t>Word Labs  •  wordlabs.app  •  Root: 'direct' = straight, guide, manage</a:t>
+              <a:t>Word Labs  •  wordlabs.app  •  Root: 'direct' = straight, guide, lead</a:t>
             </a:r>
             <a:endParaRPr lang="en-US" sz="800" dirty="0"/>
           </a:p>
@@ -19318,7 +19693,7 @@
                 <a:ea typeface="Trebuchet MS" pitchFamily="34" charset="-122"/>
                 <a:cs typeface="Trebuchet MS" pitchFamily="34" charset="-120"/>
               </a:rPr>
-              <a:t>director</a:t>
+              <a:t>redirect</a:t>
             </a:r>
             <a:endParaRPr lang="en-US" sz="2800" dirty="0"/>
           </a:p>
@@ -19407,11 +19782,11 @@
             </a:avLst>
           </a:prstGeom>
           <a:solidFill>
-            <a:srgbClr val="CCFBF1"/>
+            <a:srgbClr val="DDD6FE"/>
           </a:solidFill>
           <a:ln w="19050">
             <a:solidFill>
-              <a:srgbClr val="0D9488"/>
+              <a:srgbClr val="7C3AED"/>
             </a:solidFill>
             <a:prstDash val="solid"/>
           </a:ln>
@@ -19451,13 +19826,13 @@
             <a:r>
               <a:rPr lang="en-US" sz="1300" b="1" dirty="0">
                 <a:solidFill>
-                  <a:srgbClr val="0F766E"/>
+                  <a:srgbClr val="4C1D95"/>
                 </a:solidFill>
                 <a:latin typeface="Trebuchet MS" pitchFamily="34" charset="0"/>
                 <a:ea typeface="Trebuchet MS" pitchFamily="34" charset="-122"/>
                 <a:cs typeface="Trebuchet MS" pitchFamily="34" charset="-120"/>
               </a:rPr>
-              <a:t>direct</a:t>
+              <a:t>re</a:t>
             </a:r>
             <a:endParaRPr lang="en-US" sz="1300" dirty="0"/>
           </a:p>
@@ -19496,7 +19871,7 @@
                 <a:ea typeface="Calibri" pitchFamily="34" charset="-122"/>
                 <a:cs typeface="Calibri" pitchFamily="34" charset="-120"/>
               </a:rPr>
-              <a:t>to guide or go straight</a:t>
+              <a:t>again or back</a:t>
             </a:r>
             <a:endParaRPr lang="en-US" sz="850" dirty="0"/>
           </a:p>
@@ -19519,11 +19894,11 @@
             </a:avLst>
           </a:prstGeom>
           <a:solidFill>
-            <a:srgbClr val="FCE7F3"/>
+            <a:srgbClr val="CCFBF1"/>
           </a:solidFill>
           <a:ln w="19050">
             <a:solidFill>
-              <a:srgbClr val="DB2777"/>
+              <a:srgbClr val="0D9488"/>
             </a:solidFill>
             <a:prstDash val="solid"/>
           </a:ln>
@@ -19563,13 +19938,13 @@
             <a:r>
               <a:rPr lang="en-US" sz="1300" b="1" dirty="0">
                 <a:solidFill>
-                  <a:srgbClr val="9D174D"/>
+                  <a:srgbClr val="0F766E"/>
                 </a:solidFill>
                 <a:latin typeface="Trebuchet MS" pitchFamily="34" charset="0"/>
                 <a:ea typeface="Trebuchet MS" pitchFamily="34" charset="-122"/>
                 <a:cs typeface="Trebuchet MS" pitchFamily="34" charset="-120"/>
               </a:rPr>
-              <a:t>or</a:t>
+              <a:t>direct</a:t>
             </a:r>
             <a:endParaRPr lang="en-US" sz="1300" dirty="0"/>
           </a:p>
@@ -19608,7 +19983,7 @@
                 <a:ea typeface="Calibri" pitchFamily="34" charset="-122"/>
                 <a:cs typeface="Calibri" pitchFamily="34" charset="-120"/>
               </a:rPr>
-              <a:t>person who does something</a:t>
+              <a:t>to guide or lead straight</a:t>
             </a:r>
             <a:endParaRPr lang="en-US" sz="850" dirty="0"/>
           </a:p>
@@ -20164,7 +20539,7 @@
                 <a:ea typeface="Calibri" pitchFamily="34" charset="-122"/>
                 <a:cs typeface="Calibri" pitchFamily="34" charset="-120"/>
               </a:rPr>
-              <a:t>Word Labs  •  wordlabs.app  •  Root: 'direct' = straight, guide, manage</a:t>
+              <a:t>Word Labs  •  wordlabs.app  •  Root: 'direct' = straight, guide, lead</a:t>
             </a:r>
             <a:endParaRPr lang="en-US" sz="800" dirty="0"/>
           </a:p>
@@ -20303,7 +20678,7 @@
                 <a:ea typeface="Trebuchet MS" pitchFamily="34" charset="-122"/>
                 <a:cs typeface="Trebuchet MS" pitchFamily="34" charset="-120"/>
               </a:rPr>
-              <a:t>director</a:t>
+              <a:t>redirect</a:t>
             </a:r>
             <a:endParaRPr lang="en-US" sz="2800" dirty="0"/>
           </a:p>
@@ -20392,11 +20767,11 @@
             </a:avLst>
           </a:prstGeom>
           <a:solidFill>
-            <a:srgbClr val="CCFBF1"/>
+            <a:srgbClr val="DDD6FE"/>
           </a:solidFill>
           <a:ln w="19050">
             <a:solidFill>
-              <a:srgbClr val="0D9488"/>
+              <a:srgbClr val="7C3AED"/>
             </a:solidFill>
             <a:prstDash val="solid"/>
           </a:ln>
@@ -20436,13 +20811,13 @@
             <a:r>
               <a:rPr lang="en-US" sz="1300" b="1" dirty="0">
                 <a:solidFill>
-                  <a:srgbClr val="0F766E"/>
+                  <a:srgbClr val="4C1D95"/>
                 </a:solidFill>
                 <a:latin typeface="Trebuchet MS" pitchFamily="34" charset="0"/>
                 <a:ea typeface="Trebuchet MS" pitchFamily="34" charset="-122"/>
                 <a:cs typeface="Trebuchet MS" pitchFamily="34" charset="-120"/>
               </a:rPr>
-              <a:t>direct</a:t>
+              <a:t>re</a:t>
             </a:r>
             <a:endParaRPr lang="en-US" sz="1300" dirty="0"/>
           </a:p>
@@ -20481,7 +20856,7 @@
                 <a:ea typeface="Calibri" pitchFamily="34" charset="-122"/>
                 <a:cs typeface="Calibri" pitchFamily="34" charset="-120"/>
               </a:rPr>
-              <a:t>to guide or go straight</a:t>
+              <a:t>again or back</a:t>
             </a:r>
             <a:endParaRPr lang="en-US" sz="850" dirty="0"/>
           </a:p>
@@ -20504,11 +20879,11 @@
             </a:avLst>
           </a:prstGeom>
           <a:solidFill>
-            <a:srgbClr val="FCE7F3"/>
+            <a:srgbClr val="CCFBF1"/>
           </a:solidFill>
           <a:ln w="19050">
             <a:solidFill>
-              <a:srgbClr val="DB2777"/>
+              <a:srgbClr val="0D9488"/>
             </a:solidFill>
             <a:prstDash val="solid"/>
           </a:ln>
@@ -20548,13 +20923,13 @@
             <a:r>
               <a:rPr lang="en-US" sz="1300" b="1" dirty="0">
                 <a:solidFill>
-                  <a:srgbClr val="9D174D"/>
+                  <a:srgbClr val="0F766E"/>
                 </a:solidFill>
                 <a:latin typeface="Trebuchet MS" pitchFamily="34" charset="0"/>
                 <a:ea typeface="Trebuchet MS" pitchFamily="34" charset="-122"/>
                 <a:cs typeface="Trebuchet MS" pitchFamily="34" charset="-120"/>
               </a:rPr>
-              <a:t>or</a:t>
+              <a:t>direct</a:t>
             </a:r>
             <a:endParaRPr lang="en-US" sz="1300" dirty="0"/>
           </a:p>
@@ -20593,7 +20968,7 @@
                 <a:ea typeface="Calibri" pitchFamily="34" charset="-122"/>
                 <a:cs typeface="Calibri" pitchFamily="34" charset="-120"/>
               </a:rPr>
-              <a:t>person who does something</a:t>
+              <a:t>to guide or lead straight</a:t>
             </a:r>
             <a:endParaRPr lang="en-US" sz="850" dirty="0"/>
           </a:p>
@@ -20752,7 +21127,7 @@
                 <a:ea typeface="Trebuchet MS" pitchFamily="34" charset="-122"/>
                 <a:cs typeface="Trebuchet MS" pitchFamily="34" charset="-120"/>
               </a:rPr>
-              <a:t>di</a:t>
+              <a:t>re</a:t>
             </a:r>
             <a:endParaRPr lang="en-US" sz="1400" dirty="0"/>
           </a:p>
@@ -20857,7 +21232,7 @@
                 <a:ea typeface="Trebuchet MS" pitchFamily="34" charset="-122"/>
                 <a:cs typeface="Trebuchet MS" pitchFamily="34" charset="-120"/>
               </a:rPr>
-              <a:t>rec</a:t>
+              <a:t>di</a:t>
             </a:r>
             <a:endParaRPr lang="en-US" sz="1400" dirty="0"/>
           </a:p>
@@ -20962,7 +21337,7 @@
                 <a:ea typeface="Trebuchet MS" pitchFamily="34" charset="-122"/>
                 <a:cs typeface="Trebuchet MS" pitchFamily="34" charset="-120"/>
               </a:rPr>
-              <a:t>tor</a:t>
+              <a:t>rect</a:t>
             </a:r>
             <a:endParaRPr lang="en-US" sz="1400" dirty="0"/>
           </a:p>
@@ -21386,7 +21761,7 @@
                 <a:ea typeface="Calibri" pitchFamily="34" charset="-122"/>
                 <a:cs typeface="Calibri" pitchFamily="34" charset="-120"/>
               </a:rPr>
-              <a:t>Word Labs  •  wordlabs.app  •  Root: 'direct' = straight, guide, manage</a:t>
+              <a:t>Word Labs  •  wordlabs.app  •  Root: 'direct' = straight, guide, lead</a:t>
             </a:r>
             <a:endParaRPr lang="en-US" sz="800" dirty="0"/>
           </a:p>
@@ -21525,7 +21900,7 @@
                 <a:ea typeface="Trebuchet MS" pitchFamily="34" charset="-122"/>
                 <a:cs typeface="Trebuchet MS" pitchFamily="34" charset="-120"/>
               </a:rPr>
-              <a:t>director</a:t>
+              <a:t>redirect</a:t>
             </a:r>
             <a:endParaRPr lang="en-US" sz="2800" dirty="0"/>
           </a:p>
@@ -21614,11 +21989,11 @@
             </a:avLst>
           </a:prstGeom>
           <a:solidFill>
-            <a:srgbClr val="CCFBF1"/>
+            <a:srgbClr val="DDD6FE"/>
           </a:solidFill>
           <a:ln w="19050">
             <a:solidFill>
-              <a:srgbClr val="0D9488"/>
+              <a:srgbClr val="7C3AED"/>
             </a:solidFill>
             <a:prstDash val="solid"/>
           </a:ln>
@@ -21658,13 +22033,13 @@
             <a:r>
               <a:rPr lang="en-US" sz="1300" b="1" dirty="0">
                 <a:solidFill>
-                  <a:srgbClr val="0F766E"/>
+                  <a:srgbClr val="4C1D95"/>
                 </a:solidFill>
                 <a:latin typeface="Trebuchet MS" pitchFamily="34" charset="0"/>
                 <a:ea typeface="Trebuchet MS" pitchFamily="34" charset="-122"/>
                 <a:cs typeface="Trebuchet MS" pitchFamily="34" charset="-120"/>
               </a:rPr>
-              <a:t>direct</a:t>
+              <a:t>re</a:t>
             </a:r>
             <a:endParaRPr lang="en-US" sz="1300" dirty="0"/>
           </a:p>
@@ -21703,7 +22078,7 @@
                 <a:ea typeface="Calibri" pitchFamily="34" charset="-122"/>
                 <a:cs typeface="Calibri" pitchFamily="34" charset="-120"/>
               </a:rPr>
-              <a:t>to guide or go straight</a:t>
+              <a:t>again or back</a:t>
             </a:r>
             <a:endParaRPr lang="en-US" sz="850" dirty="0"/>
           </a:p>
@@ -21726,11 +22101,11 @@
             </a:avLst>
           </a:prstGeom>
           <a:solidFill>
-            <a:srgbClr val="FCE7F3"/>
+            <a:srgbClr val="CCFBF1"/>
           </a:solidFill>
           <a:ln w="19050">
             <a:solidFill>
-              <a:srgbClr val="DB2777"/>
+              <a:srgbClr val="0D9488"/>
             </a:solidFill>
             <a:prstDash val="solid"/>
           </a:ln>
@@ -21770,13 +22145,13 @@
             <a:r>
               <a:rPr lang="en-US" sz="1300" b="1" dirty="0">
                 <a:solidFill>
-                  <a:srgbClr val="9D174D"/>
+                  <a:srgbClr val="0F766E"/>
                 </a:solidFill>
                 <a:latin typeface="Trebuchet MS" pitchFamily="34" charset="0"/>
                 <a:ea typeface="Trebuchet MS" pitchFamily="34" charset="-122"/>
                 <a:cs typeface="Trebuchet MS" pitchFamily="34" charset="-120"/>
               </a:rPr>
-              <a:t>or</a:t>
+              <a:t>direct</a:t>
             </a:r>
             <a:endParaRPr lang="en-US" sz="1300" dirty="0"/>
           </a:p>
@@ -21815,7 +22190,7 @@
                 <a:ea typeface="Calibri" pitchFamily="34" charset="-122"/>
                 <a:cs typeface="Calibri" pitchFamily="34" charset="-120"/>
               </a:rPr>
-              <a:t>person who does something</a:t>
+              <a:t>to guide or lead straight</a:t>
             </a:r>
             <a:endParaRPr lang="en-US" sz="850" dirty="0"/>
           </a:p>
@@ -21974,7 +22349,7 @@
                 <a:ea typeface="Trebuchet MS" pitchFamily="34" charset="-122"/>
                 <a:cs typeface="Trebuchet MS" pitchFamily="34" charset="-120"/>
               </a:rPr>
-              <a:t>di</a:t>
+              <a:t>re</a:t>
             </a:r>
             <a:endParaRPr lang="en-US" sz="1400" dirty="0"/>
           </a:p>
@@ -22079,7 +22454,7 @@
                 <a:ea typeface="Trebuchet MS" pitchFamily="34" charset="-122"/>
                 <a:cs typeface="Trebuchet MS" pitchFamily="34" charset="-120"/>
               </a:rPr>
-              <a:t>rec</a:t>
+              <a:t>di</a:t>
             </a:r>
             <a:endParaRPr lang="en-US" sz="1400" dirty="0"/>
           </a:p>
@@ -22184,7 +22559,7 @@
                 <a:ea typeface="Trebuchet MS" pitchFamily="34" charset="-122"/>
                 <a:cs typeface="Trebuchet MS" pitchFamily="34" charset="-120"/>
               </a:rPr>
-              <a:t>tor</a:t>
+              <a:t>rect</a:t>
             </a:r>
             <a:endParaRPr lang="en-US" sz="1400" dirty="0"/>
           </a:p>
@@ -22291,7 +22666,7 @@
         </p:nvSpPr>
         <p:spPr>
           <a:xfrm>
-            <a:off x="2124837" y="4169664"/>
+            <a:off x="2023872" y="4169664"/>
             <a:ext cx="685800" cy="384048"/>
           </a:xfrm>
           <a:prstGeom prst="rect">
@@ -22318,7 +22693,7 @@
         </p:nvSpPr>
         <p:spPr>
           <a:xfrm>
-            <a:off x="2124837" y="4169664"/>
+            <a:off x="2023872" y="4169664"/>
             <a:ext cx="685800" cy="384048"/>
           </a:xfrm>
           <a:prstGeom prst="rect">
@@ -22343,7 +22718,7 @@
                 <a:ea typeface="Trebuchet MS" pitchFamily="34" charset="-122"/>
                 <a:cs typeface="Trebuchet MS" pitchFamily="34" charset="-120"/>
               </a:rPr>
-              <a:t>d</a:t>
+              <a:t>r</a:t>
             </a:r>
             <a:endParaRPr lang="en-US" sz="900" dirty="0"/>
           </a:p>
@@ -22357,7 +22732,7 @@
         </p:nvSpPr>
         <p:spPr>
           <a:xfrm>
-            <a:off x="3033522" y="4169664"/>
+            <a:off x="2831592" y="4169664"/>
             <a:ext cx="685800" cy="384048"/>
           </a:xfrm>
           <a:prstGeom prst="rect">
@@ -22384,7 +22759,7 @@
         </p:nvSpPr>
         <p:spPr>
           <a:xfrm>
-            <a:off x="3033522" y="4169664"/>
+            <a:off x="2831592" y="4169664"/>
             <a:ext cx="685800" cy="384048"/>
           </a:xfrm>
           <a:prstGeom prst="rect">
@@ -22409,7 +22784,7 @@
                 <a:ea typeface="Trebuchet MS" pitchFamily="34" charset="-122"/>
                 <a:cs typeface="Trebuchet MS" pitchFamily="34" charset="-120"/>
               </a:rPr>
-              <a:t>i</a:t>
+              <a:t>e</a:t>
             </a:r>
             <a:endParaRPr lang="en-US" sz="900" dirty="0"/>
           </a:p>
@@ -22423,7 +22798,7 @@
         </p:nvSpPr>
         <p:spPr>
           <a:xfrm>
-            <a:off x="3942207" y="4169664"/>
+            <a:off x="3639312" y="4169664"/>
             <a:ext cx="685800" cy="384048"/>
           </a:xfrm>
           <a:prstGeom prst="rect">
@@ -22450,7 +22825,7 @@
         </p:nvSpPr>
         <p:spPr>
           <a:xfrm>
-            <a:off x="3942207" y="4169664"/>
+            <a:off x="3639312" y="4169664"/>
             <a:ext cx="685800" cy="384048"/>
           </a:xfrm>
           <a:prstGeom prst="rect">
@@ -22475,7 +22850,7 @@
                 <a:ea typeface="Trebuchet MS" pitchFamily="34" charset="-122"/>
                 <a:cs typeface="Trebuchet MS" pitchFamily="34" charset="-120"/>
               </a:rPr>
-              <a:t>r</a:t>
+              <a:t>d</a:t>
             </a:r>
             <a:endParaRPr lang="en-US" sz="900" dirty="0"/>
           </a:p>
@@ -22489,7 +22864,7 @@
         </p:nvSpPr>
         <p:spPr>
           <a:xfrm>
-            <a:off x="4850892" y="4169664"/>
+            <a:off x="4447032" y="4169664"/>
             <a:ext cx="685800" cy="384048"/>
           </a:xfrm>
           <a:prstGeom prst="rect">
@@ -22516,7 +22891,7 @@
         </p:nvSpPr>
         <p:spPr>
           <a:xfrm>
-            <a:off x="4850892" y="4169664"/>
+            <a:off x="4447032" y="4169664"/>
             <a:ext cx="685800" cy="384048"/>
           </a:xfrm>
           <a:prstGeom prst="rect">
@@ -22541,7 +22916,7 @@
                 <a:ea typeface="Trebuchet MS" pitchFamily="34" charset="-122"/>
                 <a:cs typeface="Trebuchet MS" pitchFamily="34" charset="-120"/>
               </a:rPr>
-              <a:t>e</a:t>
+              <a:t>i</a:t>
             </a:r>
             <a:endParaRPr lang="en-US" sz="900" dirty="0"/>
           </a:p>
@@ -22555,7 +22930,7 @@
         </p:nvSpPr>
         <p:spPr>
           <a:xfrm>
-            <a:off x="5759577" y="4169664"/>
+            <a:off x="5254752" y="4169664"/>
             <a:ext cx="685800" cy="384048"/>
           </a:xfrm>
           <a:prstGeom prst="rect">
@@ -22582,7 +22957,7 @@
         </p:nvSpPr>
         <p:spPr>
           <a:xfrm>
-            <a:off x="5759577" y="4169664"/>
+            <a:off x="5254752" y="4169664"/>
             <a:ext cx="685800" cy="384048"/>
           </a:xfrm>
           <a:prstGeom prst="rect">
@@ -22607,6 +22982,138 @@
                 <a:ea typeface="Trebuchet MS" pitchFamily="34" charset="-122"/>
                 <a:cs typeface="Trebuchet MS" pitchFamily="34" charset="-120"/>
               </a:rPr>
+              <a:t>r</a:t>
+            </a:r>
+            <a:endParaRPr lang="en-US" sz="900" dirty="0"/>
+          </a:p>
+        </p:txBody>
+      </p:sp>
+      <p:sp>
+        <p:nvSpPr>
+          <p:cNvPr id="46" name="Shape 44"/>
+          <p:cNvSpPr/>
+          <p:nvPr/>
+        </p:nvSpPr>
+        <p:spPr>
+          <a:xfrm>
+            <a:off x="6062472" y="4169664"/>
+            <a:ext cx="685800" cy="384048"/>
+          </a:xfrm>
+          <a:prstGeom prst="rect">
+            <a:avLst>
+              <a:gd name="adj" fmla="val 9524"/>
+            </a:avLst>
+          </a:prstGeom>
+          <a:solidFill>
+            <a:srgbClr val="FFFFFF"/>
+          </a:solidFill>
+          <a:ln w="12700">
+            <a:solidFill>
+              <a:srgbClr val="DB2777"/>
+            </a:solidFill>
+            <a:prstDash val="solid"/>
+          </a:ln>
+        </p:spPr>
+      </p:sp>
+      <p:sp>
+        <p:nvSpPr>
+          <p:cNvPr id="47" name="Text 45"/>
+          <p:cNvSpPr/>
+          <p:nvPr/>
+        </p:nvSpPr>
+        <p:spPr>
+          <a:xfrm>
+            <a:off x="6062472" y="4169664"/>
+            <a:ext cx="685800" cy="384048"/>
+          </a:xfrm>
+          <a:prstGeom prst="rect">
+            <a:avLst/>
+          </a:prstGeom>
+          <a:noFill/>
+          <a:ln/>
+        </p:spPr>
+        <p:txBody>
+          <a:bodyPr wrap="square" lIns="0" tIns="0" rIns="0" bIns="0" rtlCol="0" anchor="ctr"/>
+          <a:lstStyle/>
+          <a:p>
+            <a:pPr algn="ctr" indent="0" marL="0">
+              <a:buNone/>
+            </a:pPr>
+            <a:r>
+              <a:rPr lang="en-US" sz="900" b="1" dirty="0">
+                <a:solidFill>
+                  <a:srgbClr val="9D174D"/>
+                </a:solidFill>
+                <a:latin typeface="Trebuchet MS" pitchFamily="34" charset="0"/>
+                <a:ea typeface="Trebuchet MS" pitchFamily="34" charset="-122"/>
+                <a:cs typeface="Trebuchet MS" pitchFamily="34" charset="-120"/>
+              </a:rPr>
+              <a:t>e</a:t>
+            </a:r>
+            <a:endParaRPr lang="en-US" sz="900" dirty="0"/>
+          </a:p>
+        </p:txBody>
+      </p:sp>
+      <p:sp>
+        <p:nvSpPr>
+          <p:cNvPr id="48" name="Shape 46"/>
+          <p:cNvSpPr/>
+          <p:nvPr/>
+        </p:nvSpPr>
+        <p:spPr>
+          <a:xfrm>
+            <a:off x="6870192" y="4169664"/>
+            <a:ext cx="685800" cy="384048"/>
+          </a:xfrm>
+          <a:prstGeom prst="rect">
+            <a:avLst>
+              <a:gd name="adj" fmla="val 9524"/>
+            </a:avLst>
+          </a:prstGeom>
+          <a:solidFill>
+            <a:srgbClr val="FFFFFF"/>
+          </a:solidFill>
+          <a:ln w="12700">
+            <a:solidFill>
+              <a:srgbClr val="DB2777"/>
+            </a:solidFill>
+            <a:prstDash val="solid"/>
+          </a:ln>
+        </p:spPr>
+      </p:sp>
+      <p:sp>
+        <p:nvSpPr>
+          <p:cNvPr id="49" name="Text 47"/>
+          <p:cNvSpPr/>
+          <p:nvPr/>
+        </p:nvSpPr>
+        <p:spPr>
+          <a:xfrm>
+            <a:off x="6870192" y="4169664"/>
+            <a:ext cx="685800" cy="384048"/>
+          </a:xfrm>
+          <a:prstGeom prst="rect">
+            <a:avLst/>
+          </a:prstGeom>
+          <a:noFill/>
+          <a:ln/>
+        </p:spPr>
+        <p:txBody>
+          <a:bodyPr wrap="square" lIns="0" tIns="0" rIns="0" bIns="0" rtlCol="0" anchor="ctr"/>
+          <a:lstStyle/>
+          <a:p>
+            <a:pPr algn="ctr" indent="0" marL="0">
+              <a:buNone/>
+            </a:pPr>
+            <a:r>
+              <a:rPr lang="en-US" sz="900" b="1" dirty="0">
+                <a:solidFill>
+                  <a:srgbClr val="9D174D"/>
+                </a:solidFill>
+                <a:latin typeface="Trebuchet MS" pitchFamily="34" charset="0"/>
+                <a:ea typeface="Trebuchet MS" pitchFamily="34" charset="-122"/>
+                <a:cs typeface="Trebuchet MS" pitchFamily="34" charset="-120"/>
+              </a:rPr>
               <a:t>c</a:t>
             </a:r>
             <a:endParaRPr lang="en-US" sz="900" dirty="0"/>
@@ -22615,13 +23122,13 @@
       </p:sp>
       <p:sp>
         <p:nvSpPr>
-          <p:cNvPr id="46" name="Text 44"/>
-          <p:cNvSpPr/>
-          <p:nvPr/>
-        </p:nvSpPr>
-        <p:spPr>
-          <a:xfrm>
-            <a:off x="5759577" y="4572000"/>
+          <p:cNvPr id="50" name="Text 48"/>
+          <p:cNvSpPr/>
+          <p:nvPr/>
+        </p:nvSpPr>
+        <p:spPr>
+          <a:xfrm>
+            <a:off x="6870192" y="4572000"/>
             <a:ext cx="685800" cy="219456"/>
           </a:xfrm>
           <a:prstGeom prst="rect">
@@ -22654,13 +23161,13 @@
       </p:sp>
       <p:sp>
         <p:nvSpPr>
-          <p:cNvPr id="47" name="Shape 45"/>
-          <p:cNvSpPr/>
-          <p:nvPr/>
-        </p:nvSpPr>
-        <p:spPr>
-          <a:xfrm>
-            <a:off x="6668262" y="4169664"/>
+          <p:cNvPr id="51" name="Shape 49"/>
+          <p:cNvSpPr/>
+          <p:nvPr/>
+        </p:nvSpPr>
+        <p:spPr>
+          <a:xfrm>
+            <a:off x="7677912" y="4169664"/>
             <a:ext cx="685800" cy="384048"/>
           </a:xfrm>
           <a:prstGeom prst="rect">
@@ -22681,13 +23188,13 @@
       </p:sp>
       <p:sp>
         <p:nvSpPr>
-          <p:cNvPr id="48" name="Text 46"/>
-          <p:cNvSpPr/>
-          <p:nvPr/>
-        </p:nvSpPr>
-        <p:spPr>
-          <a:xfrm>
-            <a:off x="6668262" y="4169664"/>
+          <p:cNvPr id="52" name="Text 50"/>
+          <p:cNvSpPr/>
+          <p:nvPr/>
+        </p:nvSpPr>
+        <p:spPr>
+          <a:xfrm>
+            <a:off x="7677912" y="4169664"/>
             <a:ext cx="685800" cy="384048"/>
           </a:xfrm>
           <a:prstGeom prst="rect">
@@ -22713,72 +23220,6 @@
                 <a:cs typeface="Trebuchet MS" pitchFamily="34" charset="-120"/>
               </a:rPr>
               <a:t>t</a:t>
-            </a:r>
-            <a:endParaRPr lang="en-US" sz="900" dirty="0"/>
-          </a:p>
-        </p:txBody>
-      </p:sp>
-      <p:sp>
-        <p:nvSpPr>
-          <p:cNvPr id="49" name="Shape 47"/>
-          <p:cNvSpPr/>
-          <p:nvPr/>
-        </p:nvSpPr>
-        <p:spPr>
-          <a:xfrm>
-            <a:off x="7576947" y="4169664"/>
-            <a:ext cx="685800" cy="384048"/>
-          </a:xfrm>
-          <a:prstGeom prst="rect">
-            <a:avLst>
-              <a:gd name="adj" fmla="val 9524"/>
-            </a:avLst>
-          </a:prstGeom>
-          <a:solidFill>
-            <a:srgbClr val="FFFFFF"/>
-          </a:solidFill>
-          <a:ln w="12700">
-            <a:solidFill>
-              <a:srgbClr val="DB2777"/>
-            </a:solidFill>
-            <a:prstDash val="solid"/>
-          </a:ln>
-        </p:spPr>
-      </p:sp>
-      <p:sp>
-        <p:nvSpPr>
-          <p:cNvPr id="50" name="Text 48"/>
-          <p:cNvSpPr/>
-          <p:nvPr/>
-        </p:nvSpPr>
-        <p:spPr>
-          <a:xfrm>
-            <a:off x="7576947" y="4169664"/>
-            <a:ext cx="685800" cy="384048"/>
-          </a:xfrm>
-          <a:prstGeom prst="rect">
-            <a:avLst/>
-          </a:prstGeom>
-          <a:noFill/>
-          <a:ln/>
-        </p:spPr>
-        <p:txBody>
-          <a:bodyPr wrap="square" lIns="0" tIns="0" rIns="0" bIns="0" rtlCol="0" anchor="ctr"/>
-          <a:lstStyle/>
-          <a:p>
-            <a:pPr algn="ctr" indent="0" marL="0">
-              <a:buNone/>
-            </a:pPr>
-            <a:r>
-              <a:rPr lang="en-US" sz="900" b="1" dirty="0">
-                <a:solidFill>
-                  <a:srgbClr val="9D174D"/>
-                </a:solidFill>
-                <a:latin typeface="Trebuchet MS" pitchFamily="34" charset="0"/>
-                <a:ea typeface="Trebuchet MS" pitchFamily="34" charset="-122"/>
-                <a:cs typeface="Trebuchet MS" pitchFamily="34" charset="-120"/>
-              </a:rPr>
-              <a:t>or</a:t>
             </a:r>
             <a:endParaRPr lang="en-US" sz="900" dirty="0"/>
           </a:p>
@@ -23070,7 +23511,7 @@
                 <a:ea typeface="Calibri" pitchFamily="34" charset="-122"/>
                 <a:cs typeface="Calibri" pitchFamily="34" charset="-120"/>
               </a:rPr>
-              <a:t>Word Labs  •  wordlabs.app  •  Root: 'direct' = straight, guide, manage</a:t>
+              <a:t>Word Labs  •  wordlabs.app  •  Root: 'direct' = straight, guide, lead</a:t>
             </a:r>
             <a:endParaRPr lang="en-US" sz="800" dirty="0"/>
           </a:p>
@@ -23209,7 +23650,7 @@
                 <a:ea typeface="Trebuchet MS" pitchFamily="34" charset="-122"/>
                 <a:cs typeface="Trebuchet MS" pitchFamily="34" charset="-120"/>
               </a:rPr>
-              <a:t>redirect</a:t>
+              <a:t>misdirected</a:t>
             </a:r>
             <a:endParaRPr lang="en-US" sz="2800" dirty="0"/>
           </a:p>
@@ -23897,7 +24338,7 @@
                 <a:ea typeface="Calibri" pitchFamily="34" charset="-122"/>
                 <a:cs typeface="Calibri" pitchFamily="34" charset="-120"/>
               </a:rPr>
-              <a:t>Word Labs  •  wordlabs.app  •  Root: 'direct' = straight, guide, manage</a:t>
+              <a:t>Word Labs  •  wordlabs.app  •  Root: 'direct' = straight, guide, lead</a:t>
             </a:r>
             <a:endParaRPr lang="en-US" sz="800" dirty="0"/>
           </a:p>
@@ -24036,7 +24477,7 @@
                 <a:ea typeface="Trebuchet MS" pitchFamily="34" charset="-122"/>
                 <a:cs typeface="Trebuchet MS" pitchFamily="34" charset="-120"/>
               </a:rPr>
-              <a:t>redirect</a:t>
+              <a:t>misdirected</a:t>
             </a:r>
             <a:endParaRPr lang="en-US" sz="2800" dirty="0"/>
           </a:p>
@@ -24116,7 +24557,7 @@
         </p:nvSpPr>
         <p:spPr>
           <a:xfrm>
-            <a:off x="2938272" y="2258568"/>
+            <a:off x="2221992" y="2258568"/>
             <a:ext cx="1828800" cy="292608"/>
           </a:xfrm>
           <a:prstGeom prst="rect">
@@ -24150,7 +24591,7 @@
         </p:nvSpPr>
         <p:spPr>
           <a:xfrm>
-            <a:off x="2938272" y="2258568"/>
+            <a:off x="2221992" y="2258568"/>
             <a:ext cx="1828800" cy="292608"/>
           </a:xfrm>
           <a:prstGeom prst="rect">
@@ -24175,7 +24616,7 @@
                 <a:ea typeface="Trebuchet MS" pitchFamily="34" charset="-122"/>
                 <a:cs typeface="Trebuchet MS" pitchFamily="34" charset="-120"/>
               </a:rPr>
-              <a:t>re</a:t>
+              <a:t>mis</a:t>
             </a:r>
             <a:endParaRPr lang="en-US" sz="1300" dirty="0"/>
           </a:p>
@@ -24189,7 +24630,7 @@
         </p:nvSpPr>
         <p:spPr>
           <a:xfrm>
-            <a:off x="2938272" y="2569464"/>
+            <a:off x="2221992" y="2569464"/>
             <a:ext cx="1828800" cy="201168"/>
           </a:xfrm>
           <a:prstGeom prst="rect">
@@ -24214,7 +24655,7 @@
                 <a:ea typeface="Calibri" pitchFamily="34" charset="-122"/>
                 <a:cs typeface="Calibri" pitchFamily="34" charset="-120"/>
               </a:rPr>
-              <a:t>again or back</a:t>
+              <a:t>wrongly or badly</a:t>
             </a:r>
             <a:endParaRPr lang="en-US" sz="850" dirty="0"/>
           </a:p>
@@ -24228,7 +24669,7 @@
         </p:nvSpPr>
         <p:spPr>
           <a:xfrm>
-            <a:off x="5803392" y="2258568"/>
+            <a:off x="4370832" y="2258568"/>
             <a:ext cx="1828800" cy="292608"/>
           </a:xfrm>
           <a:prstGeom prst="rect">
@@ -24262,7 +24703,7 @@
         </p:nvSpPr>
         <p:spPr>
           <a:xfrm>
-            <a:off x="5803392" y="2258568"/>
+            <a:off x="4370832" y="2258568"/>
             <a:ext cx="1828800" cy="292608"/>
           </a:xfrm>
           <a:prstGeom prst="rect">
@@ -24301,7 +24742,7 @@
         </p:nvSpPr>
         <p:spPr>
           <a:xfrm>
-            <a:off x="5803392" y="2569464"/>
+            <a:off x="4370832" y="2569464"/>
             <a:ext cx="1828800" cy="201168"/>
           </a:xfrm>
           <a:prstGeom prst="rect">
@@ -24326,7 +24767,7 @@
                 <a:ea typeface="Calibri" pitchFamily="34" charset="-122"/>
                 <a:cs typeface="Calibri" pitchFamily="34" charset="-120"/>
               </a:rPr>
-              <a:t>to guide or go straight</a:t>
+              <a:t>to guide or lead straight</a:t>
             </a:r>
             <a:endParaRPr lang="en-US" sz="850" dirty="0"/>
           </a:p>
@@ -24335,6 +24776,118 @@
       <p:sp>
         <p:nvSpPr>
           <p:cNvPr id="22" name="Shape 20"/>
+          <p:cNvSpPr/>
+          <p:nvPr/>
+        </p:nvSpPr>
+        <p:spPr>
+          <a:xfrm>
+            <a:off x="6519672" y="2258568"/>
+            <a:ext cx="1828800" cy="292608"/>
+          </a:xfrm>
+          <a:prstGeom prst="rect">
+            <a:avLst>
+              <a:gd name="adj" fmla="val 25000"/>
+            </a:avLst>
+          </a:prstGeom>
+          <a:solidFill>
+            <a:srgbClr val="FCE7F3"/>
+          </a:solidFill>
+          <a:ln w="19050">
+            <a:solidFill>
+              <a:srgbClr val="DB2777"/>
+            </a:solidFill>
+            <a:prstDash val="solid"/>
+          </a:ln>
+          <a:effectLst>
+            <a:outerShdw sx="100000" sy="100000" kx="0" ky="0" algn="bl" rotWithShape="0" blurRad="101600" dist="38100" dir="8100000">
+              <a:srgbClr val="000000">
+                <a:alpha val="12000"/>
+              </a:srgbClr>
+            </a:outerShdw>
+          </a:effectLst>
+        </p:spPr>
+      </p:sp>
+      <p:sp>
+        <p:nvSpPr>
+          <p:cNvPr id="23" name="Text 21"/>
+          <p:cNvSpPr/>
+          <p:nvPr/>
+        </p:nvSpPr>
+        <p:spPr>
+          <a:xfrm>
+            <a:off x="6519672" y="2258568"/>
+            <a:ext cx="1828800" cy="292608"/>
+          </a:xfrm>
+          <a:prstGeom prst="rect">
+            <a:avLst/>
+          </a:prstGeom>
+          <a:noFill/>
+          <a:ln/>
+        </p:spPr>
+        <p:txBody>
+          <a:bodyPr wrap="square" lIns="0" tIns="0" rIns="0" bIns="0" rtlCol="0" anchor="ctr"/>
+          <a:lstStyle/>
+          <a:p>
+            <a:pPr algn="ctr" indent="0" marL="0">
+              <a:buNone/>
+            </a:pPr>
+            <a:r>
+              <a:rPr lang="en-US" sz="1300" b="1" dirty="0">
+                <a:solidFill>
+                  <a:srgbClr val="9D174D"/>
+                </a:solidFill>
+                <a:latin typeface="Trebuchet MS" pitchFamily="34" charset="0"/>
+                <a:ea typeface="Trebuchet MS" pitchFamily="34" charset="-122"/>
+                <a:cs typeface="Trebuchet MS" pitchFamily="34" charset="-120"/>
+              </a:rPr>
+              <a:t>ed</a:t>
+            </a:r>
+            <a:endParaRPr lang="en-US" sz="1300" dirty="0"/>
+          </a:p>
+        </p:txBody>
+      </p:sp>
+      <p:sp>
+        <p:nvSpPr>
+          <p:cNvPr id="24" name="Text 22"/>
+          <p:cNvSpPr/>
+          <p:nvPr/>
+        </p:nvSpPr>
+        <p:spPr>
+          <a:xfrm>
+            <a:off x="6519672" y="2569464"/>
+            <a:ext cx="1828800" cy="201168"/>
+          </a:xfrm>
+          <a:prstGeom prst="rect">
+            <a:avLst/>
+          </a:prstGeom>
+          <a:noFill/>
+          <a:ln/>
+        </p:spPr>
+        <p:txBody>
+          <a:bodyPr wrap="square" lIns="0" tIns="0" rIns="0" bIns="0" rtlCol="0" anchor="t"/>
+          <a:lstStyle/>
+          <a:p>
+            <a:pPr algn="ctr" indent="0" marL="0">
+              <a:buNone/>
+            </a:pPr>
+            <a:r>
+              <a:rPr lang="en-US" sz="850" dirty="0">
+                <a:solidFill>
+                  <a:srgbClr val="475569"/>
+                </a:solidFill>
+                <a:latin typeface="Calibri" pitchFamily="34" charset="0"/>
+                <a:ea typeface="Calibri" pitchFamily="34" charset="-122"/>
+                <a:cs typeface="Calibri" pitchFamily="34" charset="-120"/>
+              </a:rPr>
+              <a:t>happened in the past</a:t>
+            </a:r>
+            <a:endParaRPr lang="en-US" sz="850" dirty="0"/>
+          </a:p>
+        </p:txBody>
+      </p:sp>
+      <p:sp>
+        <p:nvSpPr>
+          <p:cNvPr id="25" name="Shape 23"/>
           <p:cNvSpPr/>
           <p:nvPr/>
         </p:nvSpPr>
@@ -24361,7 +24914,7 @@
       </p:sp>
       <p:sp>
         <p:nvSpPr>
-          <p:cNvPr id="23" name="Text 21"/>
+          <p:cNvPr id="26" name="Text 24"/>
           <p:cNvSpPr/>
           <p:nvPr/>
         </p:nvSpPr>
@@ -24400,7 +24953,7 @@
       </p:sp>
       <p:sp>
         <p:nvSpPr>
-          <p:cNvPr id="24" name="Shape 22"/>
+          <p:cNvPr id="27" name="Shape 25"/>
           <p:cNvSpPr/>
           <p:nvPr/>
         </p:nvSpPr>
@@ -24427,7 +24980,7 @@
       </p:sp>
       <p:sp>
         <p:nvSpPr>
-          <p:cNvPr id="25" name="Text 23"/>
+          <p:cNvPr id="28" name="Text 26"/>
           <p:cNvSpPr/>
           <p:nvPr/>
         </p:nvSpPr>
@@ -24466,7 +25019,7 @@
       </p:sp>
       <p:sp>
         <p:nvSpPr>
-          <p:cNvPr id="26" name="Shape 24"/>
+          <p:cNvPr id="29" name="Shape 27"/>
           <p:cNvSpPr/>
           <p:nvPr/>
         </p:nvSpPr>
@@ -24493,7 +25046,7 @@
       </p:sp>
       <p:sp>
         <p:nvSpPr>
-          <p:cNvPr id="27" name="Text 25"/>
+          <p:cNvPr id="30" name="Text 28"/>
           <p:cNvSpPr/>
           <p:nvPr/>
         </p:nvSpPr>
@@ -24532,7 +25085,7 @@
       </p:sp>
       <p:sp>
         <p:nvSpPr>
-          <p:cNvPr id="28" name="Shape 26"/>
+          <p:cNvPr id="31" name="Shape 29"/>
           <p:cNvSpPr/>
           <p:nvPr/>
         </p:nvSpPr>
@@ -24559,7 +25112,7 @@
       </p:sp>
       <p:sp>
         <p:nvSpPr>
-          <p:cNvPr id="29" name="Text 27"/>
+          <p:cNvPr id="32" name="Text 30"/>
           <p:cNvSpPr/>
           <p:nvPr/>
         </p:nvSpPr>
@@ -24882,7 +25435,7 @@
                 <a:ea typeface="Calibri" pitchFamily="34" charset="-122"/>
                 <a:cs typeface="Calibri" pitchFamily="34" charset="-120"/>
               </a:rPr>
-              <a:t>Word Labs  •  wordlabs.app  •  Root: 'direct' = straight, guide, manage</a:t>
+              <a:t>Word Labs  •  wordlabs.app  •  Root: 'direct' = straight, guide, lead</a:t>
             </a:r>
             <a:endParaRPr lang="en-US" sz="800" dirty="0"/>
           </a:p>
@@ -24955,7 +25508,7 @@
                 <a:ea typeface="Trebuchet MS" pitchFamily="34" charset="-122"/>
                 <a:cs typeface="Trebuchet MS" pitchFamily="34" charset="-120"/>
               </a:rPr>
-              <a:t>We are learning that the root 'direct' means 'straight, guide, manage'.</a:t>
+              <a:t>We are learning that the root 'direct' means 'straight, guide, lead'.</a:t>
             </a:r>
             <a:endParaRPr lang="en-US" sz="2000" dirty="0"/>
           </a:p>
@@ -25601,7 +26154,7 @@
                 <a:ea typeface="Calibri" pitchFamily="34" charset="-122"/>
                 <a:cs typeface="Calibri" pitchFamily="34" charset="-120"/>
               </a:rPr>
-              <a:t>Word Labs  •  wordlabs.app  •  Root: 'direct' = straight, guide, manage</a:t>
+              <a:t>Word Labs  •  wordlabs.app  •  Root: 'direct' = straight, guide, lead</a:t>
             </a:r>
             <a:endParaRPr lang="en-US" sz="800" dirty="0"/>
           </a:p>
@@ -25740,7 +26293,7 @@
                 <a:ea typeface="Trebuchet MS" pitchFamily="34" charset="-122"/>
                 <a:cs typeface="Trebuchet MS" pitchFamily="34" charset="-120"/>
               </a:rPr>
-              <a:t>redirect</a:t>
+              <a:t>misdirected</a:t>
             </a:r>
             <a:endParaRPr lang="en-US" sz="2800" dirty="0"/>
           </a:p>
@@ -25820,7 +26373,7 @@
         </p:nvSpPr>
         <p:spPr>
           <a:xfrm>
-            <a:off x="2938272" y="2258568"/>
+            <a:off x="2221992" y="2258568"/>
             <a:ext cx="1828800" cy="292608"/>
           </a:xfrm>
           <a:prstGeom prst="rect">
@@ -25854,7 +26407,7 @@
         </p:nvSpPr>
         <p:spPr>
           <a:xfrm>
-            <a:off x="2938272" y="2258568"/>
+            <a:off x="2221992" y="2258568"/>
             <a:ext cx="1828800" cy="292608"/>
           </a:xfrm>
           <a:prstGeom prst="rect">
@@ -25879,7 +26432,7 @@
                 <a:ea typeface="Trebuchet MS" pitchFamily="34" charset="-122"/>
                 <a:cs typeface="Trebuchet MS" pitchFamily="34" charset="-120"/>
               </a:rPr>
-              <a:t>re</a:t>
+              <a:t>mis</a:t>
             </a:r>
             <a:endParaRPr lang="en-US" sz="1300" dirty="0"/>
           </a:p>
@@ -25893,7 +26446,7 @@
         </p:nvSpPr>
         <p:spPr>
           <a:xfrm>
-            <a:off x="2938272" y="2569464"/>
+            <a:off x="2221992" y="2569464"/>
             <a:ext cx="1828800" cy="201168"/>
           </a:xfrm>
           <a:prstGeom prst="rect">
@@ -25918,7 +26471,7 @@
                 <a:ea typeface="Calibri" pitchFamily="34" charset="-122"/>
                 <a:cs typeface="Calibri" pitchFamily="34" charset="-120"/>
               </a:rPr>
-              <a:t>again or back</a:t>
+              <a:t>wrongly or badly</a:t>
             </a:r>
             <a:endParaRPr lang="en-US" sz="850" dirty="0"/>
           </a:p>
@@ -25932,7 +26485,7 @@
         </p:nvSpPr>
         <p:spPr>
           <a:xfrm>
-            <a:off x="5803392" y="2258568"/>
+            <a:off x="4370832" y="2258568"/>
             <a:ext cx="1828800" cy="292608"/>
           </a:xfrm>
           <a:prstGeom prst="rect">
@@ -25966,7 +26519,7 @@
         </p:nvSpPr>
         <p:spPr>
           <a:xfrm>
-            <a:off x="5803392" y="2258568"/>
+            <a:off x="4370832" y="2258568"/>
             <a:ext cx="1828800" cy="292608"/>
           </a:xfrm>
           <a:prstGeom prst="rect">
@@ -26005,7 +26558,7 @@
         </p:nvSpPr>
         <p:spPr>
           <a:xfrm>
-            <a:off x="5803392" y="2569464"/>
+            <a:off x="4370832" y="2569464"/>
             <a:ext cx="1828800" cy="201168"/>
           </a:xfrm>
           <a:prstGeom prst="rect">
@@ -26030,7 +26583,7 @@
                 <a:ea typeface="Calibri" pitchFamily="34" charset="-122"/>
                 <a:cs typeface="Calibri" pitchFamily="34" charset="-120"/>
               </a:rPr>
-              <a:t>to guide or go straight</a:t>
+              <a:t>to guide or lead straight</a:t>
             </a:r>
             <a:endParaRPr lang="en-US" sz="850" dirty="0"/>
           </a:p>
@@ -26039,6 +26592,118 @@
       <p:sp>
         <p:nvSpPr>
           <p:cNvPr id="22" name="Shape 20"/>
+          <p:cNvSpPr/>
+          <p:nvPr/>
+        </p:nvSpPr>
+        <p:spPr>
+          <a:xfrm>
+            <a:off x="6519672" y="2258568"/>
+            <a:ext cx="1828800" cy="292608"/>
+          </a:xfrm>
+          <a:prstGeom prst="rect">
+            <a:avLst>
+              <a:gd name="adj" fmla="val 25000"/>
+            </a:avLst>
+          </a:prstGeom>
+          <a:solidFill>
+            <a:srgbClr val="FCE7F3"/>
+          </a:solidFill>
+          <a:ln w="19050">
+            <a:solidFill>
+              <a:srgbClr val="DB2777"/>
+            </a:solidFill>
+            <a:prstDash val="solid"/>
+          </a:ln>
+          <a:effectLst>
+            <a:outerShdw sx="100000" sy="100000" kx="0" ky="0" algn="bl" rotWithShape="0" blurRad="101600" dist="38100" dir="8100000">
+              <a:srgbClr val="000000">
+                <a:alpha val="12000"/>
+              </a:srgbClr>
+            </a:outerShdw>
+          </a:effectLst>
+        </p:spPr>
+      </p:sp>
+      <p:sp>
+        <p:nvSpPr>
+          <p:cNvPr id="23" name="Text 21"/>
+          <p:cNvSpPr/>
+          <p:nvPr/>
+        </p:nvSpPr>
+        <p:spPr>
+          <a:xfrm>
+            <a:off x="6519672" y="2258568"/>
+            <a:ext cx="1828800" cy="292608"/>
+          </a:xfrm>
+          <a:prstGeom prst="rect">
+            <a:avLst/>
+          </a:prstGeom>
+          <a:noFill/>
+          <a:ln/>
+        </p:spPr>
+        <p:txBody>
+          <a:bodyPr wrap="square" lIns="0" tIns="0" rIns="0" bIns="0" rtlCol="0" anchor="ctr"/>
+          <a:lstStyle/>
+          <a:p>
+            <a:pPr algn="ctr" indent="0" marL="0">
+              <a:buNone/>
+            </a:pPr>
+            <a:r>
+              <a:rPr lang="en-US" sz="1300" b="1" dirty="0">
+                <a:solidFill>
+                  <a:srgbClr val="9D174D"/>
+                </a:solidFill>
+                <a:latin typeface="Trebuchet MS" pitchFamily="34" charset="0"/>
+                <a:ea typeface="Trebuchet MS" pitchFamily="34" charset="-122"/>
+                <a:cs typeface="Trebuchet MS" pitchFamily="34" charset="-120"/>
+              </a:rPr>
+              <a:t>ed</a:t>
+            </a:r>
+            <a:endParaRPr lang="en-US" sz="1300" dirty="0"/>
+          </a:p>
+        </p:txBody>
+      </p:sp>
+      <p:sp>
+        <p:nvSpPr>
+          <p:cNvPr id="24" name="Text 22"/>
+          <p:cNvSpPr/>
+          <p:nvPr/>
+        </p:nvSpPr>
+        <p:spPr>
+          <a:xfrm>
+            <a:off x="6519672" y="2569464"/>
+            <a:ext cx="1828800" cy="201168"/>
+          </a:xfrm>
+          <a:prstGeom prst="rect">
+            <a:avLst/>
+          </a:prstGeom>
+          <a:noFill/>
+          <a:ln/>
+        </p:spPr>
+        <p:txBody>
+          <a:bodyPr wrap="square" lIns="0" tIns="0" rIns="0" bIns="0" rtlCol="0" anchor="t"/>
+          <a:lstStyle/>
+          <a:p>
+            <a:pPr algn="ctr" indent="0" marL="0">
+              <a:buNone/>
+            </a:pPr>
+            <a:r>
+              <a:rPr lang="en-US" sz="850" dirty="0">
+                <a:solidFill>
+                  <a:srgbClr val="475569"/>
+                </a:solidFill>
+                <a:latin typeface="Calibri" pitchFamily="34" charset="0"/>
+                <a:ea typeface="Calibri" pitchFamily="34" charset="-122"/>
+                <a:cs typeface="Calibri" pitchFamily="34" charset="-120"/>
+              </a:rPr>
+              <a:t>happened in the past</a:t>
+            </a:r>
+            <a:endParaRPr lang="en-US" sz="850" dirty="0"/>
+          </a:p>
+        </p:txBody>
+      </p:sp>
+      <p:sp>
+        <p:nvSpPr>
+          <p:cNvPr id="25" name="Shape 23"/>
           <p:cNvSpPr/>
           <p:nvPr/>
         </p:nvSpPr>
@@ -26065,7 +26730,7 @@
       </p:sp>
       <p:sp>
         <p:nvSpPr>
-          <p:cNvPr id="23" name="Text 21"/>
+          <p:cNvPr id="26" name="Text 24"/>
           <p:cNvSpPr/>
           <p:nvPr/>
         </p:nvSpPr>
@@ -26104,7 +26769,7 @@
       </p:sp>
       <p:sp>
         <p:nvSpPr>
-          <p:cNvPr id="24" name="Shape 22"/>
+          <p:cNvPr id="27" name="Shape 25"/>
           <p:cNvSpPr/>
           <p:nvPr/>
         </p:nvSpPr>
@@ -26131,14 +26796,14 @@
       </p:sp>
       <p:sp>
         <p:nvSpPr>
-          <p:cNvPr id="25" name="Shape 23"/>
-          <p:cNvSpPr/>
-          <p:nvPr/>
-        </p:nvSpPr>
-        <p:spPr>
-          <a:xfrm>
-            <a:off x="2313432" y="3364992"/>
-            <a:ext cx="1645920" cy="475488"/>
+          <p:cNvPr id="28" name="Shape 26"/>
+          <p:cNvSpPr/>
+          <p:nvPr/>
+        </p:nvSpPr>
+        <p:spPr>
+          <a:xfrm>
+            <a:off x="1975104" y="3364992"/>
+            <a:ext cx="1554480" cy="475488"/>
           </a:xfrm>
           <a:prstGeom prst="rect">
             <a:avLst>
@@ -26158,14 +26823,14 @@
       </p:sp>
       <p:sp>
         <p:nvSpPr>
-          <p:cNvPr id="26" name="Text 24"/>
-          <p:cNvSpPr/>
-          <p:nvPr/>
-        </p:nvSpPr>
-        <p:spPr>
-          <a:xfrm>
-            <a:off x="2313432" y="3364992"/>
-            <a:ext cx="1645920" cy="475488"/>
+          <p:cNvPr id="29" name="Text 27"/>
+          <p:cNvSpPr/>
+          <p:nvPr/>
+        </p:nvSpPr>
+        <p:spPr>
+          <a:xfrm>
+            <a:off x="1975104" y="3364992"/>
+            <a:ext cx="1554480" cy="475488"/>
           </a:xfrm>
           <a:prstGeom prst="rect">
             <a:avLst/>
@@ -26189,7 +26854,7 @@
                 <a:ea typeface="Trebuchet MS" pitchFamily="34" charset="-122"/>
                 <a:cs typeface="Trebuchet MS" pitchFamily="34" charset="-120"/>
               </a:rPr>
-              <a:t>re</a:t>
+              <a:t>mis</a:t>
             </a:r>
             <a:endParaRPr lang="en-US" sz="1400" dirty="0"/>
           </a:p>
@@ -26197,14 +26862,14 @@
       </p:sp>
       <p:sp>
         <p:nvSpPr>
-          <p:cNvPr id="27" name="Text 25"/>
-          <p:cNvSpPr/>
-          <p:nvPr/>
-        </p:nvSpPr>
-        <p:spPr>
-          <a:xfrm>
-            <a:off x="3959352" y="3364992"/>
-            <a:ext cx="411480" cy="475488"/>
+          <p:cNvPr id="30" name="Text 28"/>
+          <p:cNvSpPr/>
+          <p:nvPr/>
+        </p:nvSpPr>
+        <p:spPr>
+          <a:xfrm>
+            <a:off x="3529584" y="3364992"/>
+            <a:ext cx="73152" cy="475488"/>
           </a:xfrm>
           <a:prstGeom prst="rect">
             <a:avLst/>
@@ -26236,14 +26901,14 @@
       </p:sp>
       <p:sp>
         <p:nvSpPr>
-          <p:cNvPr id="28" name="Shape 26"/>
-          <p:cNvSpPr/>
-          <p:nvPr/>
-        </p:nvSpPr>
-        <p:spPr>
-          <a:xfrm>
-            <a:off x="4370832" y="3364992"/>
-            <a:ext cx="1645920" cy="475488"/>
+          <p:cNvPr id="31" name="Shape 29"/>
+          <p:cNvSpPr/>
+          <p:nvPr/>
+        </p:nvSpPr>
+        <p:spPr>
+          <a:xfrm>
+            <a:off x="3602736" y="3364992"/>
+            <a:ext cx="1554480" cy="475488"/>
           </a:xfrm>
           <a:prstGeom prst="rect">
             <a:avLst>
@@ -26263,14 +26928,14 @@
       </p:sp>
       <p:sp>
         <p:nvSpPr>
-          <p:cNvPr id="29" name="Text 27"/>
-          <p:cNvSpPr/>
-          <p:nvPr/>
-        </p:nvSpPr>
-        <p:spPr>
-          <a:xfrm>
-            <a:off x="4370832" y="3364992"/>
-            <a:ext cx="1645920" cy="475488"/>
+          <p:cNvPr id="32" name="Text 30"/>
+          <p:cNvSpPr/>
+          <p:nvPr/>
+        </p:nvSpPr>
+        <p:spPr>
+          <a:xfrm>
+            <a:off x="3602736" y="3364992"/>
+            <a:ext cx="1554480" cy="475488"/>
           </a:xfrm>
           <a:prstGeom prst="rect">
             <a:avLst/>
@@ -26302,14 +26967,14 @@
       </p:sp>
       <p:sp>
         <p:nvSpPr>
-          <p:cNvPr id="30" name="Text 28"/>
-          <p:cNvSpPr/>
-          <p:nvPr/>
-        </p:nvSpPr>
-        <p:spPr>
-          <a:xfrm>
-            <a:off x="6016752" y="3364992"/>
-            <a:ext cx="411480" cy="475488"/>
+          <p:cNvPr id="33" name="Text 31"/>
+          <p:cNvSpPr/>
+          <p:nvPr/>
+        </p:nvSpPr>
+        <p:spPr>
+          <a:xfrm>
+            <a:off x="5157216" y="3364992"/>
+            <a:ext cx="73152" cy="475488"/>
           </a:xfrm>
           <a:prstGeom prst="rect">
             <a:avLst/>
@@ -26341,14 +27006,14 @@
       </p:sp>
       <p:sp>
         <p:nvSpPr>
-          <p:cNvPr id="31" name="Shape 29"/>
-          <p:cNvSpPr/>
-          <p:nvPr/>
-        </p:nvSpPr>
-        <p:spPr>
-          <a:xfrm>
-            <a:off x="6428232" y="3364992"/>
-            <a:ext cx="1645920" cy="475488"/>
+          <p:cNvPr id="34" name="Shape 32"/>
+          <p:cNvSpPr/>
+          <p:nvPr/>
+        </p:nvSpPr>
+        <p:spPr>
+          <a:xfrm>
+            <a:off x="5230368" y="3364992"/>
+            <a:ext cx="1554480" cy="475488"/>
           </a:xfrm>
           <a:prstGeom prst="rect">
             <a:avLst>
@@ -26368,14 +27033,14 @@
       </p:sp>
       <p:sp>
         <p:nvSpPr>
-          <p:cNvPr id="32" name="Text 30"/>
-          <p:cNvSpPr/>
-          <p:nvPr/>
-        </p:nvSpPr>
-        <p:spPr>
-          <a:xfrm>
-            <a:off x="6428232" y="3364992"/>
-            <a:ext cx="1645920" cy="475488"/>
+          <p:cNvPr id="35" name="Text 33"/>
+          <p:cNvSpPr/>
+          <p:nvPr/>
+        </p:nvSpPr>
+        <p:spPr>
+          <a:xfrm>
+            <a:off x="5230368" y="3364992"/>
+            <a:ext cx="1554480" cy="475488"/>
           </a:xfrm>
           <a:prstGeom prst="rect">
             <a:avLst/>
@@ -26399,7 +27064,7 @@
                 <a:ea typeface="Trebuchet MS" pitchFamily="34" charset="-122"/>
                 <a:cs typeface="Trebuchet MS" pitchFamily="34" charset="-120"/>
               </a:rPr>
-              <a:t>rect</a:t>
+              <a:t>rec</a:t>
             </a:r>
             <a:endParaRPr lang="en-US" sz="1400" dirty="0"/>
           </a:p>
@@ -26407,7 +27072,112 @@
       </p:sp>
       <p:sp>
         <p:nvSpPr>
-          <p:cNvPr id="33" name="Shape 31"/>
+          <p:cNvPr id="36" name="Text 34"/>
+          <p:cNvSpPr/>
+          <p:nvPr/>
+        </p:nvSpPr>
+        <p:spPr>
+          <a:xfrm>
+            <a:off x="6784848" y="3364992"/>
+            <a:ext cx="73152" cy="475488"/>
+          </a:xfrm>
+          <a:prstGeom prst="rect">
+            <a:avLst/>
+          </a:prstGeom>
+          <a:noFill/>
+          <a:ln/>
+        </p:spPr>
+        <p:txBody>
+          <a:bodyPr wrap="square" lIns="0" tIns="0" rIns="0" bIns="0" rtlCol="0" anchor="ctr"/>
+          <a:lstStyle/>
+          <a:p>
+            <a:pPr algn="ctr" indent="0" marL="0">
+              <a:buNone/>
+            </a:pPr>
+            <a:r>
+              <a:rPr lang="en-US" sz="1600" b="1" dirty="0">
+                <a:solidFill>
+                  <a:srgbClr val="0D9488"/>
+                </a:solidFill>
+                <a:latin typeface="Trebuchet MS" pitchFamily="34" charset="0"/>
+                <a:ea typeface="Trebuchet MS" pitchFamily="34" charset="-122"/>
+                <a:cs typeface="Trebuchet MS" pitchFamily="34" charset="-120"/>
+              </a:rPr>
+              <a:t>·</a:t>
+            </a:r>
+            <a:endParaRPr lang="en-US" sz="1600" dirty="0"/>
+          </a:p>
+        </p:txBody>
+      </p:sp>
+      <p:sp>
+        <p:nvSpPr>
+          <p:cNvPr id="37" name="Shape 35"/>
+          <p:cNvSpPr/>
+          <p:nvPr/>
+        </p:nvSpPr>
+        <p:spPr>
+          <a:xfrm>
+            <a:off x="6858000" y="3364992"/>
+            <a:ext cx="1554480" cy="475488"/>
+          </a:xfrm>
+          <a:prstGeom prst="rect">
+            <a:avLst>
+              <a:gd name="adj" fmla="val 9615"/>
+            </a:avLst>
+          </a:prstGeom>
+          <a:solidFill>
+            <a:srgbClr val="FFFFFF"/>
+          </a:solidFill>
+          <a:ln w="12700">
+            <a:solidFill>
+              <a:srgbClr val="0D9488"/>
+            </a:solidFill>
+            <a:prstDash val="solid"/>
+          </a:ln>
+        </p:spPr>
+      </p:sp>
+      <p:sp>
+        <p:nvSpPr>
+          <p:cNvPr id="38" name="Text 36"/>
+          <p:cNvSpPr/>
+          <p:nvPr/>
+        </p:nvSpPr>
+        <p:spPr>
+          <a:xfrm>
+            <a:off x="6858000" y="3364992"/>
+            <a:ext cx="1554480" cy="475488"/>
+          </a:xfrm>
+          <a:prstGeom prst="rect">
+            <a:avLst/>
+          </a:prstGeom>
+          <a:noFill/>
+          <a:ln/>
+        </p:spPr>
+        <p:txBody>
+          <a:bodyPr wrap="square" lIns="0" tIns="0" rIns="0" bIns="0" rtlCol="0" anchor="ctr"/>
+          <a:lstStyle/>
+          <a:p>
+            <a:pPr algn="ctr" indent="0" marL="0">
+              <a:buNone/>
+            </a:pPr>
+            <a:r>
+              <a:rPr lang="en-US" sz="1400" b="1" dirty="0">
+                <a:solidFill>
+                  <a:srgbClr val="0D9488"/>
+                </a:solidFill>
+                <a:latin typeface="Trebuchet MS" pitchFamily="34" charset="0"/>
+                <a:ea typeface="Trebuchet MS" pitchFamily="34" charset="-122"/>
+                <a:cs typeface="Trebuchet MS" pitchFamily="34" charset="-120"/>
+              </a:rPr>
+              <a:t>ted</a:t>
+            </a:r>
+            <a:endParaRPr lang="en-US" sz="1400" dirty="0"/>
+          </a:p>
+        </p:txBody>
+      </p:sp>
+      <p:sp>
+        <p:nvSpPr>
+          <p:cNvPr id="39" name="Shape 37"/>
           <p:cNvSpPr/>
           <p:nvPr/>
         </p:nvSpPr>
@@ -26434,7 +27204,7 @@
       </p:sp>
       <p:sp>
         <p:nvSpPr>
-          <p:cNvPr id="34" name="Text 32"/>
+          <p:cNvPr id="40" name="Text 38"/>
           <p:cNvSpPr/>
           <p:nvPr/>
         </p:nvSpPr>
@@ -26473,7 +27243,7 @@
       </p:sp>
       <p:sp>
         <p:nvSpPr>
-          <p:cNvPr id="35" name="Shape 33"/>
+          <p:cNvPr id="41" name="Shape 39"/>
           <p:cNvSpPr/>
           <p:nvPr/>
         </p:nvSpPr>
@@ -26500,7 +27270,7 @@
       </p:sp>
       <p:sp>
         <p:nvSpPr>
-          <p:cNvPr id="36" name="Text 34"/>
+          <p:cNvPr id="42" name="Text 40"/>
           <p:cNvSpPr/>
           <p:nvPr/>
         </p:nvSpPr>
@@ -26823,7 +27593,7 @@
                 <a:ea typeface="Calibri" pitchFamily="34" charset="-122"/>
                 <a:cs typeface="Calibri" pitchFamily="34" charset="-120"/>
               </a:rPr>
-              <a:t>Word Labs  •  wordlabs.app  •  Root: 'direct' = straight, guide, manage</a:t>
+              <a:t>Word Labs  •  wordlabs.app  •  Root: 'direct' = straight, guide, lead</a:t>
             </a:r>
             <a:endParaRPr lang="en-US" sz="800" dirty="0"/>
           </a:p>
@@ -26962,7 +27732,7 @@
                 <a:ea typeface="Trebuchet MS" pitchFamily="34" charset="-122"/>
                 <a:cs typeface="Trebuchet MS" pitchFamily="34" charset="-120"/>
               </a:rPr>
-              <a:t>redirect</a:t>
+              <a:t>misdirected</a:t>
             </a:r>
             <a:endParaRPr lang="en-US" sz="2800" dirty="0"/>
           </a:p>
@@ -27042,7 +27812,7 @@
         </p:nvSpPr>
         <p:spPr>
           <a:xfrm>
-            <a:off x="2938272" y="2258568"/>
+            <a:off x="2221992" y="2258568"/>
             <a:ext cx="1828800" cy="292608"/>
           </a:xfrm>
           <a:prstGeom prst="rect">
@@ -27076,7 +27846,7 @@
         </p:nvSpPr>
         <p:spPr>
           <a:xfrm>
-            <a:off x="2938272" y="2258568"/>
+            <a:off x="2221992" y="2258568"/>
             <a:ext cx="1828800" cy="292608"/>
           </a:xfrm>
           <a:prstGeom prst="rect">
@@ -27101,7 +27871,7 @@
                 <a:ea typeface="Trebuchet MS" pitchFamily="34" charset="-122"/>
                 <a:cs typeface="Trebuchet MS" pitchFamily="34" charset="-120"/>
               </a:rPr>
-              <a:t>re</a:t>
+              <a:t>mis</a:t>
             </a:r>
             <a:endParaRPr lang="en-US" sz="1300" dirty="0"/>
           </a:p>
@@ -27115,7 +27885,7 @@
         </p:nvSpPr>
         <p:spPr>
           <a:xfrm>
-            <a:off x="2938272" y="2569464"/>
+            <a:off x="2221992" y="2569464"/>
             <a:ext cx="1828800" cy="201168"/>
           </a:xfrm>
           <a:prstGeom prst="rect">
@@ -27140,7 +27910,7 @@
                 <a:ea typeface="Calibri" pitchFamily="34" charset="-122"/>
                 <a:cs typeface="Calibri" pitchFamily="34" charset="-120"/>
               </a:rPr>
-              <a:t>again or back</a:t>
+              <a:t>wrongly or badly</a:t>
             </a:r>
             <a:endParaRPr lang="en-US" sz="850" dirty="0"/>
           </a:p>
@@ -27154,7 +27924,7 @@
         </p:nvSpPr>
         <p:spPr>
           <a:xfrm>
-            <a:off x="5803392" y="2258568"/>
+            <a:off x="4370832" y="2258568"/>
             <a:ext cx="1828800" cy="292608"/>
           </a:xfrm>
           <a:prstGeom prst="rect">
@@ -27188,7 +27958,7 @@
         </p:nvSpPr>
         <p:spPr>
           <a:xfrm>
-            <a:off x="5803392" y="2258568"/>
+            <a:off x="4370832" y="2258568"/>
             <a:ext cx="1828800" cy="292608"/>
           </a:xfrm>
           <a:prstGeom prst="rect">
@@ -27227,7 +27997,7 @@
         </p:nvSpPr>
         <p:spPr>
           <a:xfrm>
-            <a:off x="5803392" y="2569464"/>
+            <a:off x="4370832" y="2569464"/>
             <a:ext cx="1828800" cy="201168"/>
           </a:xfrm>
           <a:prstGeom prst="rect">
@@ -27252,7 +28022,7 @@
                 <a:ea typeface="Calibri" pitchFamily="34" charset="-122"/>
                 <a:cs typeface="Calibri" pitchFamily="34" charset="-120"/>
               </a:rPr>
-              <a:t>to guide or go straight</a:t>
+              <a:t>to guide or lead straight</a:t>
             </a:r>
             <a:endParaRPr lang="en-US" sz="850" dirty="0"/>
           </a:p>
@@ -27261,6 +28031,118 @@
       <p:sp>
         <p:nvSpPr>
           <p:cNvPr id="22" name="Shape 20"/>
+          <p:cNvSpPr/>
+          <p:nvPr/>
+        </p:nvSpPr>
+        <p:spPr>
+          <a:xfrm>
+            <a:off x="6519672" y="2258568"/>
+            <a:ext cx="1828800" cy="292608"/>
+          </a:xfrm>
+          <a:prstGeom prst="rect">
+            <a:avLst>
+              <a:gd name="adj" fmla="val 25000"/>
+            </a:avLst>
+          </a:prstGeom>
+          <a:solidFill>
+            <a:srgbClr val="FCE7F3"/>
+          </a:solidFill>
+          <a:ln w="19050">
+            <a:solidFill>
+              <a:srgbClr val="DB2777"/>
+            </a:solidFill>
+            <a:prstDash val="solid"/>
+          </a:ln>
+          <a:effectLst>
+            <a:outerShdw sx="100000" sy="100000" kx="0" ky="0" algn="bl" rotWithShape="0" blurRad="101600" dist="38100" dir="8100000">
+              <a:srgbClr val="000000">
+                <a:alpha val="12000"/>
+              </a:srgbClr>
+            </a:outerShdw>
+          </a:effectLst>
+        </p:spPr>
+      </p:sp>
+      <p:sp>
+        <p:nvSpPr>
+          <p:cNvPr id="23" name="Text 21"/>
+          <p:cNvSpPr/>
+          <p:nvPr/>
+        </p:nvSpPr>
+        <p:spPr>
+          <a:xfrm>
+            <a:off x="6519672" y="2258568"/>
+            <a:ext cx="1828800" cy="292608"/>
+          </a:xfrm>
+          <a:prstGeom prst="rect">
+            <a:avLst/>
+          </a:prstGeom>
+          <a:noFill/>
+          <a:ln/>
+        </p:spPr>
+        <p:txBody>
+          <a:bodyPr wrap="square" lIns="0" tIns="0" rIns="0" bIns="0" rtlCol="0" anchor="ctr"/>
+          <a:lstStyle/>
+          <a:p>
+            <a:pPr algn="ctr" indent="0" marL="0">
+              <a:buNone/>
+            </a:pPr>
+            <a:r>
+              <a:rPr lang="en-US" sz="1300" b="1" dirty="0">
+                <a:solidFill>
+                  <a:srgbClr val="9D174D"/>
+                </a:solidFill>
+                <a:latin typeface="Trebuchet MS" pitchFamily="34" charset="0"/>
+                <a:ea typeface="Trebuchet MS" pitchFamily="34" charset="-122"/>
+                <a:cs typeface="Trebuchet MS" pitchFamily="34" charset="-120"/>
+              </a:rPr>
+              <a:t>ed</a:t>
+            </a:r>
+            <a:endParaRPr lang="en-US" sz="1300" dirty="0"/>
+          </a:p>
+        </p:txBody>
+      </p:sp>
+      <p:sp>
+        <p:nvSpPr>
+          <p:cNvPr id="24" name="Text 22"/>
+          <p:cNvSpPr/>
+          <p:nvPr/>
+        </p:nvSpPr>
+        <p:spPr>
+          <a:xfrm>
+            <a:off x="6519672" y="2569464"/>
+            <a:ext cx="1828800" cy="201168"/>
+          </a:xfrm>
+          <a:prstGeom prst="rect">
+            <a:avLst/>
+          </a:prstGeom>
+          <a:noFill/>
+          <a:ln/>
+        </p:spPr>
+        <p:txBody>
+          <a:bodyPr wrap="square" lIns="0" tIns="0" rIns="0" bIns="0" rtlCol="0" anchor="t"/>
+          <a:lstStyle/>
+          <a:p>
+            <a:pPr algn="ctr" indent="0" marL="0">
+              <a:buNone/>
+            </a:pPr>
+            <a:r>
+              <a:rPr lang="en-US" sz="850" dirty="0">
+                <a:solidFill>
+                  <a:srgbClr val="475569"/>
+                </a:solidFill>
+                <a:latin typeface="Calibri" pitchFamily="34" charset="0"/>
+                <a:ea typeface="Calibri" pitchFamily="34" charset="-122"/>
+                <a:cs typeface="Calibri" pitchFamily="34" charset="-120"/>
+              </a:rPr>
+              <a:t>happened in the past</a:t>
+            </a:r>
+            <a:endParaRPr lang="en-US" sz="850" dirty="0"/>
+          </a:p>
+        </p:txBody>
+      </p:sp>
+      <p:sp>
+        <p:nvSpPr>
+          <p:cNvPr id="25" name="Shape 23"/>
           <p:cNvSpPr/>
           <p:nvPr/>
         </p:nvSpPr>
@@ -27287,7 +28169,7 @@
       </p:sp>
       <p:sp>
         <p:nvSpPr>
-          <p:cNvPr id="23" name="Text 21"/>
+          <p:cNvPr id="26" name="Text 24"/>
           <p:cNvSpPr/>
           <p:nvPr/>
         </p:nvSpPr>
@@ -27326,7 +28208,7 @@
       </p:sp>
       <p:sp>
         <p:nvSpPr>
-          <p:cNvPr id="24" name="Shape 22"/>
+          <p:cNvPr id="27" name="Shape 25"/>
           <p:cNvSpPr/>
           <p:nvPr/>
         </p:nvSpPr>
@@ -27353,14 +28235,14 @@
       </p:sp>
       <p:sp>
         <p:nvSpPr>
-          <p:cNvPr id="25" name="Shape 23"/>
-          <p:cNvSpPr/>
-          <p:nvPr/>
-        </p:nvSpPr>
-        <p:spPr>
-          <a:xfrm>
-            <a:off x="2313432" y="3364992"/>
-            <a:ext cx="1645920" cy="475488"/>
+          <p:cNvPr id="28" name="Shape 26"/>
+          <p:cNvSpPr/>
+          <p:nvPr/>
+        </p:nvSpPr>
+        <p:spPr>
+          <a:xfrm>
+            <a:off x="1975104" y="3364992"/>
+            <a:ext cx="1554480" cy="475488"/>
           </a:xfrm>
           <a:prstGeom prst="rect">
             <a:avLst>
@@ -27380,14 +28262,14 @@
       </p:sp>
       <p:sp>
         <p:nvSpPr>
-          <p:cNvPr id="26" name="Text 24"/>
-          <p:cNvSpPr/>
-          <p:nvPr/>
-        </p:nvSpPr>
-        <p:spPr>
-          <a:xfrm>
-            <a:off x="2313432" y="3364992"/>
-            <a:ext cx="1645920" cy="475488"/>
+          <p:cNvPr id="29" name="Text 27"/>
+          <p:cNvSpPr/>
+          <p:nvPr/>
+        </p:nvSpPr>
+        <p:spPr>
+          <a:xfrm>
+            <a:off x="1975104" y="3364992"/>
+            <a:ext cx="1554480" cy="475488"/>
           </a:xfrm>
           <a:prstGeom prst="rect">
             <a:avLst/>
@@ -27411,7 +28293,7 @@
                 <a:ea typeface="Trebuchet MS" pitchFamily="34" charset="-122"/>
                 <a:cs typeface="Trebuchet MS" pitchFamily="34" charset="-120"/>
               </a:rPr>
-              <a:t>re</a:t>
+              <a:t>mis</a:t>
             </a:r>
             <a:endParaRPr lang="en-US" sz="1400" dirty="0"/>
           </a:p>
@@ -27419,14 +28301,14 @@
       </p:sp>
       <p:sp>
         <p:nvSpPr>
-          <p:cNvPr id="27" name="Text 25"/>
-          <p:cNvSpPr/>
-          <p:nvPr/>
-        </p:nvSpPr>
-        <p:spPr>
-          <a:xfrm>
-            <a:off x="3959352" y="3364992"/>
-            <a:ext cx="411480" cy="475488"/>
+          <p:cNvPr id="30" name="Text 28"/>
+          <p:cNvSpPr/>
+          <p:nvPr/>
+        </p:nvSpPr>
+        <p:spPr>
+          <a:xfrm>
+            <a:off x="3529584" y="3364992"/>
+            <a:ext cx="73152" cy="475488"/>
           </a:xfrm>
           <a:prstGeom prst="rect">
             <a:avLst/>
@@ -27458,14 +28340,14 @@
       </p:sp>
       <p:sp>
         <p:nvSpPr>
-          <p:cNvPr id="28" name="Shape 26"/>
-          <p:cNvSpPr/>
-          <p:nvPr/>
-        </p:nvSpPr>
-        <p:spPr>
-          <a:xfrm>
-            <a:off x="4370832" y="3364992"/>
-            <a:ext cx="1645920" cy="475488"/>
+          <p:cNvPr id="31" name="Shape 29"/>
+          <p:cNvSpPr/>
+          <p:nvPr/>
+        </p:nvSpPr>
+        <p:spPr>
+          <a:xfrm>
+            <a:off x="3602736" y="3364992"/>
+            <a:ext cx="1554480" cy="475488"/>
           </a:xfrm>
           <a:prstGeom prst="rect">
             <a:avLst>
@@ -27485,14 +28367,14 @@
       </p:sp>
       <p:sp>
         <p:nvSpPr>
-          <p:cNvPr id="29" name="Text 27"/>
-          <p:cNvSpPr/>
-          <p:nvPr/>
-        </p:nvSpPr>
-        <p:spPr>
-          <a:xfrm>
-            <a:off x="4370832" y="3364992"/>
-            <a:ext cx="1645920" cy="475488"/>
+          <p:cNvPr id="32" name="Text 30"/>
+          <p:cNvSpPr/>
+          <p:nvPr/>
+        </p:nvSpPr>
+        <p:spPr>
+          <a:xfrm>
+            <a:off x="3602736" y="3364992"/>
+            <a:ext cx="1554480" cy="475488"/>
           </a:xfrm>
           <a:prstGeom prst="rect">
             <a:avLst/>
@@ -27524,14 +28406,14 @@
       </p:sp>
       <p:sp>
         <p:nvSpPr>
-          <p:cNvPr id="30" name="Text 28"/>
-          <p:cNvSpPr/>
-          <p:nvPr/>
-        </p:nvSpPr>
-        <p:spPr>
-          <a:xfrm>
-            <a:off x="6016752" y="3364992"/>
-            <a:ext cx="411480" cy="475488"/>
+          <p:cNvPr id="33" name="Text 31"/>
+          <p:cNvSpPr/>
+          <p:nvPr/>
+        </p:nvSpPr>
+        <p:spPr>
+          <a:xfrm>
+            <a:off x="5157216" y="3364992"/>
+            <a:ext cx="73152" cy="475488"/>
           </a:xfrm>
           <a:prstGeom prst="rect">
             <a:avLst/>
@@ -27563,14 +28445,14 @@
       </p:sp>
       <p:sp>
         <p:nvSpPr>
-          <p:cNvPr id="31" name="Shape 29"/>
-          <p:cNvSpPr/>
-          <p:nvPr/>
-        </p:nvSpPr>
-        <p:spPr>
-          <a:xfrm>
-            <a:off x="6428232" y="3364992"/>
-            <a:ext cx="1645920" cy="475488"/>
+          <p:cNvPr id="34" name="Shape 32"/>
+          <p:cNvSpPr/>
+          <p:nvPr/>
+        </p:nvSpPr>
+        <p:spPr>
+          <a:xfrm>
+            <a:off x="5230368" y="3364992"/>
+            <a:ext cx="1554480" cy="475488"/>
           </a:xfrm>
           <a:prstGeom prst="rect">
             <a:avLst>
@@ -27590,14 +28472,14 @@
       </p:sp>
       <p:sp>
         <p:nvSpPr>
-          <p:cNvPr id="32" name="Text 30"/>
-          <p:cNvSpPr/>
-          <p:nvPr/>
-        </p:nvSpPr>
-        <p:spPr>
-          <a:xfrm>
-            <a:off x="6428232" y="3364992"/>
-            <a:ext cx="1645920" cy="475488"/>
+          <p:cNvPr id="35" name="Text 33"/>
+          <p:cNvSpPr/>
+          <p:nvPr/>
+        </p:nvSpPr>
+        <p:spPr>
+          <a:xfrm>
+            <a:off x="5230368" y="3364992"/>
+            <a:ext cx="1554480" cy="475488"/>
           </a:xfrm>
           <a:prstGeom prst="rect">
             <a:avLst/>
@@ -27621,7 +28503,7 @@
                 <a:ea typeface="Trebuchet MS" pitchFamily="34" charset="-122"/>
                 <a:cs typeface="Trebuchet MS" pitchFamily="34" charset="-120"/>
               </a:rPr>
-              <a:t>rect</a:t>
+              <a:t>rec</a:t>
             </a:r>
             <a:endParaRPr lang="en-US" sz="1400" dirty="0"/>
           </a:p>
@@ -27629,7 +28511,112 @@
       </p:sp>
       <p:sp>
         <p:nvSpPr>
-          <p:cNvPr id="33" name="Shape 31"/>
+          <p:cNvPr id="36" name="Text 34"/>
+          <p:cNvSpPr/>
+          <p:nvPr/>
+        </p:nvSpPr>
+        <p:spPr>
+          <a:xfrm>
+            <a:off x="6784848" y="3364992"/>
+            <a:ext cx="73152" cy="475488"/>
+          </a:xfrm>
+          <a:prstGeom prst="rect">
+            <a:avLst/>
+          </a:prstGeom>
+          <a:noFill/>
+          <a:ln/>
+        </p:spPr>
+        <p:txBody>
+          <a:bodyPr wrap="square" lIns="0" tIns="0" rIns="0" bIns="0" rtlCol="0" anchor="ctr"/>
+          <a:lstStyle/>
+          <a:p>
+            <a:pPr algn="ctr" indent="0" marL="0">
+              <a:buNone/>
+            </a:pPr>
+            <a:r>
+              <a:rPr lang="en-US" sz="1600" b="1" dirty="0">
+                <a:solidFill>
+                  <a:srgbClr val="0D9488"/>
+                </a:solidFill>
+                <a:latin typeface="Trebuchet MS" pitchFamily="34" charset="0"/>
+                <a:ea typeface="Trebuchet MS" pitchFamily="34" charset="-122"/>
+                <a:cs typeface="Trebuchet MS" pitchFamily="34" charset="-120"/>
+              </a:rPr>
+              <a:t>·</a:t>
+            </a:r>
+            <a:endParaRPr lang="en-US" sz="1600" dirty="0"/>
+          </a:p>
+        </p:txBody>
+      </p:sp>
+      <p:sp>
+        <p:nvSpPr>
+          <p:cNvPr id="37" name="Shape 35"/>
+          <p:cNvSpPr/>
+          <p:nvPr/>
+        </p:nvSpPr>
+        <p:spPr>
+          <a:xfrm>
+            <a:off x="6858000" y="3364992"/>
+            <a:ext cx="1554480" cy="475488"/>
+          </a:xfrm>
+          <a:prstGeom prst="rect">
+            <a:avLst>
+              <a:gd name="adj" fmla="val 9615"/>
+            </a:avLst>
+          </a:prstGeom>
+          <a:solidFill>
+            <a:srgbClr val="FFFFFF"/>
+          </a:solidFill>
+          <a:ln w="12700">
+            <a:solidFill>
+              <a:srgbClr val="0D9488"/>
+            </a:solidFill>
+            <a:prstDash val="solid"/>
+          </a:ln>
+        </p:spPr>
+      </p:sp>
+      <p:sp>
+        <p:nvSpPr>
+          <p:cNvPr id="38" name="Text 36"/>
+          <p:cNvSpPr/>
+          <p:nvPr/>
+        </p:nvSpPr>
+        <p:spPr>
+          <a:xfrm>
+            <a:off x="6858000" y="3364992"/>
+            <a:ext cx="1554480" cy="475488"/>
+          </a:xfrm>
+          <a:prstGeom prst="rect">
+            <a:avLst/>
+          </a:prstGeom>
+          <a:noFill/>
+          <a:ln/>
+        </p:spPr>
+        <p:txBody>
+          <a:bodyPr wrap="square" lIns="0" tIns="0" rIns="0" bIns="0" rtlCol="0" anchor="ctr"/>
+          <a:lstStyle/>
+          <a:p>
+            <a:pPr algn="ctr" indent="0" marL="0">
+              <a:buNone/>
+            </a:pPr>
+            <a:r>
+              <a:rPr lang="en-US" sz="1400" b="1" dirty="0">
+                <a:solidFill>
+                  <a:srgbClr val="0D9488"/>
+                </a:solidFill>
+                <a:latin typeface="Trebuchet MS" pitchFamily="34" charset="0"/>
+                <a:ea typeface="Trebuchet MS" pitchFamily="34" charset="-122"/>
+                <a:cs typeface="Trebuchet MS" pitchFamily="34" charset="-120"/>
+              </a:rPr>
+              <a:t>ted</a:t>
+            </a:r>
+            <a:endParaRPr lang="en-US" sz="1400" dirty="0"/>
+          </a:p>
+        </p:txBody>
+      </p:sp>
+      <p:sp>
+        <p:nvSpPr>
+          <p:cNvPr id="39" name="Shape 37"/>
           <p:cNvSpPr/>
           <p:nvPr/>
         </p:nvSpPr>
@@ -27656,7 +28643,7 @@
       </p:sp>
       <p:sp>
         <p:nvSpPr>
-          <p:cNvPr id="34" name="Text 32"/>
+          <p:cNvPr id="40" name="Text 38"/>
           <p:cNvSpPr/>
           <p:nvPr/>
         </p:nvSpPr>
@@ -27695,7 +28682,7 @@
       </p:sp>
       <p:sp>
         <p:nvSpPr>
-          <p:cNvPr id="35" name="Shape 33"/>
+          <p:cNvPr id="41" name="Shape 39"/>
           <p:cNvSpPr/>
           <p:nvPr/>
         </p:nvSpPr>
@@ -27722,14 +28709,14 @@
       </p:sp>
       <p:sp>
         <p:nvSpPr>
-          <p:cNvPr id="36" name="Shape 34"/>
-          <p:cNvSpPr/>
-          <p:nvPr/>
-        </p:nvSpPr>
-        <p:spPr>
-          <a:xfrm>
-            <a:off x="2023872" y="4169664"/>
-            <a:ext cx="685800" cy="384048"/>
+          <p:cNvPr id="42" name="Shape 40"/>
+          <p:cNvSpPr/>
+          <p:nvPr/>
+        </p:nvSpPr>
+        <p:spPr>
+          <a:xfrm>
+            <a:off x="1952244" y="4169664"/>
+            <a:ext cx="543652" cy="384048"/>
           </a:xfrm>
           <a:prstGeom prst="rect">
             <a:avLst>
@@ -27749,14 +28736,14 @@
       </p:sp>
       <p:sp>
         <p:nvSpPr>
-          <p:cNvPr id="37" name="Text 35"/>
-          <p:cNvSpPr/>
-          <p:nvPr/>
-        </p:nvSpPr>
-        <p:spPr>
-          <a:xfrm>
-            <a:off x="2023872" y="4169664"/>
-            <a:ext cx="685800" cy="384048"/>
+          <p:cNvPr id="43" name="Text 41"/>
+          <p:cNvSpPr/>
+          <p:nvPr/>
+        </p:nvSpPr>
+        <p:spPr>
+          <a:xfrm>
+            <a:off x="1952244" y="4169664"/>
+            <a:ext cx="543652" cy="384048"/>
           </a:xfrm>
           <a:prstGeom prst="rect">
             <a:avLst/>
@@ -27780,7 +28767,7 @@
                 <a:ea typeface="Trebuchet MS" pitchFamily="34" charset="-122"/>
                 <a:cs typeface="Trebuchet MS" pitchFamily="34" charset="-120"/>
               </a:rPr>
-              <a:t>r</a:t>
+              <a:t>m</a:t>
             </a:r>
             <a:endParaRPr lang="en-US" sz="900" dirty="0"/>
           </a:p>
@@ -27788,14 +28775,14 @@
       </p:sp>
       <p:sp>
         <p:nvSpPr>
-          <p:cNvPr id="38" name="Shape 36"/>
-          <p:cNvSpPr/>
-          <p:nvPr/>
-        </p:nvSpPr>
-        <p:spPr>
-          <a:xfrm>
-            <a:off x="2831592" y="4169664"/>
-            <a:ext cx="685800" cy="384048"/>
+          <p:cNvPr id="44" name="Shape 42"/>
+          <p:cNvSpPr/>
+          <p:nvPr/>
+        </p:nvSpPr>
+        <p:spPr>
+          <a:xfrm>
+            <a:off x="2546188" y="4169664"/>
+            <a:ext cx="543652" cy="384048"/>
           </a:xfrm>
           <a:prstGeom prst="rect">
             <a:avLst>
@@ -27815,14 +28802,14 @@
       </p:sp>
       <p:sp>
         <p:nvSpPr>
-          <p:cNvPr id="39" name="Text 37"/>
-          <p:cNvSpPr/>
-          <p:nvPr/>
-        </p:nvSpPr>
-        <p:spPr>
-          <a:xfrm>
-            <a:off x="2831592" y="4169664"/>
-            <a:ext cx="685800" cy="384048"/>
+          <p:cNvPr id="45" name="Text 43"/>
+          <p:cNvSpPr/>
+          <p:nvPr/>
+        </p:nvSpPr>
+        <p:spPr>
+          <a:xfrm>
+            <a:off x="2546188" y="4169664"/>
+            <a:ext cx="543652" cy="384048"/>
           </a:xfrm>
           <a:prstGeom prst="rect">
             <a:avLst/>
@@ -27846,7 +28833,7 @@
                 <a:ea typeface="Trebuchet MS" pitchFamily="34" charset="-122"/>
                 <a:cs typeface="Trebuchet MS" pitchFamily="34" charset="-120"/>
               </a:rPr>
-              <a:t>e</a:t>
+              <a:t>i</a:t>
             </a:r>
             <a:endParaRPr lang="en-US" sz="900" dirty="0"/>
           </a:p>
@@ -27854,14 +28841,14 @@
       </p:sp>
       <p:sp>
         <p:nvSpPr>
-          <p:cNvPr id="40" name="Shape 38"/>
-          <p:cNvSpPr/>
-          <p:nvPr/>
-        </p:nvSpPr>
-        <p:spPr>
-          <a:xfrm>
-            <a:off x="3639312" y="4169664"/>
-            <a:ext cx="685800" cy="384048"/>
+          <p:cNvPr id="46" name="Shape 44"/>
+          <p:cNvSpPr/>
+          <p:nvPr/>
+        </p:nvSpPr>
+        <p:spPr>
+          <a:xfrm>
+            <a:off x="3140133" y="4169664"/>
+            <a:ext cx="543652" cy="384048"/>
           </a:xfrm>
           <a:prstGeom prst="rect">
             <a:avLst>
@@ -27881,14 +28868,14 @@
       </p:sp>
       <p:sp>
         <p:nvSpPr>
-          <p:cNvPr id="41" name="Text 39"/>
-          <p:cNvSpPr/>
-          <p:nvPr/>
-        </p:nvSpPr>
-        <p:spPr>
-          <a:xfrm>
-            <a:off x="3639312" y="4169664"/>
-            <a:ext cx="685800" cy="384048"/>
+          <p:cNvPr id="47" name="Text 45"/>
+          <p:cNvSpPr/>
+          <p:nvPr/>
+        </p:nvSpPr>
+        <p:spPr>
+          <a:xfrm>
+            <a:off x="3140133" y="4169664"/>
+            <a:ext cx="543652" cy="384048"/>
           </a:xfrm>
           <a:prstGeom prst="rect">
             <a:avLst/>
@@ -27912,7 +28899,7 @@
                 <a:ea typeface="Trebuchet MS" pitchFamily="34" charset="-122"/>
                 <a:cs typeface="Trebuchet MS" pitchFamily="34" charset="-120"/>
               </a:rPr>
-              <a:t>d</a:t>
+              <a:t>s</a:t>
             </a:r>
             <a:endParaRPr lang="en-US" sz="900" dirty="0"/>
           </a:p>
@@ -27920,14 +28907,14 @@
       </p:sp>
       <p:sp>
         <p:nvSpPr>
-          <p:cNvPr id="42" name="Shape 40"/>
-          <p:cNvSpPr/>
-          <p:nvPr/>
-        </p:nvSpPr>
-        <p:spPr>
-          <a:xfrm>
-            <a:off x="4447032" y="4169664"/>
-            <a:ext cx="685800" cy="384048"/>
+          <p:cNvPr id="48" name="Shape 46"/>
+          <p:cNvSpPr/>
+          <p:nvPr/>
+        </p:nvSpPr>
+        <p:spPr>
+          <a:xfrm>
+            <a:off x="3734077" y="4169664"/>
+            <a:ext cx="543652" cy="384048"/>
           </a:xfrm>
           <a:prstGeom prst="rect">
             <a:avLst>
@@ -27947,14 +28934,14 @@
       </p:sp>
       <p:sp>
         <p:nvSpPr>
-          <p:cNvPr id="43" name="Text 41"/>
-          <p:cNvSpPr/>
-          <p:nvPr/>
-        </p:nvSpPr>
-        <p:spPr>
-          <a:xfrm>
-            <a:off x="4447032" y="4169664"/>
-            <a:ext cx="685800" cy="384048"/>
+          <p:cNvPr id="49" name="Text 47"/>
+          <p:cNvSpPr/>
+          <p:nvPr/>
+        </p:nvSpPr>
+        <p:spPr>
+          <a:xfrm>
+            <a:off x="3734077" y="4169664"/>
+            <a:ext cx="543652" cy="384048"/>
           </a:xfrm>
           <a:prstGeom prst="rect">
             <a:avLst/>
@@ -27978,7 +28965,7 @@
                 <a:ea typeface="Trebuchet MS" pitchFamily="34" charset="-122"/>
                 <a:cs typeface="Trebuchet MS" pitchFamily="34" charset="-120"/>
               </a:rPr>
-              <a:t>i</a:t>
+              <a:t>d</a:t>
             </a:r>
             <a:endParaRPr lang="en-US" sz="900" dirty="0"/>
           </a:p>
@@ -27986,14 +28973,14 @@
       </p:sp>
       <p:sp>
         <p:nvSpPr>
-          <p:cNvPr id="44" name="Shape 42"/>
-          <p:cNvSpPr/>
-          <p:nvPr/>
-        </p:nvSpPr>
-        <p:spPr>
-          <a:xfrm>
-            <a:off x="5254752" y="4169664"/>
-            <a:ext cx="685800" cy="384048"/>
+          <p:cNvPr id="50" name="Shape 48"/>
+          <p:cNvSpPr/>
+          <p:nvPr/>
+        </p:nvSpPr>
+        <p:spPr>
+          <a:xfrm>
+            <a:off x="4328021" y="4169664"/>
+            <a:ext cx="543652" cy="384048"/>
           </a:xfrm>
           <a:prstGeom prst="rect">
             <a:avLst>
@@ -28013,14 +29000,14 @@
       </p:sp>
       <p:sp>
         <p:nvSpPr>
-          <p:cNvPr id="45" name="Text 43"/>
-          <p:cNvSpPr/>
-          <p:nvPr/>
-        </p:nvSpPr>
-        <p:spPr>
-          <a:xfrm>
-            <a:off x="5254752" y="4169664"/>
-            <a:ext cx="685800" cy="384048"/>
+          <p:cNvPr id="51" name="Text 49"/>
+          <p:cNvSpPr/>
+          <p:nvPr/>
+        </p:nvSpPr>
+        <p:spPr>
+          <a:xfrm>
+            <a:off x="4328021" y="4169664"/>
+            <a:ext cx="543652" cy="384048"/>
           </a:xfrm>
           <a:prstGeom prst="rect">
             <a:avLst/>
@@ -28044,7 +29031,7 @@
                 <a:ea typeface="Trebuchet MS" pitchFamily="34" charset="-122"/>
                 <a:cs typeface="Trebuchet MS" pitchFamily="34" charset="-120"/>
               </a:rPr>
-              <a:t>r</a:t>
+              <a:t>i</a:t>
             </a:r>
             <a:endParaRPr lang="en-US" sz="900" dirty="0"/>
           </a:p>
@@ -28052,14 +29039,14 @@
       </p:sp>
       <p:sp>
         <p:nvSpPr>
-          <p:cNvPr id="46" name="Shape 44"/>
-          <p:cNvSpPr/>
-          <p:nvPr/>
-        </p:nvSpPr>
-        <p:spPr>
-          <a:xfrm>
-            <a:off x="6062472" y="4169664"/>
-            <a:ext cx="685800" cy="384048"/>
+          <p:cNvPr id="52" name="Shape 50"/>
+          <p:cNvSpPr/>
+          <p:nvPr/>
+        </p:nvSpPr>
+        <p:spPr>
+          <a:xfrm>
+            <a:off x="4921966" y="4169664"/>
+            <a:ext cx="543652" cy="384048"/>
           </a:xfrm>
           <a:prstGeom prst="rect">
             <a:avLst>
@@ -28079,14 +29066,14 @@
       </p:sp>
       <p:sp>
         <p:nvSpPr>
-          <p:cNvPr id="47" name="Text 45"/>
-          <p:cNvSpPr/>
-          <p:nvPr/>
-        </p:nvSpPr>
-        <p:spPr>
-          <a:xfrm>
-            <a:off x="6062472" y="4169664"/>
-            <a:ext cx="685800" cy="384048"/>
+          <p:cNvPr id="53" name="Text 51"/>
+          <p:cNvSpPr/>
+          <p:nvPr/>
+        </p:nvSpPr>
+        <p:spPr>
+          <a:xfrm>
+            <a:off x="4921966" y="4169664"/>
+            <a:ext cx="543652" cy="384048"/>
           </a:xfrm>
           <a:prstGeom prst="rect">
             <a:avLst/>
@@ -28110,7 +29097,7 @@
                 <a:ea typeface="Trebuchet MS" pitchFamily="34" charset="-122"/>
                 <a:cs typeface="Trebuchet MS" pitchFamily="34" charset="-120"/>
               </a:rPr>
-              <a:t>e</a:t>
+              <a:t>r</a:t>
             </a:r>
             <a:endParaRPr lang="en-US" sz="900" dirty="0"/>
           </a:p>
@@ -28118,14 +29105,14 @@
       </p:sp>
       <p:sp>
         <p:nvSpPr>
-          <p:cNvPr id="48" name="Shape 46"/>
-          <p:cNvSpPr/>
-          <p:nvPr/>
-        </p:nvSpPr>
-        <p:spPr>
-          <a:xfrm>
-            <a:off x="6870192" y="4169664"/>
-            <a:ext cx="685800" cy="384048"/>
+          <p:cNvPr id="54" name="Shape 52"/>
+          <p:cNvSpPr/>
+          <p:nvPr/>
+        </p:nvSpPr>
+        <p:spPr>
+          <a:xfrm>
+            <a:off x="5515910" y="4169664"/>
+            <a:ext cx="543652" cy="384048"/>
           </a:xfrm>
           <a:prstGeom prst="rect">
             <a:avLst>
@@ -28145,14 +29132,14 @@
       </p:sp>
       <p:sp>
         <p:nvSpPr>
-          <p:cNvPr id="49" name="Text 47"/>
-          <p:cNvSpPr/>
-          <p:nvPr/>
-        </p:nvSpPr>
-        <p:spPr>
-          <a:xfrm>
-            <a:off x="6870192" y="4169664"/>
-            <a:ext cx="685800" cy="384048"/>
+          <p:cNvPr id="55" name="Text 53"/>
+          <p:cNvSpPr/>
+          <p:nvPr/>
+        </p:nvSpPr>
+        <p:spPr>
+          <a:xfrm>
+            <a:off x="5515910" y="4169664"/>
+            <a:ext cx="543652" cy="384048"/>
           </a:xfrm>
           <a:prstGeom prst="rect">
             <a:avLst/>
@@ -28176,6 +29163,72 @@
                 <a:ea typeface="Trebuchet MS" pitchFamily="34" charset="-122"/>
                 <a:cs typeface="Trebuchet MS" pitchFamily="34" charset="-120"/>
               </a:rPr>
+              <a:t>e</a:t>
+            </a:r>
+            <a:endParaRPr lang="en-US" sz="900" dirty="0"/>
+          </a:p>
+        </p:txBody>
+      </p:sp>
+      <p:sp>
+        <p:nvSpPr>
+          <p:cNvPr id="56" name="Shape 54"/>
+          <p:cNvSpPr/>
+          <p:nvPr/>
+        </p:nvSpPr>
+        <p:spPr>
+          <a:xfrm>
+            <a:off x="6109855" y="4169664"/>
+            <a:ext cx="543652" cy="384048"/>
+          </a:xfrm>
+          <a:prstGeom prst="rect">
+            <a:avLst>
+              <a:gd name="adj" fmla="val 9524"/>
+            </a:avLst>
+          </a:prstGeom>
+          <a:solidFill>
+            <a:srgbClr val="FFFFFF"/>
+          </a:solidFill>
+          <a:ln w="12700">
+            <a:solidFill>
+              <a:srgbClr val="DB2777"/>
+            </a:solidFill>
+            <a:prstDash val="solid"/>
+          </a:ln>
+        </p:spPr>
+      </p:sp>
+      <p:sp>
+        <p:nvSpPr>
+          <p:cNvPr id="57" name="Text 55"/>
+          <p:cNvSpPr/>
+          <p:nvPr/>
+        </p:nvSpPr>
+        <p:spPr>
+          <a:xfrm>
+            <a:off x="6109855" y="4169664"/>
+            <a:ext cx="543652" cy="384048"/>
+          </a:xfrm>
+          <a:prstGeom prst="rect">
+            <a:avLst/>
+          </a:prstGeom>
+          <a:noFill/>
+          <a:ln/>
+        </p:spPr>
+        <p:txBody>
+          <a:bodyPr wrap="square" lIns="0" tIns="0" rIns="0" bIns="0" rtlCol="0" anchor="ctr"/>
+          <a:lstStyle/>
+          <a:p>
+            <a:pPr algn="ctr" indent="0" marL="0">
+              <a:buNone/>
+            </a:pPr>
+            <a:r>
+              <a:rPr lang="en-US" sz="900" b="1" dirty="0">
+                <a:solidFill>
+                  <a:srgbClr val="9D174D"/>
+                </a:solidFill>
+                <a:latin typeface="Trebuchet MS" pitchFamily="34" charset="0"/>
+                <a:ea typeface="Trebuchet MS" pitchFamily="34" charset="-122"/>
+                <a:cs typeface="Trebuchet MS" pitchFamily="34" charset="-120"/>
+              </a:rPr>
               <a:t>c</a:t>
             </a:r>
             <a:endParaRPr lang="en-US" sz="900" dirty="0"/>
@@ -28184,14 +29237,14 @@
       </p:sp>
       <p:sp>
         <p:nvSpPr>
-          <p:cNvPr id="50" name="Text 48"/>
-          <p:cNvSpPr/>
-          <p:nvPr/>
-        </p:nvSpPr>
-        <p:spPr>
-          <a:xfrm>
-            <a:off x="6870192" y="4572000"/>
-            <a:ext cx="685800" cy="219456"/>
+          <p:cNvPr id="58" name="Text 56"/>
+          <p:cNvSpPr/>
+          <p:nvPr/>
+        </p:nvSpPr>
+        <p:spPr>
+          <a:xfrm>
+            <a:off x="6109855" y="4572000"/>
+            <a:ext cx="543652" cy="219456"/>
           </a:xfrm>
           <a:prstGeom prst="rect">
             <a:avLst/>
@@ -28223,14 +29276,14 @@
       </p:sp>
       <p:sp>
         <p:nvSpPr>
-          <p:cNvPr id="51" name="Shape 49"/>
-          <p:cNvSpPr/>
-          <p:nvPr/>
-        </p:nvSpPr>
-        <p:spPr>
-          <a:xfrm>
-            <a:off x="7677912" y="4169664"/>
-            <a:ext cx="685800" cy="384048"/>
+          <p:cNvPr id="59" name="Shape 57"/>
+          <p:cNvSpPr/>
+          <p:nvPr/>
+        </p:nvSpPr>
+        <p:spPr>
+          <a:xfrm>
+            <a:off x="6703799" y="4169664"/>
+            <a:ext cx="543652" cy="384048"/>
           </a:xfrm>
           <a:prstGeom prst="rect">
             <a:avLst>
@@ -28250,14 +29303,14 @@
       </p:sp>
       <p:sp>
         <p:nvSpPr>
-          <p:cNvPr id="52" name="Text 50"/>
-          <p:cNvSpPr/>
-          <p:nvPr/>
-        </p:nvSpPr>
-        <p:spPr>
-          <a:xfrm>
-            <a:off x="7677912" y="4169664"/>
-            <a:ext cx="685800" cy="384048"/>
+          <p:cNvPr id="60" name="Text 58"/>
+          <p:cNvSpPr/>
+          <p:nvPr/>
+        </p:nvSpPr>
+        <p:spPr>
+          <a:xfrm>
+            <a:off x="6703799" y="4169664"/>
+            <a:ext cx="543652" cy="384048"/>
           </a:xfrm>
           <a:prstGeom prst="rect">
             <a:avLst/>
@@ -28282,6 +29335,138 @@
                 <a:cs typeface="Trebuchet MS" pitchFamily="34" charset="-120"/>
               </a:rPr>
               <a:t>t</a:t>
+            </a:r>
+            <a:endParaRPr lang="en-US" sz="900" dirty="0"/>
+          </a:p>
+        </p:txBody>
+      </p:sp>
+      <p:sp>
+        <p:nvSpPr>
+          <p:cNvPr id="61" name="Shape 59"/>
+          <p:cNvSpPr/>
+          <p:nvPr/>
+        </p:nvSpPr>
+        <p:spPr>
+          <a:xfrm>
+            <a:off x="7297743" y="4169664"/>
+            <a:ext cx="543652" cy="384048"/>
+          </a:xfrm>
+          <a:prstGeom prst="rect">
+            <a:avLst>
+              <a:gd name="adj" fmla="val 9524"/>
+            </a:avLst>
+          </a:prstGeom>
+          <a:solidFill>
+            <a:srgbClr val="FFFFFF"/>
+          </a:solidFill>
+          <a:ln w="12700">
+            <a:solidFill>
+              <a:srgbClr val="DB2777"/>
+            </a:solidFill>
+            <a:prstDash val="solid"/>
+          </a:ln>
+        </p:spPr>
+      </p:sp>
+      <p:sp>
+        <p:nvSpPr>
+          <p:cNvPr id="62" name="Text 60"/>
+          <p:cNvSpPr/>
+          <p:nvPr/>
+        </p:nvSpPr>
+        <p:spPr>
+          <a:xfrm>
+            <a:off x="7297743" y="4169664"/>
+            <a:ext cx="543652" cy="384048"/>
+          </a:xfrm>
+          <a:prstGeom prst="rect">
+            <a:avLst/>
+          </a:prstGeom>
+          <a:noFill/>
+          <a:ln/>
+        </p:spPr>
+        <p:txBody>
+          <a:bodyPr wrap="square" lIns="0" tIns="0" rIns="0" bIns="0" rtlCol="0" anchor="ctr"/>
+          <a:lstStyle/>
+          <a:p>
+            <a:pPr algn="ctr" indent="0" marL="0">
+              <a:buNone/>
+            </a:pPr>
+            <a:r>
+              <a:rPr lang="en-US" sz="900" b="1" dirty="0">
+                <a:solidFill>
+                  <a:srgbClr val="9D174D"/>
+                </a:solidFill>
+                <a:latin typeface="Trebuchet MS" pitchFamily="34" charset="0"/>
+                <a:ea typeface="Trebuchet MS" pitchFamily="34" charset="-122"/>
+                <a:cs typeface="Trebuchet MS" pitchFamily="34" charset="-120"/>
+              </a:rPr>
+              <a:t>e</a:t>
+            </a:r>
+            <a:endParaRPr lang="en-US" sz="900" dirty="0"/>
+          </a:p>
+        </p:txBody>
+      </p:sp>
+      <p:sp>
+        <p:nvSpPr>
+          <p:cNvPr id="63" name="Shape 61"/>
+          <p:cNvSpPr/>
+          <p:nvPr/>
+        </p:nvSpPr>
+        <p:spPr>
+          <a:xfrm>
+            <a:off x="7891688" y="4169664"/>
+            <a:ext cx="543652" cy="384048"/>
+          </a:xfrm>
+          <a:prstGeom prst="rect">
+            <a:avLst>
+              <a:gd name="adj" fmla="val 9524"/>
+            </a:avLst>
+          </a:prstGeom>
+          <a:solidFill>
+            <a:srgbClr val="FFFFFF"/>
+          </a:solidFill>
+          <a:ln w="12700">
+            <a:solidFill>
+              <a:srgbClr val="DB2777"/>
+            </a:solidFill>
+            <a:prstDash val="solid"/>
+          </a:ln>
+        </p:spPr>
+      </p:sp>
+      <p:sp>
+        <p:nvSpPr>
+          <p:cNvPr id="64" name="Text 62"/>
+          <p:cNvSpPr/>
+          <p:nvPr/>
+        </p:nvSpPr>
+        <p:spPr>
+          <a:xfrm>
+            <a:off x="7891688" y="4169664"/>
+            <a:ext cx="543652" cy="384048"/>
+          </a:xfrm>
+          <a:prstGeom prst="rect">
+            <a:avLst/>
+          </a:prstGeom>
+          <a:noFill/>
+          <a:ln/>
+        </p:spPr>
+        <p:txBody>
+          <a:bodyPr wrap="square" lIns="0" tIns="0" rIns="0" bIns="0" rtlCol="0" anchor="ctr"/>
+          <a:lstStyle/>
+          <a:p>
+            <a:pPr algn="ctr" indent="0" marL="0">
+              <a:buNone/>
+            </a:pPr>
+            <a:r>
+              <a:rPr lang="en-US" sz="900" b="1" dirty="0">
+                <a:solidFill>
+                  <a:srgbClr val="9D174D"/>
+                </a:solidFill>
+                <a:latin typeface="Trebuchet MS" pitchFamily="34" charset="0"/>
+                <a:ea typeface="Trebuchet MS" pitchFamily="34" charset="-122"/>
+                <a:cs typeface="Trebuchet MS" pitchFamily="34" charset="-120"/>
+              </a:rPr>
+              <a:t>d</a:t>
             </a:r>
             <a:endParaRPr lang="en-US" sz="900" dirty="0"/>
           </a:p>
@@ -28573,7 +29758,7 @@
                 <a:ea typeface="Calibri" pitchFamily="34" charset="-122"/>
                 <a:cs typeface="Calibri" pitchFamily="34" charset="-120"/>
               </a:rPr>
-              <a:t>Word Labs  •  wordlabs.app  •  Root: 'direct' = straight, guide, manage</a:t>
+              <a:t>Word Labs  •  wordlabs.app  •  Root: 'direct' = straight, guide, lead</a:t>
             </a:r>
             <a:endParaRPr lang="en-US" sz="800" dirty="0"/>
           </a:p>
@@ -28712,7 +29897,7 @@
                 <a:ea typeface="Trebuchet MS" pitchFamily="34" charset="-122"/>
                 <a:cs typeface="Trebuchet MS" pitchFamily="34" charset="-120"/>
               </a:rPr>
-              <a:t>indirect</a:t>
+              <a:t>indirectly</a:t>
             </a:r>
             <a:endParaRPr lang="en-US" sz="2800" dirty="0"/>
           </a:p>
@@ -29400,7 +30585,7 @@
                 <a:ea typeface="Calibri" pitchFamily="34" charset="-122"/>
                 <a:cs typeface="Calibri" pitchFamily="34" charset="-120"/>
               </a:rPr>
-              <a:t>Word Labs  •  wordlabs.app  •  Root: 'direct' = straight, guide, manage</a:t>
+              <a:t>Word Labs  •  wordlabs.app  •  Root: 'direct' = straight, guide, lead</a:t>
             </a:r>
             <a:endParaRPr lang="en-US" sz="800" dirty="0"/>
           </a:p>
@@ -29539,7 +30724,7 @@
                 <a:ea typeface="Trebuchet MS" pitchFamily="34" charset="-122"/>
                 <a:cs typeface="Trebuchet MS" pitchFamily="34" charset="-120"/>
               </a:rPr>
-              <a:t>indirect</a:t>
+              <a:t>indirectly</a:t>
             </a:r>
             <a:endParaRPr lang="en-US" sz="2800" dirty="0"/>
           </a:p>
@@ -29619,7 +30804,7 @@
         </p:nvSpPr>
         <p:spPr>
           <a:xfrm>
-            <a:off x="2938272" y="2258568"/>
+            <a:off x="2221992" y="2258568"/>
             <a:ext cx="1828800" cy="292608"/>
           </a:xfrm>
           <a:prstGeom prst="rect">
@@ -29653,7 +30838,7 @@
         </p:nvSpPr>
         <p:spPr>
           <a:xfrm>
-            <a:off x="2938272" y="2258568"/>
+            <a:off x="2221992" y="2258568"/>
             <a:ext cx="1828800" cy="292608"/>
           </a:xfrm>
           <a:prstGeom prst="rect">
@@ -29692,7 +30877,7 @@
         </p:nvSpPr>
         <p:spPr>
           <a:xfrm>
-            <a:off x="2938272" y="2569464"/>
+            <a:off x="2221992" y="2569464"/>
             <a:ext cx="1828800" cy="201168"/>
           </a:xfrm>
           <a:prstGeom prst="rect">
@@ -29717,7 +30902,7 @@
                 <a:ea typeface="Calibri" pitchFamily="34" charset="-122"/>
                 <a:cs typeface="Calibri" pitchFamily="34" charset="-120"/>
               </a:rPr>
-              <a:t>not</a:t>
+              <a:t>not or without</a:t>
             </a:r>
             <a:endParaRPr lang="en-US" sz="850" dirty="0"/>
           </a:p>
@@ -29731,7 +30916,7 @@
         </p:nvSpPr>
         <p:spPr>
           <a:xfrm>
-            <a:off x="5803392" y="2258568"/>
+            <a:off x="4370832" y="2258568"/>
             <a:ext cx="1828800" cy="292608"/>
           </a:xfrm>
           <a:prstGeom prst="rect">
@@ -29765,7 +30950,7 @@
         </p:nvSpPr>
         <p:spPr>
           <a:xfrm>
-            <a:off x="5803392" y="2258568"/>
+            <a:off x="4370832" y="2258568"/>
             <a:ext cx="1828800" cy="292608"/>
           </a:xfrm>
           <a:prstGeom prst="rect">
@@ -29804,7 +30989,7 @@
         </p:nvSpPr>
         <p:spPr>
           <a:xfrm>
-            <a:off x="5803392" y="2569464"/>
+            <a:off x="4370832" y="2569464"/>
             <a:ext cx="1828800" cy="201168"/>
           </a:xfrm>
           <a:prstGeom prst="rect">
@@ -29829,7 +31014,7 @@
                 <a:ea typeface="Calibri" pitchFamily="34" charset="-122"/>
                 <a:cs typeface="Calibri" pitchFamily="34" charset="-120"/>
               </a:rPr>
-              <a:t>to guide or go straight</a:t>
+              <a:t>to guide or lead straight</a:t>
             </a:r>
             <a:endParaRPr lang="en-US" sz="850" dirty="0"/>
           </a:p>
@@ -29838,6 +31023,118 @@
       <p:sp>
         <p:nvSpPr>
           <p:cNvPr id="22" name="Shape 20"/>
+          <p:cNvSpPr/>
+          <p:nvPr/>
+        </p:nvSpPr>
+        <p:spPr>
+          <a:xfrm>
+            <a:off x="6519672" y="2258568"/>
+            <a:ext cx="1828800" cy="292608"/>
+          </a:xfrm>
+          <a:prstGeom prst="rect">
+            <a:avLst>
+              <a:gd name="adj" fmla="val 25000"/>
+            </a:avLst>
+          </a:prstGeom>
+          <a:solidFill>
+            <a:srgbClr val="FCE7F3"/>
+          </a:solidFill>
+          <a:ln w="19050">
+            <a:solidFill>
+              <a:srgbClr val="DB2777"/>
+            </a:solidFill>
+            <a:prstDash val="solid"/>
+          </a:ln>
+          <a:effectLst>
+            <a:outerShdw sx="100000" sy="100000" kx="0" ky="0" algn="bl" rotWithShape="0" blurRad="101600" dist="38100" dir="8100000">
+              <a:srgbClr val="000000">
+                <a:alpha val="12000"/>
+              </a:srgbClr>
+            </a:outerShdw>
+          </a:effectLst>
+        </p:spPr>
+      </p:sp>
+      <p:sp>
+        <p:nvSpPr>
+          <p:cNvPr id="23" name="Text 21"/>
+          <p:cNvSpPr/>
+          <p:nvPr/>
+        </p:nvSpPr>
+        <p:spPr>
+          <a:xfrm>
+            <a:off x="6519672" y="2258568"/>
+            <a:ext cx="1828800" cy="292608"/>
+          </a:xfrm>
+          <a:prstGeom prst="rect">
+            <a:avLst/>
+          </a:prstGeom>
+          <a:noFill/>
+          <a:ln/>
+        </p:spPr>
+        <p:txBody>
+          <a:bodyPr wrap="square" lIns="0" tIns="0" rIns="0" bIns="0" rtlCol="0" anchor="ctr"/>
+          <a:lstStyle/>
+          <a:p>
+            <a:pPr algn="ctr" indent="0" marL="0">
+              <a:buNone/>
+            </a:pPr>
+            <a:r>
+              <a:rPr lang="en-US" sz="1300" b="1" dirty="0">
+                <a:solidFill>
+                  <a:srgbClr val="9D174D"/>
+                </a:solidFill>
+                <a:latin typeface="Trebuchet MS" pitchFamily="34" charset="0"/>
+                <a:ea typeface="Trebuchet MS" pitchFamily="34" charset="-122"/>
+                <a:cs typeface="Trebuchet MS" pitchFamily="34" charset="-120"/>
+              </a:rPr>
+              <a:t>ly</a:t>
+            </a:r>
+            <a:endParaRPr lang="en-US" sz="1300" dirty="0"/>
+          </a:p>
+        </p:txBody>
+      </p:sp>
+      <p:sp>
+        <p:nvSpPr>
+          <p:cNvPr id="24" name="Text 22"/>
+          <p:cNvSpPr/>
+          <p:nvPr/>
+        </p:nvSpPr>
+        <p:spPr>
+          <a:xfrm>
+            <a:off x="6519672" y="2569464"/>
+            <a:ext cx="1828800" cy="201168"/>
+          </a:xfrm>
+          <a:prstGeom prst="rect">
+            <a:avLst/>
+          </a:prstGeom>
+          <a:noFill/>
+          <a:ln/>
+        </p:spPr>
+        <p:txBody>
+          <a:bodyPr wrap="square" lIns="0" tIns="0" rIns="0" bIns="0" rtlCol="0" anchor="t"/>
+          <a:lstStyle/>
+          <a:p>
+            <a:pPr algn="ctr" indent="0" marL="0">
+              <a:buNone/>
+            </a:pPr>
+            <a:r>
+              <a:rPr lang="en-US" sz="850" dirty="0">
+                <a:solidFill>
+                  <a:srgbClr val="475569"/>
+                </a:solidFill>
+                <a:latin typeface="Calibri" pitchFamily="34" charset="0"/>
+                <a:ea typeface="Calibri" pitchFamily="34" charset="-122"/>
+                <a:cs typeface="Calibri" pitchFamily="34" charset="-120"/>
+              </a:rPr>
+              <a:t>in a certain way</a:t>
+            </a:r>
+            <a:endParaRPr lang="en-US" sz="850" dirty="0"/>
+          </a:p>
+        </p:txBody>
+      </p:sp>
+      <p:sp>
+        <p:nvSpPr>
+          <p:cNvPr id="25" name="Shape 23"/>
           <p:cNvSpPr/>
           <p:nvPr/>
         </p:nvSpPr>
@@ -29864,7 +31161,7 @@
       </p:sp>
       <p:sp>
         <p:nvSpPr>
-          <p:cNvPr id="23" name="Text 21"/>
+          <p:cNvPr id="26" name="Text 24"/>
           <p:cNvSpPr/>
           <p:nvPr/>
         </p:nvSpPr>
@@ -29903,7 +31200,7 @@
       </p:sp>
       <p:sp>
         <p:nvSpPr>
-          <p:cNvPr id="24" name="Shape 22"/>
+          <p:cNvPr id="27" name="Shape 25"/>
           <p:cNvSpPr/>
           <p:nvPr/>
         </p:nvSpPr>
@@ -29930,7 +31227,7 @@
       </p:sp>
       <p:sp>
         <p:nvSpPr>
-          <p:cNvPr id="25" name="Text 23"/>
+          <p:cNvPr id="28" name="Text 26"/>
           <p:cNvSpPr/>
           <p:nvPr/>
         </p:nvSpPr>
@@ -29969,7 +31266,7 @@
       </p:sp>
       <p:sp>
         <p:nvSpPr>
-          <p:cNvPr id="26" name="Shape 24"/>
+          <p:cNvPr id="29" name="Shape 27"/>
           <p:cNvSpPr/>
           <p:nvPr/>
         </p:nvSpPr>
@@ -29996,7 +31293,7 @@
       </p:sp>
       <p:sp>
         <p:nvSpPr>
-          <p:cNvPr id="27" name="Text 25"/>
+          <p:cNvPr id="30" name="Text 28"/>
           <p:cNvSpPr/>
           <p:nvPr/>
         </p:nvSpPr>
@@ -30035,7 +31332,7 @@
       </p:sp>
       <p:sp>
         <p:nvSpPr>
-          <p:cNvPr id="28" name="Shape 26"/>
+          <p:cNvPr id="31" name="Shape 29"/>
           <p:cNvSpPr/>
           <p:nvPr/>
         </p:nvSpPr>
@@ -30062,7 +31359,7 @@
       </p:sp>
       <p:sp>
         <p:nvSpPr>
-          <p:cNvPr id="29" name="Text 27"/>
+          <p:cNvPr id="32" name="Text 30"/>
           <p:cNvSpPr/>
           <p:nvPr/>
         </p:nvSpPr>
@@ -30385,7 +31682,7 @@
                 <a:ea typeface="Calibri" pitchFamily="34" charset="-122"/>
                 <a:cs typeface="Calibri" pitchFamily="34" charset="-120"/>
               </a:rPr>
-              <a:t>Word Labs  •  wordlabs.app  •  Root: 'direct' = straight, guide, manage</a:t>
+              <a:t>Word Labs  •  wordlabs.app  •  Root: 'direct' = straight, guide, lead</a:t>
             </a:r>
             <a:endParaRPr lang="en-US" sz="800" dirty="0"/>
           </a:p>
@@ -30524,7 +31821,7 @@
                 <a:ea typeface="Trebuchet MS" pitchFamily="34" charset="-122"/>
                 <a:cs typeface="Trebuchet MS" pitchFamily="34" charset="-120"/>
               </a:rPr>
-              <a:t>indirect</a:t>
+              <a:t>indirectly</a:t>
             </a:r>
             <a:endParaRPr lang="en-US" sz="2800" dirty="0"/>
           </a:p>
@@ -30604,7 +31901,7 @@
         </p:nvSpPr>
         <p:spPr>
           <a:xfrm>
-            <a:off x="2938272" y="2258568"/>
+            <a:off x="2221992" y="2258568"/>
             <a:ext cx="1828800" cy="292608"/>
           </a:xfrm>
           <a:prstGeom prst="rect">
@@ -30638,7 +31935,7 @@
         </p:nvSpPr>
         <p:spPr>
           <a:xfrm>
-            <a:off x="2938272" y="2258568"/>
+            <a:off x="2221992" y="2258568"/>
             <a:ext cx="1828800" cy="292608"/>
           </a:xfrm>
           <a:prstGeom prst="rect">
@@ -30677,7 +31974,7 @@
         </p:nvSpPr>
         <p:spPr>
           <a:xfrm>
-            <a:off x="2938272" y="2569464"/>
+            <a:off x="2221992" y="2569464"/>
             <a:ext cx="1828800" cy="201168"/>
           </a:xfrm>
           <a:prstGeom prst="rect">
@@ -30702,7 +31999,7 @@
                 <a:ea typeface="Calibri" pitchFamily="34" charset="-122"/>
                 <a:cs typeface="Calibri" pitchFamily="34" charset="-120"/>
               </a:rPr>
-              <a:t>not</a:t>
+              <a:t>not or without</a:t>
             </a:r>
             <a:endParaRPr lang="en-US" sz="850" dirty="0"/>
           </a:p>
@@ -30716,7 +32013,7 @@
         </p:nvSpPr>
         <p:spPr>
           <a:xfrm>
-            <a:off x="5803392" y="2258568"/>
+            <a:off x="4370832" y="2258568"/>
             <a:ext cx="1828800" cy="292608"/>
           </a:xfrm>
           <a:prstGeom prst="rect">
@@ -30750,7 +32047,7 @@
         </p:nvSpPr>
         <p:spPr>
           <a:xfrm>
-            <a:off x="5803392" y="2258568"/>
+            <a:off x="4370832" y="2258568"/>
             <a:ext cx="1828800" cy="292608"/>
           </a:xfrm>
           <a:prstGeom prst="rect">
@@ -30789,7 +32086,7 @@
         </p:nvSpPr>
         <p:spPr>
           <a:xfrm>
-            <a:off x="5803392" y="2569464"/>
+            <a:off x="4370832" y="2569464"/>
             <a:ext cx="1828800" cy="201168"/>
           </a:xfrm>
           <a:prstGeom prst="rect">
@@ -30814,7 +32111,7 @@
                 <a:ea typeface="Calibri" pitchFamily="34" charset="-122"/>
                 <a:cs typeface="Calibri" pitchFamily="34" charset="-120"/>
               </a:rPr>
-              <a:t>to guide or go straight</a:t>
+              <a:t>to guide or lead straight</a:t>
             </a:r>
             <a:endParaRPr lang="en-US" sz="850" dirty="0"/>
           </a:p>
@@ -30823,6 +32120,118 @@
       <p:sp>
         <p:nvSpPr>
           <p:cNvPr id="22" name="Shape 20"/>
+          <p:cNvSpPr/>
+          <p:nvPr/>
+        </p:nvSpPr>
+        <p:spPr>
+          <a:xfrm>
+            <a:off x="6519672" y="2258568"/>
+            <a:ext cx="1828800" cy="292608"/>
+          </a:xfrm>
+          <a:prstGeom prst="rect">
+            <a:avLst>
+              <a:gd name="adj" fmla="val 25000"/>
+            </a:avLst>
+          </a:prstGeom>
+          <a:solidFill>
+            <a:srgbClr val="FCE7F3"/>
+          </a:solidFill>
+          <a:ln w="19050">
+            <a:solidFill>
+              <a:srgbClr val="DB2777"/>
+            </a:solidFill>
+            <a:prstDash val="solid"/>
+          </a:ln>
+          <a:effectLst>
+            <a:outerShdw sx="100000" sy="100000" kx="0" ky="0" algn="bl" rotWithShape="0" blurRad="101600" dist="38100" dir="8100000">
+              <a:srgbClr val="000000">
+                <a:alpha val="12000"/>
+              </a:srgbClr>
+            </a:outerShdw>
+          </a:effectLst>
+        </p:spPr>
+      </p:sp>
+      <p:sp>
+        <p:nvSpPr>
+          <p:cNvPr id="23" name="Text 21"/>
+          <p:cNvSpPr/>
+          <p:nvPr/>
+        </p:nvSpPr>
+        <p:spPr>
+          <a:xfrm>
+            <a:off x="6519672" y="2258568"/>
+            <a:ext cx="1828800" cy="292608"/>
+          </a:xfrm>
+          <a:prstGeom prst="rect">
+            <a:avLst/>
+          </a:prstGeom>
+          <a:noFill/>
+          <a:ln/>
+        </p:spPr>
+        <p:txBody>
+          <a:bodyPr wrap="square" lIns="0" tIns="0" rIns="0" bIns="0" rtlCol="0" anchor="ctr"/>
+          <a:lstStyle/>
+          <a:p>
+            <a:pPr algn="ctr" indent="0" marL="0">
+              <a:buNone/>
+            </a:pPr>
+            <a:r>
+              <a:rPr lang="en-US" sz="1300" b="1" dirty="0">
+                <a:solidFill>
+                  <a:srgbClr val="9D174D"/>
+                </a:solidFill>
+                <a:latin typeface="Trebuchet MS" pitchFamily="34" charset="0"/>
+                <a:ea typeface="Trebuchet MS" pitchFamily="34" charset="-122"/>
+                <a:cs typeface="Trebuchet MS" pitchFamily="34" charset="-120"/>
+              </a:rPr>
+              <a:t>ly</a:t>
+            </a:r>
+            <a:endParaRPr lang="en-US" sz="1300" dirty="0"/>
+          </a:p>
+        </p:txBody>
+      </p:sp>
+      <p:sp>
+        <p:nvSpPr>
+          <p:cNvPr id="24" name="Text 22"/>
+          <p:cNvSpPr/>
+          <p:nvPr/>
+        </p:nvSpPr>
+        <p:spPr>
+          <a:xfrm>
+            <a:off x="6519672" y="2569464"/>
+            <a:ext cx="1828800" cy="201168"/>
+          </a:xfrm>
+          <a:prstGeom prst="rect">
+            <a:avLst/>
+          </a:prstGeom>
+          <a:noFill/>
+          <a:ln/>
+        </p:spPr>
+        <p:txBody>
+          <a:bodyPr wrap="square" lIns="0" tIns="0" rIns="0" bIns="0" rtlCol="0" anchor="t"/>
+          <a:lstStyle/>
+          <a:p>
+            <a:pPr algn="ctr" indent="0" marL="0">
+              <a:buNone/>
+            </a:pPr>
+            <a:r>
+              <a:rPr lang="en-US" sz="850" dirty="0">
+                <a:solidFill>
+                  <a:srgbClr val="475569"/>
+                </a:solidFill>
+                <a:latin typeface="Calibri" pitchFamily="34" charset="0"/>
+                <a:ea typeface="Calibri" pitchFamily="34" charset="-122"/>
+                <a:cs typeface="Calibri" pitchFamily="34" charset="-120"/>
+              </a:rPr>
+              <a:t>in a certain way</a:t>
+            </a:r>
+            <a:endParaRPr lang="en-US" sz="850" dirty="0"/>
+          </a:p>
+        </p:txBody>
+      </p:sp>
+      <p:sp>
+        <p:nvSpPr>
+          <p:cNvPr id="25" name="Shape 23"/>
           <p:cNvSpPr/>
           <p:nvPr/>
         </p:nvSpPr>
@@ -30849,7 +32258,7 @@
       </p:sp>
       <p:sp>
         <p:nvSpPr>
-          <p:cNvPr id="23" name="Text 21"/>
+          <p:cNvPr id="26" name="Text 24"/>
           <p:cNvSpPr/>
           <p:nvPr/>
         </p:nvSpPr>
@@ -30888,7 +32297,7 @@
       </p:sp>
       <p:sp>
         <p:nvSpPr>
-          <p:cNvPr id="24" name="Shape 22"/>
+          <p:cNvPr id="27" name="Shape 25"/>
           <p:cNvSpPr/>
           <p:nvPr/>
         </p:nvSpPr>
@@ -30915,14 +32324,14 @@
       </p:sp>
       <p:sp>
         <p:nvSpPr>
-          <p:cNvPr id="25" name="Shape 23"/>
-          <p:cNvSpPr/>
-          <p:nvPr/>
-        </p:nvSpPr>
-        <p:spPr>
-          <a:xfrm>
-            <a:off x="2313432" y="3364992"/>
-            <a:ext cx="1645920" cy="475488"/>
+          <p:cNvPr id="28" name="Shape 26"/>
+          <p:cNvSpPr/>
+          <p:nvPr/>
+        </p:nvSpPr>
+        <p:spPr>
+          <a:xfrm>
+            <a:off x="1975104" y="3364992"/>
+            <a:ext cx="1554480" cy="475488"/>
           </a:xfrm>
           <a:prstGeom prst="rect">
             <a:avLst>
@@ -30942,14 +32351,14 @@
       </p:sp>
       <p:sp>
         <p:nvSpPr>
-          <p:cNvPr id="26" name="Text 24"/>
-          <p:cNvSpPr/>
-          <p:nvPr/>
-        </p:nvSpPr>
-        <p:spPr>
-          <a:xfrm>
-            <a:off x="2313432" y="3364992"/>
-            <a:ext cx="1645920" cy="475488"/>
+          <p:cNvPr id="29" name="Text 27"/>
+          <p:cNvSpPr/>
+          <p:nvPr/>
+        </p:nvSpPr>
+        <p:spPr>
+          <a:xfrm>
+            <a:off x="1975104" y="3364992"/>
+            <a:ext cx="1554480" cy="475488"/>
           </a:xfrm>
           <a:prstGeom prst="rect">
             <a:avLst/>
@@ -30981,14 +32390,14 @@
       </p:sp>
       <p:sp>
         <p:nvSpPr>
-          <p:cNvPr id="27" name="Text 25"/>
-          <p:cNvSpPr/>
-          <p:nvPr/>
-        </p:nvSpPr>
-        <p:spPr>
-          <a:xfrm>
-            <a:off x="3959352" y="3364992"/>
-            <a:ext cx="411480" cy="475488"/>
+          <p:cNvPr id="30" name="Text 28"/>
+          <p:cNvSpPr/>
+          <p:nvPr/>
+        </p:nvSpPr>
+        <p:spPr>
+          <a:xfrm>
+            <a:off x="3529584" y="3364992"/>
+            <a:ext cx="73152" cy="475488"/>
           </a:xfrm>
           <a:prstGeom prst="rect">
             <a:avLst/>
@@ -31020,14 +32429,14 @@
       </p:sp>
       <p:sp>
         <p:nvSpPr>
-          <p:cNvPr id="28" name="Shape 26"/>
-          <p:cNvSpPr/>
-          <p:nvPr/>
-        </p:nvSpPr>
-        <p:spPr>
-          <a:xfrm>
-            <a:off x="4370832" y="3364992"/>
-            <a:ext cx="1645920" cy="475488"/>
+          <p:cNvPr id="31" name="Shape 29"/>
+          <p:cNvSpPr/>
+          <p:nvPr/>
+        </p:nvSpPr>
+        <p:spPr>
+          <a:xfrm>
+            <a:off x="3602736" y="3364992"/>
+            <a:ext cx="1554480" cy="475488"/>
           </a:xfrm>
           <a:prstGeom prst="rect">
             <a:avLst>
@@ -31047,14 +32456,14 @@
       </p:sp>
       <p:sp>
         <p:nvSpPr>
-          <p:cNvPr id="29" name="Text 27"/>
-          <p:cNvSpPr/>
-          <p:nvPr/>
-        </p:nvSpPr>
-        <p:spPr>
-          <a:xfrm>
-            <a:off x="4370832" y="3364992"/>
-            <a:ext cx="1645920" cy="475488"/>
+          <p:cNvPr id="32" name="Text 30"/>
+          <p:cNvSpPr/>
+          <p:nvPr/>
+        </p:nvSpPr>
+        <p:spPr>
+          <a:xfrm>
+            <a:off x="3602736" y="3364992"/>
+            <a:ext cx="1554480" cy="475488"/>
           </a:xfrm>
           <a:prstGeom prst="rect">
             <a:avLst/>
@@ -31086,14 +32495,14 @@
       </p:sp>
       <p:sp>
         <p:nvSpPr>
-          <p:cNvPr id="30" name="Text 28"/>
-          <p:cNvSpPr/>
-          <p:nvPr/>
-        </p:nvSpPr>
-        <p:spPr>
-          <a:xfrm>
-            <a:off x="6016752" y="3364992"/>
-            <a:ext cx="411480" cy="475488"/>
+          <p:cNvPr id="33" name="Text 31"/>
+          <p:cNvSpPr/>
+          <p:nvPr/>
+        </p:nvSpPr>
+        <p:spPr>
+          <a:xfrm>
+            <a:off x="5157216" y="3364992"/>
+            <a:ext cx="73152" cy="475488"/>
           </a:xfrm>
           <a:prstGeom prst="rect">
             <a:avLst/>
@@ -31125,14 +32534,14 @@
       </p:sp>
       <p:sp>
         <p:nvSpPr>
-          <p:cNvPr id="31" name="Shape 29"/>
-          <p:cNvSpPr/>
-          <p:nvPr/>
-        </p:nvSpPr>
-        <p:spPr>
-          <a:xfrm>
-            <a:off x="6428232" y="3364992"/>
-            <a:ext cx="1645920" cy="475488"/>
+          <p:cNvPr id="34" name="Shape 32"/>
+          <p:cNvSpPr/>
+          <p:nvPr/>
+        </p:nvSpPr>
+        <p:spPr>
+          <a:xfrm>
+            <a:off x="5230368" y="3364992"/>
+            <a:ext cx="1554480" cy="475488"/>
           </a:xfrm>
           <a:prstGeom prst="rect">
             <a:avLst>
@@ -31152,14 +32561,14 @@
       </p:sp>
       <p:sp>
         <p:nvSpPr>
-          <p:cNvPr id="32" name="Text 30"/>
-          <p:cNvSpPr/>
-          <p:nvPr/>
-        </p:nvSpPr>
-        <p:spPr>
-          <a:xfrm>
-            <a:off x="6428232" y="3364992"/>
-            <a:ext cx="1645920" cy="475488"/>
+          <p:cNvPr id="35" name="Text 33"/>
+          <p:cNvSpPr/>
+          <p:nvPr/>
+        </p:nvSpPr>
+        <p:spPr>
+          <a:xfrm>
+            <a:off x="5230368" y="3364992"/>
+            <a:ext cx="1554480" cy="475488"/>
           </a:xfrm>
           <a:prstGeom prst="rect">
             <a:avLst/>
@@ -31191,7 +32600,112 @@
       </p:sp>
       <p:sp>
         <p:nvSpPr>
-          <p:cNvPr id="33" name="Shape 31"/>
+          <p:cNvPr id="36" name="Text 34"/>
+          <p:cNvSpPr/>
+          <p:nvPr/>
+        </p:nvSpPr>
+        <p:spPr>
+          <a:xfrm>
+            <a:off x="6784848" y="3364992"/>
+            <a:ext cx="73152" cy="475488"/>
+          </a:xfrm>
+          <a:prstGeom prst="rect">
+            <a:avLst/>
+          </a:prstGeom>
+          <a:noFill/>
+          <a:ln/>
+        </p:spPr>
+        <p:txBody>
+          <a:bodyPr wrap="square" lIns="0" tIns="0" rIns="0" bIns="0" rtlCol="0" anchor="ctr"/>
+          <a:lstStyle/>
+          <a:p>
+            <a:pPr algn="ctr" indent="0" marL="0">
+              <a:buNone/>
+            </a:pPr>
+            <a:r>
+              <a:rPr lang="en-US" sz="1600" b="1" dirty="0">
+                <a:solidFill>
+                  <a:srgbClr val="0D9488"/>
+                </a:solidFill>
+                <a:latin typeface="Trebuchet MS" pitchFamily="34" charset="0"/>
+                <a:ea typeface="Trebuchet MS" pitchFamily="34" charset="-122"/>
+                <a:cs typeface="Trebuchet MS" pitchFamily="34" charset="-120"/>
+              </a:rPr>
+              <a:t>·</a:t>
+            </a:r>
+            <a:endParaRPr lang="en-US" sz="1600" dirty="0"/>
+          </a:p>
+        </p:txBody>
+      </p:sp>
+      <p:sp>
+        <p:nvSpPr>
+          <p:cNvPr id="37" name="Shape 35"/>
+          <p:cNvSpPr/>
+          <p:nvPr/>
+        </p:nvSpPr>
+        <p:spPr>
+          <a:xfrm>
+            <a:off x="6858000" y="3364992"/>
+            <a:ext cx="1554480" cy="475488"/>
+          </a:xfrm>
+          <a:prstGeom prst="rect">
+            <a:avLst>
+              <a:gd name="adj" fmla="val 9615"/>
+            </a:avLst>
+          </a:prstGeom>
+          <a:solidFill>
+            <a:srgbClr val="FFFFFF"/>
+          </a:solidFill>
+          <a:ln w="12700">
+            <a:solidFill>
+              <a:srgbClr val="0D9488"/>
+            </a:solidFill>
+            <a:prstDash val="solid"/>
+          </a:ln>
+        </p:spPr>
+      </p:sp>
+      <p:sp>
+        <p:nvSpPr>
+          <p:cNvPr id="38" name="Text 36"/>
+          <p:cNvSpPr/>
+          <p:nvPr/>
+        </p:nvSpPr>
+        <p:spPr>
+          <a:xfrm>
+            <a:off x="6858000" y="3364992"/>
+            <a:ext cx="1554480" cy="475488"/>
+          </a:xfrm>
+          <a:prstGeom prst="rect">
+            <a:avLst/>
+          </a:prstGeom>
+          <a:noFill/>
+          <a:ln/>
+        </p:spPr>
+        <p:txBody>
+          <a:bodyPr wrap="square" lIns="0" tIns="0" rIns="0" bIns="0" rtlCol="0" anchor="ctr"/>
+          <a:lstStyle/>
+          <a:p>
+            <a:pPr algn="ctr" indent="0" marL="0">
+              <a:buNone/>
+            </a:pPr>
+            <a:r>
+              <a:rPr lang="en-US" sz="1400" b="1" dirty="0">
+                <a:solidFill>
+                  <a:srgbClr val="0D9488"/>
+                </a:solidFill>
+                <a:latin typeface="Trebuchet MS" pitchFamily="34" charset="0"/>
+                <a:ea typeface="Trebuchet MS" pitchFamily="34" charset="-122"/>
+                <a:cs typeface="Trebuchet MS" pitchFamily="34" charset="-120"/>
+              </a:rPr>
+              <a:t>ly</a:t>
+            </a:r>
+            <a:endParaRPr lang="en-US" sz="1400" dirty="0"/>
+          </a:p>
+        </p:txBody>
+      </p:sp>
+      <p:sp>
+        <p:nvSpPr>
+          <p:cNvPr id="39" name="Shape 37"/>
           <p:cNvSpPr/>
           <p:nvPr/>
         </p:nvSpPr>
@@ -31218,7 +32732,7 @@
       </p:sp>
       <p:sp>
         <p:nvSpPr>
-          <p:cNvPr id="34" name="Text 32"/>
+          <p:cNvPr id="40" name="Text 38"/>
           <p:cNvSpPr/>
           <p:nvPr/>
         </p:nvSpPr>
@@ -31257,7 +32771,7 @@
       </p:sp>
       <p:sp>
         <p:nvSpPr>
-          <p:cNvPr id="35" name="Shape 33"/>
+          <p:cNvPr id="41" name="Shape 39"/>
           <p:cNvSpPr/>
           <p:nvPr/>
         </p:nvSpPr>
@@ -31284,7 +32798,7 @@
       </p:sp>
       <p:sp>
         <p:nvSpPr>
-          <p:cNvPr id="36" name="Text 34"/>
+          <p:cNvPr id="42" name="Text 40"/>
           <p:cNvSpPr/>
           <p:nvPr/>
         </p:nvSpPr>
@@ -31607,7 +33121,7 @@
                 <a:ea typeface="Calibri" pitchFamily="34" charset="-122"/>
                 <a:cs typeface="Calibri" pitchFamily="34" charset="-120"/>
               </a:rPr>
-              <a:t>Word Labs  •  wordlabs.app  •  Root: 'direct' = straight, guide, manage</a:t>
+              <a:t>Word Labs  •  wordlabs.app  •  Root: 'direct' = straight, guide, lead</a:t>
             </a:r>
             <a:endParaRPr lang="en-US" sz="800" dirty="0"/>
           </a:p>
@@ -31746,7 +33260,7 @@
                 <a:ea typeface="Trebuchet MS" pitchFamily="34" charset="-122"/>
                 <a:cs typeface="Trebuchet MS" pitchFamily="34" charset="-120"/>
               </a:rPr>
-              <a:t>indirect</a:t>
+              <a:t>indirectly</a:t>
             </a:r>
             <a:endParaRPr lang="en-US" sz="2800" dirty="0"/>
           </a:p>
@@ -31826,7 +33340,7 @@
         </p:nvSpPr>
         <p:spPr>
           <a:xfrm>
-            <a:off x="2938272" y="2258568"/>
+            <a:off x="2221992" y="2258568"/>
             <a:ext cx="1828800" cy="292608"/>
           </a:xfrm>
           <a:prstGeom prst="rect">
@@ -31860,7 +33374,7 @@
         </p:nvSpPr>
         <p:spPr>
           <a:xfrm>
-            <a:off x="2938272" y="2258568"/>
+            <a:off x="2221992" y="2258568"/>
             <a:ext cx="1828800" cy="292608"/>
           </a:xfrm>
           <a:prstGeom prst="rect">
@@ -31899,7 +33413,7 @@
         </p:nvSpPr>
         <p:spPr>
           <a:xfrm>
-            <a:off x="2938272" y="2569464"/>
+            <a:off x="2221992" y="2569464"/>
             <a:ext cx="1828800" cy="201168"/>
           </a:xfrm>
           <a:prstGeom prst="rect">
@@ -31924,7 +33438,7 @@
                 <a:ea typeface="Calibri" pitchFamily="34" charset="-122"/>
                 <a:cs typeface="Calibri" pitchFamily="34" charset="-120"/>
               </a:rPr>
-              <a:t>not</a:t>
+              <a:t>not or without</a:t>
             </a:r>
             <a:endParaRPr lang="en-US" sz="850" dirty="0"/>
           </a:p>
@@ -31938,7 +33452,7 @@
         </p:nvSpPr>
         <p:spPr>
           <a:xfrm>
-            <a:off x="5803392" y="2258568"/>
+            <a:off x="4370832" y="2258568"/>
             <a:ext cx="1828800" cy="292608"/>
           </a:xfrm>
           <a:prstGeom prst="rect">
@@ -31972,7 +33486,7 @@
         </p:nvSpPr>
         <p:spPr>
           <a:xfrm>
-            <a:off x="5803392" y="2258568"/>
+            <a:off x="4370832" y="2258568"/>
             <a:ext cx="1828800" cy="292608"/>
           </a:xfrm>
           <a:prstGeom prst="rect">
@@ -32011,7 +33525,7 @@
         </p:nvSpPr>
         <p:spPr>
           <a:xfrm>
-            <a:off x="5803392" y="2569464"/>
+            <a:off x="4370832" y="2569464"/>
             <a:ext cx="1828800" cy="201168"/>
           </a:xfrm>
           <a:prstGeom prst="rect">
@@ -32036,7 +33550,7 @@
                 <a:ea typeface="Calibri" pitchFamily="34" charset="-122"/>
                 <a:cs typeface="Calibri" pitchFamily="34" charset="-120"/>
               </a:rPr>
-              <a:t>to guide or go straight</a:t>
+              <a:t>to guide or lead straight</a:t>
             </a:r>
             <a:endParaRPr lang="en-US" sz="850" dirty="0"/>
           </a:p>
@@ -32045,6 +33559,118 @@
       <p:sp>
         <p:nvSpPr>
           <p:cNvPr id="22" name="Shape 20"/>
+          <p:cNvSpPr/>
+          <p:nvPr/>
+        </p:nvSpPr>
+        <p:spPr>
+          <a:xfrm>
+            <a:off x="6519672" y="2258568"/>
+            <a:ext cx="1828800" cy="292608"/>
+          </a:xfrm>
+          <a:prstGeom prst="rect">
+            <a:avLst>
+              <a:gd name="adj" fmla="val 25000"/>
+            </a:avLst>
+          </a:prstGeom>
+          <a:solidFill>
+            <a:srgbClr val="FCE7F3"/>
+          </a:solidFill>
+          <a:ln w="19050">
+            <a:solidFill>
+              <a:srgbClr val="DB2777"/>
+            </a:solidFill>
+            <a:prstDash val="solid"/>
+          </a:ln>
+          <a:effectLst>
+            <a:outerShdw sx="100000" sy="100000" kx="0" ky="0" algn="bl" rotWithShape="0" blurRad="101600" dist="38100" dir="8100000">
+              <a:srgbClr val="000000">
+                <a:alpha val="12000"/>
+              </a:srgbClr>
+            </a:outerShdw>
+          </a:effectLst>
+        </p:spPr>
+      </p:sp>
+      <p:sp>
+        <p:nvSpPr>
+          <p:cNvPr id="23" name="Text 21"/>
+          <p:cNvSpPr/>
+          <p:nvPr/>
+        </p:nvSpPr>
+        <p:spPr>
+          <a:xfrm>
+            <a:off x="6519672" y="2258568"/>
+            <a:ext cx="1828800" cy="292608"/>
+          </a:xfrm>
+          <a:prstGeom prst="rect">
+            <a:avLst/>
+          </a:prstGeom>
+          <a:noFill/>
+          <a:ln/>
+        </p:spPr>
+        <p:txBody>
+          <a:bodyPr wrap="square" lIns="0" tIns="0" rIns="0" bIns="0" rtlCol="0" anchor="ctr"/>
+          <a:lstStyle/>
+          <a:p>
+            <a:pPr algn="ctr" indent="0" marL="0">
+              <a:buNone/>
+            </a:pPr>
+            <a:r>
+              <a:rPr lang="en-US" sz="1300" b="1" dirty="0">
+                <a:solidFill>
+                  <a:srgbClr val="9D174D"/>
+                </a:solidFill>
+                <a:latin typeface="Trebuchet MS" pitchFamily="34" charset="0"/>
+                <a:ea typeface="Trebuchet MS" pitchFamily="34" charset="-122"/>
+                <a:cs typeface="Trebuchet MS" pitchFamily="34" charset="-120"/>
+              </a:rPr>
+              <a:t>ly</a:t>
+            </a:r>
+            <a:endParaRPr lang="en-US" sz="1300" dirty="0"/>
+          </a:p>
+        </p:txBody>
+      </p:sp>
+      <p:sp>
+        <p:nvSpPr>
+          <p:cNvPr id="24" name="Text 22"/>
+          <p:cNvSpPr/>
+          <p:nvPr/>
+        </p:nvSpPr>
+        <p:spPr>
+          <a:xfrm>
+            <a:off x="6519672" y="2569464"/>
+            <a:ext cx="1828800" cy="201168"/>
+          </a:xfrm>
+          <a:prstGeom prst="rect">
+            <a:avLst/>
+          </a:prstGeom>
+          <a:noFill/>
+          <a:ln/>
+        </p:spPr>
+        <p:txBody>
+          <a:bodyPr wrap="square" lIns="0" tIns="0" rIns="0" bIns="0" rtlCol="0" anchor="t"/>
+          <a:lstStyle/>
+          <a:p>
+            <a:pPr algn="ctr" indent="0" marL="0">
+              <a:buNone/>
+            </a:pPr>
+            <a:r>
+              <a:rPr lang="en-US" sz="850" dirty="0">
+                <a:solidFill>
+                  <a:srgbClr val="475569"/>
+                </a:solidFill>
+                <a:latin typeface="Calibri" pitchFamily="34" charset="0"/>
+                <a:ea typeface="Calibri" pitchFamily="34" charset="-122"/>
+                <a:cs typeface="Calibri" pitchFamily="34" charset="-120"/>
+              </a:rPr>
+              <a:t>in a certain way</a:t>
+            </a:r>
+            <a:endParaRPr lang="en-US" sz="850" dirty="0"/>
+          </a:p>
+        </p:txBody>
+      </p:sp>
+      <p:sp>
+        <p:nvSpPr>
+          <p:cNvPr id="25" name="Shape 23"/>
           <p:cNvSpPr/>
           <p:nvPr/>
         </p:nvSpPr>
@@ -32071,7 +33697,7 @@
       </p:sp>
       <p:sp>
         <p:nvSpPr>
-          <p:cNvPr id="23" name="Text 21"/>
+          <p:cNvPr id="26" name="Text 24"/>
           <p:cNvSpPr/>
           <p:nvPr/>
         </p:nvSpPr>
@@ -32110,7 +33736,7 @@
       </p:sp>
       <p:sp>
         <p:nvSpPr>
-          <p:cNvPr id="24" name="Shape 22"/>
+          <p:cNvPr id="27" name="Shape 25"/>
           <p:cNvSpPr/>
           <p:nvPr/>
         </p:nvSpPr>
@@ -32137,14 +33763,14 @@
       </p:sp>
       <p:sp>
         <p:nvSpPr>
-          <p:cNvPr id="25" name="Shape 23"/>
-          <p:cNvSpPr/>
-          <p:nvPr/>
-        </p:nvSpPr>
-        <p:spPr>
-          <a:xfrm>
-            <a:off x="2313432" y="3364992"/>
-            <a:ext cx="1645920" cy="475488"/>
+          <p:cNvPr id="28" name="Shape 26"/>
+          <p:cNvSpPr/>
+          <p:nvPr/>
+        </p:nvSpPr>
+        <p:spPr>
+          <a:xfrm>
+            <a:off x="1975104" y="3364992"/>
+            <a:ext cx="1554480" cy="475488"/>
           </a:xfrm>
           <a:prstGeom prst="rect">
             <a:avLst>
@@ -32164,14 +33790,14 @@
       </p:sp>
       <p:sp>
         <p:nvSpPr>
-          <p:cNvPr id="26" name="Text 24"/>
-          <p:cNvSpPr/>
-          <p:nvPr/>
-        </p:nvSpPr>
-        <p:spPr>
-          <a:xfrm>
-            <a:off x="2313432" y="3364992"/>
-            <a:ext cx="1645920" cy="475488"/>
+          <p:cNvPr id="29" name="Text 27"/>
+          <p:cNvSpPr/>
+          <p:nvPr/>
+        </p:nvSpPr>
+        <p:spPr>
+          <a:xfrm>
+            <a:off x="1975104" y="3364992"/>
+            <a:ext cx="1554480" cy="475488"/>
           </a:xfrm>
           <a:prstGeom prst="rect">
             <a:avLst/>
@@ -32203,14 +33829,14 @@
       </p:sp>
       <p:sp>
         <p:nvSpPr>
-          <p:cNvPr id="27" name="Text 25"/>
-          <p:cNvSpPr/>
-          <p:nvPr/>
-        </p:nvSpPr>
-        <p:spPr>
-          <a:xfrm>
-            <a:off x="3959352" y="3364992"/>
-            <a:ext cx="411480" cy="475488"/>
+          <p:cNvPr id="30" name="Text 28"/>
+          <p:cNvSpPr/>
+          <p:nvPr/>
+        </p:nvSpPr>
+        <p:spPr>
+          <a:xfrm>
+            <a:off x="3529584" y="3364992"/>
+            <a:ext cx="73152" cy="475488"/>
           </a:xfrm>
           <a:prstGeom prst="rect">
             <a:avLst/>
@@ -32242,14 +33868,14 @@
       </p:sp>
       <p:sp>
         <p:nvSpPr>
-          <p:cNvPr id="28" name="Shape 26"/>
-          <p:cNvSpPr/>
-          <p:nvPr/>
-        </p:nvSpPr>
-        <p:spPr>
-          <a:xfrm>
-            <a:off x="4370832" y="3364992"/>
-            <a:ext cx="1645920" cy="475488"/>
+          <p:cNvPr id="31" name="Shape 29"/>
+          <p:cNvSpPr/>
+          <p:nvPr/>
+        </p:nvSpPr>
+        <p:spPr>
+          <a:xfrm>
+            <a:off x="3602736" y="3364992"/>
+            <a:ext cx="1554480" cy="475488"/>
           </a:xfrm>
           <a:prstGeom prst="rect">
             <a:avLst>
@@ -32269,14 +33895,14 @@
       </p:sp>
       <p:sp>
         <p:nvSpPr>
-          <p:cNvPr id="29" name="Text 27"/>
-          <p:cNvSpPr/>
-          <p:nvPr/>
-        </p:nvSpPr>
-        <p:spPr>
-          <a:xfrm>
-            <a:off x="4370832" y="3364992"/>
-            <a:ext cx="1645920" cy="475488"/>
+          <p:cNvPr id="32" name="Text 30"/>
+          <p:cNvSpPr/>
+          <p:nvPr/>
+        </p:nvSpPr>
+        <p:spPr>
+          <a:xfrm>
+            <a:off x="3602736" y="3364992"/>
+            <a:ext cx="1554480" cy="475488"/>
           </a:xfrm>
           <a:prstGeom prst="rect">
             <a:avLst/>
@@ -32308,14 +33934,14 @@
       </p:sp>
       <p:sp>
         <p:nvSpPr>
-          <p:cNvPr id="30" name="Text 28"/>
-          <p:cNvSpPr/>
-          <p:nvPr/>
-        </p:nvSpPr>
-        <p:spPr>
-          <a:xfrm>
-            <a:off x="6016752" y="3364992"/>
-            <a:ext cx="411480" cy="475488"/>
+          <p:cNvPr id="33" name="Text 31"/>
+          <p:cNvSpPr/>
+          <p:nvPr/>
+        </p:nvSpPr>
+        <p:spPr>
+          <a:xfrm>
+            <a:off x="5157216" y="3364992"/>
+            <a:ext cx="73152" cy="475488"/>
           </a:xfrm>
           <a:prstGeom prst="rect">
             <a:avLst/>
@@ -32347,14 +33973,14 @@
       </p:sp>
       <p:sp>
         <p:nvSpPr>
-          <p:cNvPr id="31" name="Shape 29"/>
-          <p:cNvSpPr/>
-          <p:nvPr/>
-        </p:nvSpPr>
-        <p:spPr>
-          <a:xfrm>
-            <a:off x="6428232" y="3364992"/>
-            <a:ext cx="1645920" cy="475488"/>
+          <p:cNvPr id="34" name="Shape 32"/>
+          <p:cNvSpPr/>
+          <p:nvPr/>
+        </p:nvSpPr>
+        <p:spPr>
+          <a:xfrm>
+            <a:off x="5230368" y="3364992"/>
+            <a:ext cx="1554480" cy="475488"/>
           </a:xfrm>
           <a:prstGeom prst="rect">
             <a:avLst>
@@ -32374,14 +34000,14 @@
       </p:sp>
       <p:sp>
         <p:nvSpPr>
-          <p:cNvPr id="32" name="Text 30"/>
-          <p:cNvSpPr/>
-          <p:nvPr/>
-        </p:nvSpPr>
-        <p:spPr>
-          <a:xfrm>
-            <a:off x="6428232" y="3364992"/>
-            <a:ext cx="1645920" cy="475488"/>
+          <p:cNvPr id="35" name="Text 33"/>
+          <p:cNvSpPr/>
+          <p:nvPr/>
+        </p:nvSpPr>
+        <p:spPr>
+          <a:xfrm>
+            <a:off x="5230368" y="3364992"/>
+            <a:ext cx="1554480" cy="475488"/>
           </a:xfrm>
           <a:prstGeom prst="rect">
             <a:avLst/>
@@ -32413,7 +34039,112 @@
       </p:sp>
       <p:sp>
         <p:nvSpPr>
-          <p:cNvPr id="33" name="Shape 31"/>
+          <p:cNvPr id="36" name="Text 34"/>
+          <p:cNvSpPr/>
+          <p:nvPr/>
+        </p:nvSpPr>
+        <p:spPr>
+          <a:xfrm>
+            <a:off x="6784848" y="3364992"/>
+            <a:ext cx="73152" cy="475488"/>
+          </a:xfrm>
+          <a:prstGeom prst="rect">
+            <a:avLst/>
+          </a:prstGeom>
+          <a:noFill/>
+          <a:ln/>
+        </p:spPr>
+        <p:txBody>
+          <a:bodyPr wrap="square" lIns="0" tIns="0" rIns="0" bIns="0" rtlCol="0" anchor="ctr"/>
+          <a:lstStyle/>
+          <a:p>
+            <a:pPr algn="ctr" indent="0" marL="0">
+              <a:buNone/>
+            </a:pPr>
+            <a:r>
+              <a:rPr lang="en-US" sz="1600" b="1" dirty="0">
+                <a:solidFill>
+                  <a:srgbClr val="0D9488"/>
+                </a:solidFill>
+                <a:latin typeface="Trebuchet MS" pitchFamily="34" charset="0"/>
+                <a:ea typeface="Trebuchet MS" pitchFamily="34" charset="-122"/>
+                <a:cs typeface="Trebuchet MS" pitchFamily="34" charset="-120"/>
+              </a:rPr>
+              <a:t>·</a:t>
+            </a:r>
+            <a:endParaRPr lang="en-US" sz="1600" dirty="0"/>
+          </a:p>
+        </p:txBody>
+      </p:sp>
+      <p:sp>
+        <p:nvSpPr>
+          <p:cNvPr id="37" name="Shape 35"/>
+          <p:cNvSpPr/>
+          <p:nvPr/>
+        </p:nvSpPr>
+        <p:spPr>
+          <a:xfrm>
+            <a:off x="6858000" y="3364992"/>
+            <a:ext cx="1554480" cy="475488"/>
+          </a:xfrm>
+          <a:prstGeom prst="rect">
+            <a:avLst>
+              <a:gd name="adj" fmla="val 9615"/>
+            </a:avLst>
+          </a:prstGeom>
+          <a:solidFill>
+            <a:srgbClr val="FFFFFF"/>
+          </a:solidFill>
+          <a:ln w="12700">
+            <a:solidFill>
+              <a:srgbClr val="0D9488"/>
+            </a:solidFill>
+            <a:prstDash val="solid"/>
+          </a:ln>
+        </p:spPr>
+      </p:sp>
+      <p:sp>
+        <p:nvSpPr>
+          <p:cNvPr id="38" name="Text 36"/>
+          <p:cNvSpPr/>
+          <p:nvPr/>
+        </p:nvSpPr>
+        <p:spPr>
+          <a:xfrm>
+            <a:off x="6858000" y="3364992"/>
+            <a:ext cx="1554480" cy="475488"/>
+          </a:xfrm>
+          <a:prstGeom prst="rect">
+            <a:avLst/>
+          </a:prstGeom>
+          <a:noFill/>
+          <a:ln/>
+        </p:spPr>
+        <p:txBody>
+          <a:bodyPr wrap="square" lIns="0" tIns="0" rIns="0" bIns="0" rtlCol="0" anchor="ctr"/>
+          <a:lstStyle/>
+          <a:p>
+            <a:pPr algn="ctr" indent="0" marL="0">
+              <a:buNone/>
+            </a:pPr>
+            <a:r>
+              <a:rPr lang="en-US" sz="1400" b="1" dirty="0">
+                <a:solidFill>
+                  <a:srgbClr val="0D9488"/>
+                </a:solidFill>
+                <a:latin typeface="Trebuchet MS" pitchFamily="34" charset="0"/>
+                <a:ea typeface="Trebuchet MS" pitchFamily="34" charset="-122"/>
+                <a:cs typeface="Trebuchet MS" pitchFamily="34" charset="-120"/>
+              </a:rPr>
+              <a:t>ly</a:t>
+            </a:r>
+            <a:endParaRPr lang="en-US" sz="1400" dirty="0"/>
+          </a:p>
+        </p:txBody>
+      </p:sp>
+      <p:sp>
+        <p:nvSpPr>
+          <p:cNvPr id="39" name="Shape 37"/>
           <p:cNvSpPr/>
           <p:nvPr/>
         </p:nvSpPr>
@@ -32440,7 +34171,7 @@
       </p:sp>
       <p:sp>
         <p:nvSpPr>
-          <p:cNvPr id="34" name="Text 32"/>
+          <p:cNvPr id="40" name="Text 38"/>
           <p:cNvSpPr/>
           <p:nvPr/>
         </p:nvSpPr>
@@ -32479,7 +34210,7 @@
       </p:sp>
       <p:sp>
         <p:nvSpPr>
-          <p:cNvPr id="35" name="Shape 33"/>
+          <p:cNvPr id="41" name="Shape 39"/>
           <p:cNvSpPr/>
           <p:nvPr/>
         </p:nvSpPr>
@@ -32506,14 +34237,14 @@
       </p:sp>
       <p:sp>
         <p:nvSpPr>
-          <p:cNvPr id="36" name="Shape 34"/>
-          <p:cNvSpPr/>
-          <p:nvPr/>
-        </p:nvSpPr>
-        <p:spPr>
-          <a:xfrm>
-            <a:off x="2023872" y="4169664"/>
-            <a:ext cx="685800" cy="384048"/>
+          <p:cNvPr id="42" name="Shape 40"/>
+          <p:cNvSpPr/>
+          <p:nvPr/>
+        </p:nvSpPr>
+        <p:spPr>
+          <a:xfrm>
+            <a:off x="1951828" y="4169664"/>
+            <a:ext cx="603504" cy="384048"/>
           </a:xfrm>
           <a:prstGeom prst="rect">
             <a:avLst>
@@ -32533,14 +34264,14 @@
       </p:sp>
       <p:sp>
         <p:nvSpPr>
-          <p:cNvPr id="37" name="Text 35"/>
-          <p:cNvSpPr/>
-          <p:nvPr/>
-        </p:nvSpPr>
-        <p:spPr>
-          <a:xfrm>
-            <a:off x="2023872" y="4169664"/>
-            <a:ext cx="685800" cy="384048"/>
+          <p:cNvPr id="43" name="Text 41"/>
+          <p:cNvSpPr/>
+          <p:nvPr/>
+        </p:nvSpPr>
+        <p:spPr>
+          <a:xfrm>
+            <a:off x="1951828" y="4169664"/>
+            <a:ext cx="603504" cy="384048"/>
           </a:xfrm>
           <a:prstGeom prst="rect">
             <a:avLst/>
@@ -32572,14 +34303,14 @@
       </p:sp>
       <p:sp>
         <p:nvSpPr>
-          <p:cNvPr id="38" name="Shape 36"/>
-          <p:cNvSpPr/>
-          <p:nvPr/>
-        </p:nvSpPr>
-        <p:spPr>
-          <a:xfrm>
-            <a:off x="2831592" y="4169664"/>
-            <a:ext cx="685800" cy="384048"/>
+          <p:cNvPr id="44" name="Shape 42"/>
+          <p:cNvSpPr/>
+          <p:nvPr/>
+        </p:nvSpPr>
+        <p:spPr>
+          <a:xfrm>
+            <a:off x="2605209" y="4169664"/>
+            <a:ext cx="603504" cy="384048"/>
           </a:xfrm>
           <a:prstGeom prst="rect">
             <a:avLst>
@@ -32599,14 +34330,14 @@
       </p:sp>
       <p:sp>
         <p:nvSpPr>
-          <p:cNvPr id="39" name="Text 37"/>
-          <p:cNvSpPr/>
-          <p:nvPr/>
-        </p:nvSpPr>
-        <p:spPr>
-          <a:xfrm>
-            <a:off x="2831592" y="4169664"/>
-            <a:ext cx="685800" cy="384048"/>
+          <p:cNvPr id="45" name="Text 43"/>
+          <p:cNvSpPr/>
+          <p:nvPr/>
+        </p:nvSpPr>
+        <p:spPr>
+          <a:xfrm>
+            <a:off x="2605209" y="4169664"/>
+            <a:ext cx="603504" cy="384048"/>
           </a:xfrm>
           <a:prstGeom prst="rect">
             <a:avLst/>
@@ -32638,14 +34369,14 @@
       </p:sp>
       <p:sp>
         <p:nvSpPr>
-          <p:cNvPr id="40" name="Shape 38"/>
-          <p:cNvSpPr/>
-          <p:nvPr/>
-        </p:nvSpPr>
-        <p:spPr>
-          <a:xfrm>
-            <a:off x="3639312" y="4169664"/>
-            <a:ext cx="685800" cy="384048"/>
+          <p:cNvPr id="46" name="Shape 44"/>
+          <p:cNvSpPr/>
+          <p:nvPr/>
+        </p:nvSpPr>
+        <p:spPr>
+          <a:xfrm>
+            <a:off x="3258589" y="4169664"/>
+            <a:ext cx="603504" cy="384048"/>
           </a:xfrm>
           <a:prstGeom prst="rect">
             <a:avLst>
@@ -32665,14 +34396,14 @@
       </p:sp>
       <p:sp>
         <p:nvSpPr>
-          <p:cNvPr id="41" name="Text 39"/>
-          <p:cNvSpPr/>
-          <p:nvPr/>
-        </p:nvSpPr>
-        <p:spPr>
-          <a:xfrm>
-            <a:off x="3639312" y="4169664"/>
-            <a:ext cx="685800" cy="384048"/>
+          <p:cNvPr id="47" name="Text 45"/>
+          <p:cNvSpPr/>
+          <p:nvPr/>
+        </p:nvSpPr>
+        <p:spPr>
+          <a:xfrm>
+            <a:off x="3258589" y="4169664"/>
+            <a:ext cx="603504" cy="384048"/>
           </a:xfrm>
           <a:prstGeom prst="rect">
             <a:avLst/>
@@ -32704,14 +34435,14 @@
       </p:sp>
       <p:sp>
         <p:nvSpPr>
-          <p:cNvPr id="42" name="Shape 40"/>
-          <p:cNvSpPr/>
-          <p:nvPr/>
-        </p:nvSpPr>
-        <p:spPr>
-          <a:xfrm>
-            <a:off x="4447032" y="4169664"/>
-            <a:ext cx="685800" cy="384048"/>
+          <p:cNvPr id="48" name="Shape 46"/>
+          <p:cNvSpPr/>
+          <p:nvPr/>
+        </p:nvSpPr>
+        <p:spPr>
+          <a:xfrm>
+            <a:off x="3911969" y="4169664"/>
+            <a:ext cx="603504" cy="384048"/>
           </a:xfrm>
           <a:prstGeom prst="rect">
             <a:avLst>
@@ -32731,14 +34462,14 @@
       </p:sp>
       <p:sp>
         <p:nvSpPr>
-          <p:cNvPr id="43" name="Text 41"/>
-          <p:cNvSpPr/>
-          <p:nvPr/>
-        </p:nvSpPr>
-        <p:spPr>
-          <a:xfrm>
-            <a:off x="4447032" y="4169664"/>
-            <a:ext cx="685800" cy="384048"/>
+          <p:cNvPr id="49" name="Text 47"/>
+          <p:cNvSpPr/>
+          <p:nvPr/>
+        </p:nvSpPr>
+        <p:spPr>
+          <a:xfrm>
+            <a:off x="3911969" y="4169664"/>
+            <a:ext cx="603504" cy="384048"/>
           </a:xfrm>
           <a:prstGeom prst="rect">
             <a:avLst/>
@@ -32770,14 +34501,14 @@
       </p:sp>
       <p:sp>
         <p:nvSpPr>
-          <p:cNvPr id="44" name="Shape 42"/>
-          <p:cNvSpPr/>
-          <p:nvPr/>
-        </p:nvSpPr>
-        <p:spPr>
-          <a:xfrm>
-            <a:off x="5254752" y="4169664"/>
-            <a:ext cx="685800" cy="384048"/>
+          <p:cNvPr id="50" name="Shape 48"/>
+          <p:cNvSpPr/>
+          <p:nvPr/>
+        </p:nvSpPr>
+        <p:spPr>
+          <a:xfrm>
+            <a:off x="4565350" y="4169664"/>
+            <a:ext cx="603504" cy="384048"/>
           </a:xfrm>
           <a:prstGeom prst="rect">
             <a:avLst>
@@ -32797,14 +34528,14 @@
       </p:sp>
       <p:sp>
         <p:nvSpPr>
-          <p:cNvPr id="45" name="Text 43"/>
-          <p:cNvSpPr/>
-          <p:nvPr/>
-        </p:nvSpPr>
-        <p:spPr>
-          <a:xfrm>
-            <a:off x="5254752" y="4169664"/>
-            <a:ext cx="685800" cy="384048"/>
+          <p:cNvPr id="51" name="Text 49"/>
+          <p:cNvSpPr/>
+          <p:nvPr/>
+        </p:nvSpPr>
+        <p:spPr>
+          <a:xfrm>
+            <a:off x="4565350" y="4169664"/>
+            <a:ext cx="603504" cy="384048"/>
           </a:xfrm>
           <a:prstGeom prst="rect">
             <a:avLst/>
@@ -32836,14 +34567,14 @@
       </p:sp>
       <p:sp>
         <p:nvSpPr>
-          <p:cNvPr id="46" name="Shape 44"/>
-          <p:cNvSpPr/>
-          <p:nvPr/>
-        </p:nvSpPr>
-        <p:spPr>
-          <a:xfrm>
-            <a:off x="6062472" y="4169664"/>
-            <a:ext cx="685800" cy="384048"/>
+          <p:cNvPr id="52" name="Shape 50"/>
+          <p:cNvSpPr/>
+          <p:nvPr/>
+        </p:nvSpPr>
+        <p:spPr>
+          <a:xfrm>
+            <a:off x="5218730" y="4169664"/>
+            <a:ext cx="603504" cy="384048"/>
           </a:xfrm>
           <a:prstGeom prst="rect">
             <a:avLst>
@@ -32863,14 +34594,14 @@
       </p:sp>
       <p:sp>
         <p:nvSpPr>
-          <p:cNvPr id="47" name="Text 45"/>
-          <p:cNvSpPr/>
-          <p:nvPr/>
-        </p:nvSpPr>
-        <p:spPr>
-          <a:xfrm>
-            <a:off x="6062472" y="4169664"/>
-            <a:ext cx="685800" cy="384048"/>
+          <p:cNvPr id="53" name="Text 51"/>
+          <p:cNvSpPr/>
+          <p:nvPr/>
+        </p:nvSpPr>
+        <p:spPr>
+          <a:xfrm>
+            <a:off x="5218730" y="4169664"/>
+            <a:ext cx="603504" cy="384048"/>
           </a:xfrm>
           <a:prstGeom prst="rect">
             <a:avLst/>
@@ -32902,14 +34633,14 @@
       </p:sp>
       <p:sp>
         <p:nvSpPr>
-          <p:cNvPr id="48" name="Shape 46"/>
-          <p:cNvSpPr/>
-          <p:nvPr/>
-        </p:nvSpPr>
-        <p:spPr>
-          <a:xfrm>
-            <a:off x="6870192" y="4169664"/>
-            <a:ext cx="685800" cy="384048"/>
+          <p:cNvPr id="54" name="Shape 52"/>
+          <p:cNvSpPr/>
+          <p:nvPr/>
+        </p:nvSpPr>
+        <p:spPr>
+          <a:xfrm>
+            <a:off x="5872111" y="4169664"/>
+            <a:ext cx="603504" cy="384048"/>
           </a:xfrm>
           <a:prstGeom prst="rect">
             <a:avLst>
@@ -32929,14 +34660,14 @@
       </p:sp>
       <p:sp>
         <p:nvSpPr>
-          <p:cNvPr id="49" name="Text 47"/>
-          <p:cNvSpPr/>
-          <p:nvPr/>
-        </p:nvSpPr>
-        <p:spPr>
-          <a:xfrm>
-            <a:off x="6870192" y="4169664"/>
-            <a:ext cx="685800" cy="384048"/>
+          <p:cNvPr id="55" name="Text 53"/>
+          <p:cNvSpPr/>
+          <p:nvPr/>
+        </p:nvSpPr>
+        <p:spPr>
+          <a:xfrm>
+            <a:off x="5872111" y="4169664"/>
+            <a:ext cx="603504" cy="384048"/>
           </a:xfrm>
           <a:prstGeom prst="rect">
             <a:avLst/>
@@ -32968,14 +34699,14 @@
       </p:sp>
       <p:sp>
         <p:nvSpPr>
-          <p:cNvPr id="50" name="Text 48"/>
-          <p:cNvSpPr/>
-          <p:nvPr/>
-        </p:nvSpPr>
-        <p:spPr>
-          <a:xfrm>
-            <a:off x="6870192" y="4572000"/>
-            <a:ext cx="685800" cy="219456"/>
+          <p:cNvPr id="56" name="Text 54"/>
+          <p:cNvSpPr/>
+          <p:nvPr/>
+        </p:nvSpPr>
+        <p:spPr>
+          <a:xfrm>
+            <a:off x="5872111" y="4572000"/>
+            <a:ext cx="603504" cy="219456"/>
           </a:xfrm>
           <a:prstGeom prst="rect">
             <a:avLst/>
@@ -33007,14 +34738,14 @@
       </p:sp>
       <p:sp>
         <p:nvSpPr>
-          <p:cNvPr id="51" name="Shape 49"/>
-          <p:cNvSpPr/>
-          <p:nvPr/>
-        </p:nvSpPr>
-        <p:spPr>
-          <a:xfrm>
-            <a:off x="7677912" y="4169664"/>
-            <a:ext cx="685800" cy="384048"/>
+          <p:cNvPr id="57" name="Shape 55"/>
+          <p:cNvSpPr/>
+          <p:nvPr/>
+        </p:nvSpPr>
+        <p:spPr>
+          <a:xfrm>
+            <a:off x="6525491" y="4169664"/>
+            <a:ext cx="603504" cy="384048"/>
           </a:xfrm>
           <a:prstGeom prst="rect">
             <a:avLst>
@@ -33034,14 +34765,14 @@
       </p:sp>
       <p:sp>
         <p:nvSpPr>
-          <p:cNvPr id="52" name="Text 50"/>
-          <p:cNvSpPr/>
-          <p:nvPr/>
-        </p:nvSpPr>
-        <p:spPr>
-          <a:xfrm>
-            <a:off x="7677912" y="4169664"/>
-            <a:ext cx="685800" cy="384048"/>
+          <p:cNvPr id="58" name="Text 56"/>
+          <p:cNvSpPr/>
+          <p:nvPr/>
+        </p:nvSpPr>
+        <p:spPr>
+          <a:xfrm>
+            <a:off x="6525491" y="4169664"/>
+            <a:ext cx="603504" cy="384048"/>
           </a:xfrm>
           <a:prstGeom prst="rect">
             <a:avLst/>
@@ -33066,6 +34797,138 @@
                 <a:cs typeface="Trebuchet MS" pitchFamily="34" charset="-120"/>
               </a:rPr>
               <a:t>t</a:t>
+            </a:r>
+            <a:endParaRPr lang="en-US" sz="900" dirty="0"/>
+          </a:p>
+        </p:txBody>
+      </p:sp>
+      <p:sp>
+        <p:nvSpPr>
+          <p:cNvPr id="59" name="Shape 57"/>
+          <p:cNvSpPr/>
+          <p:nvPr/>
+        </p:nvSpPr>
+        <p:spPr>
+          <a:xfrm>
+            <a:off x="7178871" y="4169664"/>
+            <a:ext cx="603504" cy="384048"/>
+          </a:xfrm>
+          <a:prstGeom prst="rect">
+            <a:avLst>
+              <a:gd name="adj" fmla="val 9524"/>
+            </a:avLst>
+          </a:prstGeom>
+          <a:solidFill>
+            <a:srgbClr val="FFFFFF"/>
+          </a:solidFill>
+          <a:ln w="12700">
+            <a:solidFill>
+              <a:srgbClr val="DB2777"/>
+            </a:solidFill>
+            <a:prstDash val="solid"/>
+          </a:ln>
+        </p:spPr>
+      </p:sp>
+      <p:sp>
+        <p:nvSpPr>
+          <p:cNvPr id="60" name="Text 58"/>
+          <p:cNvSpPr/>
+          <p:nvPr/>
+        </p:nvSpPr>
+        <p:spPr>
+          <a:xfrm>
+            <a:off x="7178871" y="4169664"/>
+            <a:ext cx="603504" cy="384048"/>
+          </a:xfrm>
+          <a:prstGeom prst="rect">
+            <a:avLst/>
+          </a:prstGeom>
+          <a:noFill/>
+          <a:ln/>
+        </p:spPr>
+        <p:txBody>
+          <a:bodyPr wrap="square" lIns="0" tIns="0" rIns="0" bIns="0" rtlCol="0" anchor="ctr"/>
+          <a:lstStyle/>
+          <a:p>
+            <a:pPr algn="ctr" indent="0" marL="0">
+              <a:buNone/>
+            </a:pPr>
+            <a:r>
+              <a:rPr lang="en-US" sz="900" b="1" dirty="0">
+                <a:solidFill>
+                  <a:srgbClr val="9D174D"/>
+                </a:solidFill>
+                <a:latin typeface="Trebuchet MS" pitchFamily="34" charset="0"/>
+                <a:ea typeface="Trebuchet MS" pitchFamily="34" charset="-122"/>
+                <a:cs typeface="Trebuchet MS" pitchFamily="34" charset="-120"/>
+              </a:rPr>
+              <a:t>l</a:t>
+            </a:r>
+            <a:endParaRPr lang="en-US" sz="900" dirty="0"/>
+          </a:p>
+        </p:txBody>
+      </p:sp>
+      <p:sp>
+        <p:nvSpPr>
+          <p:cNvPr id="61" name="Shape 59"/>
+          <p:cNvSpPr/>
+          <p:nvPr/>
+        </p:nvSpPr>
+        <p:spPr>
+          <a:xfrm>
+            <a:off x="7832252" y="4169664"/>
+            <a:ext cx="603504" cy="384048"/>
+          </a:xfrm>
+          <a:prstGeom prst="rect">
+            <a:avLst>
+              <a:gd name="adj" fmla="val 9524"/>
+            </a:avLst>
+          </a:prstGeom>
+          <a:solidFill>
+            <a:srgbClr val="FFFFFF"/>
+          </a:solidFill>
+          <a:ln w="12700">
+            <a:solidFill>
+              <a:srgbClr val="DB2777"/>
+            </a:solidFill>
+            <a:prstDash val="solid"/>
+          </a:ln>
+        </p:spPr>
+      </p:sp>
+      <p:sp>
+        <p:nvSpPr>
+          <p:cNvPr id="62" name="Text 60"/>
+          <p:cNvSpPr/>
+          <p:nvPr/>
+        </p:nvSpPr>
+        <p:spPr>
+          <a:xfrm>
+            <a:off x="7832252" y="4169664"/>
+            <a:ext cx="603504" cy="384048"/>
+          </a:xfrm>
+          <a:prstGeom prst="rect">
+            <a:avLst/>
+          </a:prstGeom>
+          <a:noFill/>
+          <a:ln/>
+        </p:spPr>
+        <p:txBody>
+          <a:bodyPr wrap="square" lIns="0" tIns="0" rIns="0" bIns="0" rtlCol="0" anchor="ctr"/>
+          <a:lstStyle/>
+          <a:p>
+            <a:pPr algn="ctr" indent="0" marL="0">
+              <a:buNone/>
+            </a:pPr>
+            <a:r>
+              <a:rPr lang="en-US" sz="900" b="1" dirty="0">
+                <a:solidFill>
+                  <a:srgbClr val="9D174D"/>
+                </a:solidFill>
+                <a:latin typeface="Trebuchet MS" pitchFamily="34" charset="0"/>
+                <a:ea typeface="Trebuchet MS" pitchFamily="34" charset="-122"/>
+                <a:cs typeface="Trebuchet MS" pitchFamily="34" charset="-120"/>
+              </a:rPr>
+              <a:t>y</a:t>
             </a:r>
             <a:endParaRPr lang="en-US" sz="900" dirty="0"/>
           </a:p>
@@ -33357,7 +35220,7 @@
                 <a:ea typeface="Calibri" pitchFamily="34" charset="-122"/>
                 <a:cs typeface="Calibri" pitchFamily="34" charset="-120"/>
               </a:rPr>
-              <a:t>Word Labs  •  wordlabs.app  •  Root: 'direct' = straight, guide, manage</a:t>
+              <a:t>Word Labs  •  wordlabs.app  •  Root: 'direct' = straight, guide, lead</a:t>
             </a:r>
             <a:endParaRPr lang="en-US" sz="800" dirty="0"/>
           </a:p>
@@ -34526,7 +36389,7 @@
                 <a:ea typeface="Calibri" pitchFamily="34" charset="-122"/>
                 <a:cs typeface="Calibri" pitchFamily="34" charset="-120"/>
               </a:rPr>
-              <a:t>Word Labs  •  wordlabs.app  •  Root: 'direct' = straight, guide, manage</a:t>
+              <a:t>Word Labs  •  wordlabs.app  •  Root: 'direct' = straight, guide, lead</a:t>
             </a:r>
             <a:endParaRPr lang="en-US" sz="800" dirty="0"/>
           </a:p>
@@ -35108,7 +36971,7 @@
                 <a:ea typeface="Trebuchet MS" pitchFamily="34" charset="-122"/>
                 <a:cs typeface="Trebuchet MS" pitchFamily="34" charset="-120"/>
               </a:rPr>
-              <a:t>-ly</a:t>
+              <a:t>-or</a:t>
             </a:r>
             <a:endParaRPr lang="en-US" sz="1300" dirty="0"/>
           </a:p>
@@ -35261,7 +37124,7 @@
                 <a:ea typeface="Trebuchet MS" pitchFamily="34" charset="-122"/>
                 <a:cs typeface="Trebuchet MS" pitchFamily="34" charset="-120"/>
               </a:rPr>
-              <a:t>-or</a:t>
+              <a:t>-ly</a:t>
             </a:r>
             <a:endParaRPr lang="en-US" sz="1300" dirty="0"/>
           </a:p>
@@ -35325,7 +37188,7 @@
                 <a:ea typeface="Trebuchet MS" pitchFamily="34" charset="-122"/>
                 <a:cs typeface="Trebuchet MS" pitchFamily="34" charset="-120"/>
               </a:rPr>
-              <a:t>bi-</a:t>
+              <a:t>un-</a:t>
             </a:r>
             <a:endParaRPr lang="en-US" sz="1300" dirty="0"/>
           </a:p>
@@ -35478,7 +37341,7 @@
                 <a:ea typeface="Trebuchet MS" pitchFamily="34" charset="-122"/>
                 <a:cs typeface="Trebuchet MS" pitchFamily="34" charset="-120"/>
               </a:rPr>
-              <a:t>un-</a:t>
+              <a:t>bi-</a:t>
             </a:r>
             <a:endParaRPr lang="en-US" sz="1300" dirty="0"/>
           </a:p>
@@ -35567,7 +37430,7 @@
                 <a:ea typeface="Trebuchet MS" pitchFamily="34" charset="-122"/>
                 <a:cs typeface="Trebuchet MS" pitchFamily="34" charset="-120"/>
               </a:rPr>
-              <a:t>-ional</a:t>
+              <a:t>-ory</a:t>
             </a:r>
             <a:endParaRPr lang="en-US" sz="1300" dirty="0"/>
           </a:p>
@@ -36134,7 +37997,7 @@
                 <a:ea typeface="Trebuchet MS" pitchFamily="34" charset="-122"/>
                 <a:cs typeface="Trebuchet MS" pitchFamily="34" charset="-120"/>
               </a:rPr>
-              <a:t>directional</a:t>
+              <a:t>directory</a:t>
             </a:r>
             <a:endParaRPr lang="en-US" sz="1200" dirty="0"/>
           </a:p>
@@ -36426,7 +38289,7 @@
                 <a:ea typeface="Calibri" pitchFamily="34" charset="-122"/>
                 <a:cs typeface="Calibri" pitchFamily="34" charset="-120"/>
               </a:rPr>
-              <a:t>Word Labs  •  wordlabs.app  •  Root: 'direct' = straight, guide, manage</a:t>
+              <a:t>Word Labs  •  wordlabs.app  •  Root: 'direct' = straight, guide, lead</a:t>
             </a:r>
             <a:endParaRPr lang="en-US" sz="800" dirty="0"/>
           </a:p>
@@ -36590,7 +38453,7 @@
                 <a:ea typeface="Calibri" pitchFamily="34" charset="-122"/>
                 <a:cs typeface="Calibri" pitchFamily="34" charset="-120"/>
               </a:rPr>
-              <a:t>The core part of a word carrying its basic meaning. For example, 'direct' means 'straight, guide, manage'.</a:t>
+              <a:t>The core part of a word carrying its basic meaning. For example, 'direct' means 'straight, guide, lead'.</a:t>
             </a:r>
             <a:endParaRPr lang="en-US" sz="1350" dirty="0"/>
           </a:p>
@@ -37210,7 +39073,7 @@
                 <a:ea typeface="Calibri" pitchFamily="34" charset="-122"/>
                 <a:cs typeface="Calibri" pitchFamily="34" charset="-120"/>
               </a:rPr>
-              <a:t>Word Labs  •  wordlabs.app  •  Root: 'direct' = straight, guide, manage</a:t>
+              <a:t>Word Labs  •  wordlabs.app  •  Root: 'direct' = straight, guide, lead</a:t>
             </a:r>
             <a:endParaRPr lang="en-US" sz="800" dirty="0"/>
           </a:p>
@@ -37322,7 +39185,7 @@
                 <a:ea typeface="Calibri" pitchFamily="34" charset="-122"/>
                 <a:cs typeface="Calibri" pitchFamily="34" charset="-120"/>
               </a:rPr>
-              <a:t>1.  The root 'direct' comes from Latin and means to guide or go straight.</a:t>
+              <a:t>1.  The prefix 're-' in 'redirect' means against or not.</a:t>
             </a:r>
             <a:endParaRPr lang="en-US" sz="1300" dirty="0"/>
           </a:p>
@@ -37345,11 +39208,11 @@
             </a:avLst>
           </a:prstGeom>
           <a:solidFill>
-            <a:srgbClr val="DCFCE7"/>
-          </a:solidFill>
-          <a:ln w="12700">
-            <a:solidFill>
-              <a:srgbClr val="16A34A"/>
+            <a:srgbClr val="FEE2E2"/>
+          </a:solidFill>
+          <a:ln w="12700">
+            <a:solidFill>
+              <a:srgbClr val="DC2626"/>
             </a:solidFill>
             <a:prstDash val="solid"/>
           </a:ln>
@@ -37382,13 +39245,13 @@
             <a:r>
               <a:rPr lang="en-US" sz="1100" b="1" dirty="0">
                 <a:solidFill>
-                  <a:srgbClr val="16A34A"/>
+                  <a:srgbClr val="DC2626"/>
                 </a:solidFill>
                 <a:latin typeface="Trebuchet MS" pitchFamily="34" charset="0"/>
                 <a:ea typeface="Trebuchet MS" pitchFamily="34" charset="-122"/>
                 <a:cs typeface="Trebuchet MS" pitchFamily="34" charset="-120"/>
               </a:rPr>
-              <a:t>TRUE</a:t>
+              <a:t>FALSE</a:t>
             </a:r>
             <a:endParaRPr lang="en-US" sz="1100" dirty="0"/>
           </a:p>
@@ -37461,7 +39324,7 @@
                 <a:ea typeface="Calibri" pitchFamily="34" charset="-122"/>
                 <a:cs typeface="Calibri" pitchFamily="34" charset="-120"/>
               </a:rPr>
-              <a:t>2.  The word 'indirect' means to go in the most direct and straight path possible.</a:t>
+              <a:t>2.  A director is a person who leads and guides others in their work.</a:t>
             </a:r>
             <a:endParaRPr lang="en-US" sz="1300" dirty="0"/>
           </a:p>
@@ -37484,11 +39347,11 @@
             </a:avLst>
           </a:prstGeom>
           <a:solidFill>
-            <a:srgbClr val="FEE2E2"/>
-          </a:solidFill>
-          <a:ln w="12700">
-            <a:solidFill>
-              <a:srgbClr val="DC2626"/>
+            <a:srgbClr val="DCFCE7"/>
+          </a:solidFill>
+          <a:ln w="12700">
+            <a:solidFill>
+              <a:srgbClr val="16A34A"/>
             </a:solidFill>
             <a:prstDash val="solid"/>
           </a:ln>
@@ -37521,13 +39384,13 @@
             <a:r>
               <a:rPr lang="en-US" sz="1100" b="1" dirty="0">
                 <a:solidFill>
-                  <a:srgbClr val="DC2626"/>
+                  <a:srgbClr val="16A34A"/>
                 </a:solidFill>
                 <a:latin typeface="Trebuchet MS" pitchFamily="34" charset="0"/>
                 <a:ea typeface="Trebuchet MS" pitchFamily="34" charset="-122"/>
                 <a:cs typeface="Trebuchet MS" pitchFamily="34" charset="-120"/>
               </a:rPr>
-              <a:t>FALSE</a:t>
+              <a:t>TRUE</a:t>
             </a:r>
             <a:endParaRPr lang="en-US" sz="1100" dirty="0"/>
           </a:p>
@@ -37600,7 +39463,7 @@
                 <a:ea typeface="Calibri" pitchFamily="34" charset="-122"/>
                 <a:cs typeface="Calibri" pitchFamily="34" charset="-120"/>
               </a:rPr>
-              <a:t>3.  A 'director' is a person who guides and manages others.</a:t>
+              <a:t>3.  The suffix '-ly' can be added to 'direct' to make the word 'directly'.</a:t>
             </a:r>
             <a:endParaRPr lang="en-US" sz="1300" dirty="0"/>
           </a:p>
@@ -37739,7 +39602,7 @@
                 <a:ea typeface="Calibri" pitchFamily="34" charset="-122"/>
                 <a:cs typeface="Calibri" pitchFamily="34" charset="-120"/>
               </a:rPr>
-              <a:t>4.  Adding the prefix 're-' to 'direct' makes the word 'redirect', meaning to send in a new direction.</a:t>
+              <a:t>4.  The word 'indirect' means going straight to something without any detours.</a:t>
             </a:r>
             <a:endParaRPr lang="en-US" sz="1300" dirty="0"/>
           </a:p>
@@ -37762,11 +39625,11 @@
             </a:avLst>
           </a:prstGeom>
           <a:solidFill>
-            <a:srgbClr val="DCFCE7"/>
-          </a:solidFill>
-          <a:ln w="12700">
-            <a:solidFill>
-              <a:srgbClr val="16A34A"/>
+            <a:srgbClr val="FEE2E2"/>
+          </a:solidFill>
+          <a:ln w="12700">
+            <a:solidFill>
+              <a:srgbClr val="DC2626"/>
             </a:solidFill>
             <a:prstDash val="solid"/>
           </a:ln>
@@ -37799,13 +39662,13 @@
             <a:r>
               <a:rPr lang="en-US" sz="1100" b="1" dirty="0">
                 <a:solidFill>
-                  <a:srgbClr val="16A34A"/>
+                  <a:srgbClr val="DC2626"/>
                 </a:solidFill>
                 <a:latin typeface="Trebuchet MS" pitchFamily="34" charset="0"/>
                 <a:ea typeface="Trebuchet MS" pitchFamily="34" charset="-122"/>
                 <a:cs typeface="Trebuchet MS" pitchFamily="34" charset="-120"/>
               </a:rPr>
-              <a:t>TRUE</a:t>
+              <a:t>FALSE</a:t>
             </a:r>
             <a:endParaRPr lang="en-US" sz="1100" dirty="0"/>
           </a:p>
@@ -37878,7 +39741,7 @@
                 <a:ea typeface="Calibri" pitchFamily="34" charset="-122"/>
                 <a:cs typeface="Calibri" pitchFamily="34" charset="-120"/>
               </a:rPr>
-              <a:t>5.  The suffix '-ly' in 'directly' changes the word to mean a person who directs.</a:t>
+              <a:t>5.  The root 'direct' comes from Latin and means to guide or lead straight.</a:t>
             </a:r>
             <a:endParaRPr lang="en-US" sz="1300" dirty="0"/>
           </a:p>
@@ -37901,11 +39764,11 @@
             </a:avLst>
           </a:prstGeom>
           <a:solidFill>
-            <a:srgbClr val="FEE2E2"/>
-          </a:solidFill>
-          <a:ln w="12700">
-            <a:solidFill>
-              <a:srgbClr val="DC2626"/>
+            <a:srgbClr val="DCFCE7"/>
+          </a:solidFill>
+          <a:ln w="12700">
+            <a:solidFill>
+              <a:srgbClr val="16A34A"/>
             </a:solidFill>
             <a:prstDash val="solid"/>
           </a:ln>
@@ -37938,13 +39801,13 @@
             <a:r>
               <a:rPr lang="en-US" sz="1100" b="1" dirty="0">
                 <a:solidFill>
-                  <a:srgbClr val="DC2626"/>
+                  <a:srgbClr val="16A34A"/>
                 </a:solidFill>
                 <a:latin typeface="Trebuchet MS" pitchFamily="34" charset="0"/>
                 <a:ea typeface="Trebuchet MS" pitchFamily="34" charset="-122"/>
                 <a:cs typeface="Trebuchet MS" pitchFamily="34" charset="-120"/>
               </a:rPr>
-              <a:t>FALSE</a:t>
+              <a:t>TRUE</a:t>
             </a:r>
             <a:endParaRPr lang="en-US" sz="1100" dirty="0"/>
           </a:p>
@@ -38236,7 +40099,7 @@
                 <a:ea typeface="Calibri" pitchFamily="34" charset="-122"/>
                 <a:cs typeface="Calibri" pitchFamily="34" charset="-120"/>
               </a:rPr>
-              <a:t>Word Labs  •  wordlabs.app  •  Root: 'direct' = straight, guide, manage</a:t>
+              <a:t>Word Labs  •  wordlabs.app  •  Root: 'direct' = straight, guide, lead</a:t>
             </a:r>
             <a:endParaRPr lang="en-US" sz="800" dirty="0"/>
           </a:p>
@@ -38373,7 +40236,7 @@
                 <a:ea typeface="Trebuchet MS" pitchFamily="34" charset="-122"/>
                 <a:cs typeface="Trebuchet MS" pitchFamily="34" charset="-120"/>
               </a:rPr>
-              <a:t>straight, guide, manage</a:t>
+              <a:t>straight, guide, lead</a:t>
             </a:r>
             <a:endParaRPr lang="en-US" sz="2000" dirty="0"/>
           </a:p>
@@ -39205,7 +41068,7 @@
                 <a:ea typeface="Calibri" pitchFamily="34" charset="-122"/>
                 <a:cs typeface="Calibri" pitchFamily="34" charset="-120"/>
               </a:rPr>
-              <a:t>Word Labs  •  wordlabs.app  •  Root: 'direct' = straight, guide, manage</a:t>
+              <a:t>Word Labs  •  wordlabs.app  •  Root: 'direct' = straight, guide, lead</a:t>
             </a:r>
             <a:endParaRPr lang="en-US" sz="800" dirty="0"/>
           </a:p>
@@ -39787,7 +41650,7 @@
                 <a:ea typeface="Trebuchet MS" pitchFamily="34" charset="-122"/>
                 <a:cs typeface="Trebuchet MS" pitchFamily="34" charset="-120"/>
               </a:rPr>
-              <a:t>-ly</a:t>
+              <a:t>-or</a:t>
             </a:r>
             <a:endParaRPr lang="en-US" sz="1300" dirty="0"/>
           </a:p>
@@ -39940,7 +41803,7 @@
                 <a:ea typeface="Trebuchet MS" pitchFamily="34" charset="-122"/>
                 <a:cs typeface="Trebuchet MS" pitchFamily="34" charset="-120"/>
               </a:rPr>
-              <a:t>-or</a:t>
+              <a:t>-ly</a:t>
             </a:r>
             <a:endParaRPr lang="en-US" sz="1300" dirty="0"/>
           </a:p>
@@ -40004,7 +41867,7 @@
                 <a:ea typeface="Trebuchet MS" pitchFamily="34" charset="-122"/>
                 <a:cs typeface="Trebuchet MS" pitchFamily="34" charset="-120"/>
               </a:rPr>
-              <a:t>bi-</a:t>
+              <a:t>un-</a:t>
             </a:r>
             <a:endParaRPr lang="en-US" sz="1300" dirty="0"/>
           </a:p>
@@ -40157,7 +42020,7 @@
                 <a:ea typeface="Trebuchet MS" pitchFamily="34" charset="-122"/>
                 <a:cs typeface="Trebuchet MS" pitchFamily="34" charset="-120"/>
               </a:rPr>
-              <a:t>un-</a:t>
+              <a:t>bi-</a:t>
             </a:r>
             <a:endParaRPr lang="en-US" sz="1300" dirty="0"/>
           </a:p>
@@ -40246,7 +42109,7 @@
                 <a:ea typeface="Trebuchet MS" pitchFamily="34" charset="-122"/>
                 <a:cs typeface="Trebuchet MS" pitchFamily="34" charset="-120"/>
               </a:rPr>
-              <a:t>-ional</a:t>
+              <a:t>-ory</a:t>
             </a:r>
             <a:endParaRPr lang="en-US" sz="1300" dirty="0"/>
           </a:p>
@@ -40979,7 +42842,7 @@
                 <a:ea typeface="Calibri" pitchFamily="34" charset="-122"/>
                 <a:cs typeface="Calibri" pitchFamily="34" charset="-120"/>
               </a:rPr>
-              <a:t>Word Labs  •  wordlabs.app  •  Root: 'direct' = straight, guide, manage</a:t>
+              <a:t>Word Labs  •  wordlabs.app  •  Root: 'direct' = straight, guide, lead</a:t>
             </a:r>
             <a:endParaRPr lang="en-US" sz="800" dirty="0"/>
           </a:p>
@@ -41157,7 +43020,7 @@
                 <a:ea typeface="Calibri" pitchFamily="34" charset="-122"/>
                 <a:cs typeface="Calibri" pitchFamily="34" charset="-120"/>
               </a:rPr>
-              <a:t>Not going the straight way; taking a longer path or not saying something clearly.</a:t>
+              <a:t>Not going straight to something; taking a longer or roundabout way.</a:t>
             </a:r>
             <a:endParaRPr lang="en-US" sz="1200" dirty="0"/>
           </a:p>
@@ -41435,7 +43298,7 @@
                 <a:ea typeface="Calibri" pitchFamily="34" charset="-122"/>
                 <a:cs typeface="Calibri" pitchFamily="34" charset="-120"/>
               </a:rPr>
-              <a:t>To guide someone or something towards a place or goal, or to do something in a straight, clear way.</a:t>
+              <a:t>To guide or lead someone straight to a place or to tell someone exactly what to do.</a:t>
             </a:r>
             <a:endParaRPr lang="en-US" sz="1200" dirty="0"/>
           </a:p>
@@ -41574,7 +43437,7 @@
                 <a:ea typeface="Calibri" pitchFamily="34" charset="-122"/>
                 <a:cs typeface="Calibri" pitchFamily="34" charset="-120"/>
               </a:rPr>
-              <a:t>To send or guide something in a new or different direction.</a:t>
+              <a:t>To send something or someone in a new or different direction.</a:t>
             </a:r>
             <a:endParaRPr lang="en-US" sz="1200" dirty="0"/>
           </a:p>
@@ -41713,7 +43576,7 @@
                 <a:ea typeface="Calibri" pitchFamily="34" charset="-122"/>
                 <a:cs typeface="Calibri" pitchFamily="34" charset="-120"/>
               </a:rPr>
-              <a:t>A person who is in charge of a film, a company, or a group of people.</a:t>
+              <a:t>A person who is in charge and leads others, like the director of a film or a school.</a:t>
             </a:r>
             <a:endParaRPr lang="en-US" sz="1200" dirty="0"/>
           </a:p>
@@ -41852,7 +43715,7 @@
                 <a:ea typeface="Calibri" pitchFamily="34" charset="-122"/>
                 <a:cs typeface="Calibri" pitchFamily="34" charset="-120"/>
               </a:rPr>
-              <a:t>Going straight to a place or person without stopping or turning.</a:t>
+              <a:t>Going straight to a place or doing something right away without stopping.</a:t>
             </a:r>
             <a:endParaRPr lang="en-US" sz="1200" dirty="0"/>
           </a:p>
@@ -41991,7 +43854,7 @@
                 <a:ea typeface="Calibri" pitchFamily="34" charset="-122"/>
                 <a:cs typeface="Calibri" pitchFamily="34" charset="-120"/>
               </a:rPr>
-              <a:t>The path or way something is heading, or instructions that tell you how to get somewhere.</a:t>
+              <a:t>The way you need to go or the instructions that tell you how to do something.</a:t>
             </a:r>
             <a:endParaRPr lang="en-US" sz="1200" dirty="0"/>
           </a:p>
@@ -42283,7 +44146,7 @@
                 <a:ea typeface="Calibri" pitchFamily="34" charset="-122"/>
                 <a:cs typeface="Calibri" pitchFamily="34" charset="-120"/>
               </a:rPr>
-              <a:t>Word Labs  •  wordlabs.app  •  Root: 'direct' = straight, guide, manage</a:t>
+              <a:t>Word Labs  •  wordlabs.app  •  Root: 'direct' = straight, guide, lead</a:t>
             </a:r>
             <a:endParaRPr lang="en-US" sz="800" dirty="0"/>
           </a:p>
@@ -42486,7 +44349,7 @@
                 <a:ea typeface="Calibri" pitchFamily="34" charset="-122"/>
                 <a:cs typeface="Calibri" pitchFamily="34" charset="-120"/>
               </a:rPr>
-              <a:t>The director gave the actors clear instructions before they began filming the scene.</a:t>
+              <a:t>Can you give me directions to the library from the front office?</a:t>
             </a:r>
             <a:endParaRPr lang="en-US" sz="1500" dirty="0"/>
           </a:p>
@@ -42650,7 +44513,7 @@
                 <a:ea typeface="Calibri" pitchFamily="34" charset="-122"/>
                 <a:cs typeface="Calibri" pitchFamily="34" charset="-120"/>
               </a:rPr>
-              <a:t>She walked directly to the library without stopping at the playground.</a:t>
+              <a:t>The director of the school play helped everyone know where to stand on stage.</a:t>
             </a:r>
             <a:endParaRPr lang="en-US" sz="1500" dirty="0"/>
           </a:p>
@@ -42814,7 +44677,7 @@
                 <a:ea typeface="Calibri" pitchFamily="34" charset="-122"/>
                 <a:cs typeface="Calibri" pitchFamily="34" charset="-120"/>
               </a:rPr>
-              <a:t>The teacher had to redirect the students when they started talking about something off topic.</a:t>
+              <a:t>We had to redirect our path when we found the gate was locked.</a:t>
             </a:r>
             <a:endParaRPr lang="en-US" sz="1500" dirty="0"/>
           </a:p>
